--- a/output/wordlabs-sad-3day.pptx
+++ b/output/wordlabs-sad-3day.pptx
@@ -4279,7 +4279,7 @@
                 <a:ea typeface="Calibri" pitchFamily="34" charset="-122"/>
                 <a:cs typeface="Calibri" pitchFamily="34" charset="-120"/>
               </a:rPr>
-              <a:t>Origin: Latin: tristis</a:t>
+              <a:t>Origin: Latin: satis</a:t>
             </a:r>
             <a:endParaRPr lang="en-US" sz="1300" dirty="0"/>
           </a:p>
@@ -5622,7 +5622,7 @@
                 <a:ea typeface="Trebuchet MS" pitchFamily="34" charset="-122"/>
                 <a:cs typeface="Trebuchet MS" pitchFamily="34" charset="-120"/>
               </a:rPr>
-              <a:t>1</a:t>
+              <a:t>0</a:t>
             </a:r>
             <a:pPr algn="ctr" indent="0" marL="0">
               <a:buNone/>
@@ -6040,7 +6040,7 @@
                 <a:ea typeface="Calibri" pitchFamily="34" charset="-122"/>
                 <a:cs typeface="Calibri" pitchFamily="34" charset="-120"/>
               </a:rPr>
-              <a:t>He looked </a:t>
+              <a:t>The </a:t>
             </a:r>
             <a:pPr algn="l" indent="0" marL="0">
               <a:buNone/>
@@ -6057,7 +6057,7 @@
                 <a:ea typeface="Calibri" pitchFamily="34" charset="-122"/>
                 <a:cs typeface="Calibri" pitchFamily="34" charset="-120"/>
               </a:rPr>
-              <a:t>sadly</a:t>
+              <a:t>saddening</a:t>
             </a:r>
             <a:pPr algn="l" indent="0" marL="0">
               <a:buNone/>
@@ -6071,7 +6071,7 @@
                 <a:ea typeface="Calibri" pitchFamily="34" charset="-122"/>
                 <a:cs typeface="Calibri" pitchFamily="34" charset="-120"/>
               </a:rPr>
-              <a:t> at the broken kite, and the </a:t>
+              <a:t> news made everyone feel </a:t>
             </a:r>
             <a:pPr algn="l" indent="0" marL="0">
               <a:buNone/>
@@ -6102,7 +6102,7 @@
                 <a:ea typeface="Calibri" pitchFamily="34" charset="-122"/>
                 <a:cs typeface="Calibri" pitchFamily="34" charset="-120"/>
               </a:rPr>
-              <a:t> on his face made his mum give him a hug.</a:t>
+              <a:t> throughout the whole school.</a:t>
             </a:r>
             <a:endParaRPr lang="en-US" sz="1800" dirty="0"/>
           </a:p>
@@ -6257,7 +6257,7 @@
                 <a:ea typeface="Trebuchet MS" pitchFamily="34" charset="-122"/>
                 <a:cs typeface="Trebuchet MS" pitchFamily="34" charset="-120"/>
               </a:rPr>
-              <a:t>sadly</a:t>
+              <a:t>saddening</a:t>
             </a:r>
             <a:endParaRPr lang="en-US" sz="1400" dirty="0"/>
           </a:p>
@@ -6855,7 +6855,7 @@
                 <a:ea typeface="Trebuchet MS" pitchFamily="34" charset="-122"/>
                 <a:cs typeface="Trebuchet MS" pitchFamily="34" charset="-120"/>
               </a:rPr>
-              <a:t>sadly</a:t>
+              <a:t>saddening</a:t>
             </a:r>
             <a:endParaRPr lang="en-US" sz="2800" dirty="0"/>
           </a:p>
@@ -7682,7 +7682,7 @@
                 <a:ea typeface="Trebuchet MS" pitchFamily="34" charset="-122"/>
                 <a:cs typeface="Trebuchet MS" pitchFamily="34" charset="-120"/>
               </a:rPr>
-              <a:t>sadly</a:t>
+              <a:t>saddening</a:t>
             </a:r>
             <a:endParaRPr lang="en-US" sz="2800" dirty="0"/>
           </a:p>
@@ -7762,8 +7762,8 @@
         </p:nvSpPr>
         <p:spPr>
           <a:xfrm>
-            <a:off x="2938272" y="2258568"/>
-            <a:ext cx="1828800" cy="292608"/>
+            <a:off x="1989734" y="2258568"/>
+            <a:ext cx="1581912" cy="292608"/>
           </a:xfrm>
           <a:prstGeom prst="rect">
             <a:avLst>
@@ -7796,8 +7796,8 @@
         </p:nvSpPr>
         <p:spPr>
           <a:xfrm>
-            <a:off x="2938272" y="2258568"/>
-            <a:ext cx="1828800" cy="292608"/>
+            <a:off x="1989734" y="2258568"/>
+            <a:ext cx="1581912" cy="292608"/>
           </a:xfrm>
           <a:prstGeom prst="rect">
             <a:avLst/>
@@ -7835,8 +7835,8 @@
         </p:nvSpPr>
         <p:spPr>
           <a:xfrm>
-            <a:off x="2938272" y="2569464"/>
-            <a:ext cx="1828800" cy="201168"/>
+            <a:off x="1989734" y="2569464"/>
+            <a:ext cx="1581912" cy="201168"/>
           </a:xfrm>
           <a:prstGeom prst="rect">
             <a:avLst/>
@@ -7874,8 +7874,8 @@
         </p:nvSpPr>
         <p:spPr>
           <a:xfrm>
-            <a:off x="5803392" y="2258568"/>
-            <a:ext cx="1828800" cy="292608"/>
+            <a:off x="3659429" y="2258568"/>
+            <a:ext cx="1581912" cy="292608"/>
           </a:xfrm>
           <a:prstGeom prst="rect">
             <a:avLst>
@@ -7908,8 +7908,8 @@
         </p:nvSpPr>
         <p:spPr>
           <a:xfrm>
-            <a:off x="5803392" y="2258568"/>
-            <a:ext cx="1828800" cy="292608"/>
+            <a:off x="3659429" y="2258568"/>
+            <a:ext cx="1581912" cy="292608"/>
           </a:xfrm>
           <a:prstGeom prst="rect">
             <a:avLst/>
@@ -7933,7 +7933,7 @@
                 <a:ea typeface="Trebuchet MS" pitchFamily="34" charset="-122"/>
                 <a:cs typeface="Trebuchet MS" pitchFamily="34" charset="-120"/>
               </a:rPr>
-              <a:t>ly</a:t>
+              <a:t>d</a:t>
             </a:r>
             <a:endParaRPr lang="en-US" sz="1300" dirty="0"/>
           </a:p>
@@ -7947,8 +7947,8 @@
         </p:nvSpPr>
         <p:spPr>
           <a:xfrm>
-            <a:off x="5803392" y="2569464"/>
-            <a:ext cx="1828800" cy="201168"/>
+            <a:off x="3659429" y="2569464"/>
+            <a:ext cx="1581912" cy="201168"/>
           </a:xfrm>
           <a:prstGeom prst="rect">
             <a:avLst/>
@@ -7972,7 +7972,7 @@
                 <a:ea typeface="Calibri" pitchFamily="34" charset="-122"/>
                 <a:cs typeface="Calibri" pitchFamily="34" charset="-120"/>
               </a:rPr>
-              <a:t>in a way that is</a:t>
+              <a:t>doubled consonant before suffix</a:t>
             </a:r>
             <a:endParaRPr lang="en-US" sz="850" dirty="0"/>
           </a:p>
@@ -7980,7 +7980,270 @@
       </p:sp>
       <p:sp>
         <p:nvSpPr>
-          <p:cNvPr id="22" name="Shape 20"/>
+          <p:cNvPr id="22" name="Text 20"/>
+          <p:cNvSpPr/>
+          <p:nvPr/>
+        </p:nvSpPr>
+        <p:spPr>
+          <a:xfrm>
+            <a:off x="3659429" y="2752344"/>
+            <a:ext cx="1581912" cy="182880"/>
+          </a:xfrm>
+          <a:prstGeom prst="rect">
+            <a:avLst/>
+          </a:prstGeom>
+          <a:noFill/>
+          <a:ln/>
+        </p:spPr>
+        <p:txBody>
+          <a:bodyPr wrap="square" lIns="0" tIns="0" rIns="0" bIns="0" rtlCol="0" anchor="t"/>
+          <a:lstStyle/>
+          <a:p>
+            <a:pPr algn="ctr" indent="0" marL="0">
+              <a:buNone/>
+            </a:pPr>
+            <a:r>
+              <a:rPr lang="en-US" sz="700" i="1" dirty="0">
+                <a:solidFill>
+                  <a:srgbClr val="94A3B8"/>
+                </a:solidFill>
+                <a:latin typeface="Calibri" pitchFamily="34" charset="0"/>
+                <a:ea typeface="Calibri" pitchFamily="34" charset="-122"/>
+                <a:cs typeface="Calibri" pitchFamily="34" charset="-120"/>
+              </a:rPr>
+              <a:t>final consonant doubled before vowel suffix</a:t>
+            </a:r>
+            <a:endParaRPr lang="en-US" sz="700" dirty="0"/>
+          </a:p>
+        </p:txBody>
+      </p:sp>
+      <p:sp>
+        <p:nvSpPr>
+          <p:cNvPr id="23" name="Shape 21"/>
+          <p:cNvSpPr/>
+          <p:nvPr/>
+        </p:nvSpPr>
+        <p:spPr>
+          <a:xfrm>
+            <a:off x="5329123" y="2258568"/>
+            <a:ext cx="1581912" cy="292608"/>
+          </a:xfrm>
+          <a:prstGeom prst="rect">
+            <a:avLst>
+              <a:gd name="adj" fmla="val 25000"/>
+            </a:avLst>
+          </a:prstGeom>
+          <a:solidFill>
+            <a:srgbClr val="FCE7F3"/>
+          </a:solidFill>
+          <a:ln w="19050">
+            <a:solidFill>
+              <a:srgbClr val="DB2777"/>
+            </a:solidFill>
+            <a:prstDash val="solid"/>
+          </a:ln>
+          <a:effectLst>
+            <a:outerShdw sx="100000" sy="100000" kx="0" ky="0" algn="bl" rotWithShape="0" blurRad="101600" dist="38100" dir="8100000">
+              <a:srgbClr val="000000">
+                <a:alpha val="12000"/>
+              </a:srgbClr>
+            </a:outerShdw>
+          </a:effectLst>
+        </p:spPr>
+      </p:sp>
+      <p:sp>
+        <p:nvSpPr>
+          <p:cNvPr id="24" name="Text 22"/>
+          <p:cNvSpPr/>
+          <p:nvPr/>
+        </p:nvSpPr>
+        <p:spPr>
+          <a:xfrm>
+            <a:off x="5329123" y="2258568"/>
+            <a:ext cx="1581912" cy="292608"/>
+          </a:xfrm>
+          <a:prstGeom prst="rect">
+            <a:avLst/>
+          </a:prstGeom>
+          <a:noFill/>
+          <a:ln/>
+        </p:spPr>
+        <p:txBody>
+          <a:bodyPr wrap="square" lIns="0" tIns="0" rIns="0" bIns="0" rtlCol="0" anchor="ctr"/>
+          <a:lstStyle/>
+          <a:p>
+            <a:pPr algn="ctr" indent="0" marL="0">
+              <a:buNone/>
+            </a:pPr>
+            <a:r>
+              <a:rPr lang="en-US" sz="1300" b="1" dirty="0">
+                <a:solidFill>
+                  <a:srgbClr val="9D174D"/>
+                </a:solidFill>
+                <a:latin typeface="Trebuchet MS" pitchFamily="34" charset="0"/>
+                <a:ea typeface="Trebuchet MS" pitchFamily="34" charset="-122"/>
+                <a:cs typeface="Trebuchet MS" pitchFamily="34" charset="-120"/>
+              </a:rPr>
+              <a:t>en</a:t>
+            </a:r>
+            <a:endParaRPr lang="en-US" sz="1300" dirty="0"/>
+          </a:p>
+        </p:txBody>
+      </p:sp>
+      <p:sp>
+        <p:nvSpPr>
+          <p:cNvPr id="25" name="Text 23"/>
+          <p:cNvSpPr/>
+          <p:nvPr/>
+        </p:nvSpPr>
+        <p:spPr>
+          <a:xfrm>
+            <a:off x="5329123" y="2569464"/>
+            <a:ext cx="1581912" cy="201168"/>
+          </a:xfrm>
+          <a:prstGeom prst="rect">
+            <a:avLst/>
+          </a:prstGeom>
+          <a:noFill/>
+          <a:ln/>
+        </p:spPr>
+        <p:txBody>
+          <a:bodyPr wrap="square" lIns="0" tIns="0" rIns="0" bIns="0" rtlCol="0" anchor="t"/>
+          <a:lstStyle/>
+          <a:p>
+            <a:pPr algn="ctr" indent="0" marL="0">
+              <a:buNone/>
+            </a:pPr>
+            <a:r>
+              <a:rPr lang="en-US" sz="850" dirty="0">
+                <a:solidFill>
+                  <a:srgbClr val="475569"/>
+                </a:solidFill>
+                <a:latin typeface="Calibri" pitchFamily="34" charset="0"/>
+                <a:ea typeface="Calibri" pitchFamily="34" charset="-122"/>
+                <a:cs typeface="Calibri" pitchFamily="34" charset="-120"/>
+              </a:rPr>
+              <a:t>to make or become</a:t>
+            </a:r>
+            <a:endParaRPr lang="en-US" sz="850" dirty="0"/>
+          </a:p>
+        </p:txBody>
+      </p:sp>
+      <p:sp>
+        <p:nvSpPr>
+          <p:cNvPr id="26" name="Shape 24"/>
+          <p:cNvSpPr/>
+          <p:nvPr/>
+        </p:nvSpPr>
+        <p:spPr>
+          <a:xfrm>
+            <a:off x="6998818" y="2258568"/>
+            <a:ext cx="1581912" cy="292608"/>
+          </a:xfrm>
+          <a:prstGeom prst="rect">
+            <a:avLst>
+              <a:gd name="adj" fmla="val 25000"/>
+            </a:avLst>
+          </a:prstGeom>
+          <a:solidFill>
+            <a:srgbClr val="FCE7F3"/>
+          </a:solidFill>
+          <a:ln w="19050">
+            <a:solidFill>
+              <a:srgbClr val="DB2777"/>
+            </a:solidFill>
+            <a:prstDash val="solid"/>
+          </a:ln>
+          <a:effectLst>
+            <a:outerShdw sx="100000" sy="100000" kx="0" ky="0" algn="bl" rotWithShape="0" blurRad="101600" dist="38100" dir="8100000">
+              <a:srgbClr val="000000">
+                <a:alpha val="12000"/>
+              </a:srgbClr>
+            </a:outerShdw>
+          </a:effectLst>
+        </p:spPr>
+      </p:sp>
+      <p:sp>
+        <p:nvSpPr>
+          <p:cNvPr id="27" name="Text 25"/>
+          <p:cNvSpPr/>
+          <p:nvPr/>
+        </p:nvSpPr>
+        <p:spPr>
+          <a:xfrm>
+            <a:off x="6998818" y="2258568"/>
+            <a:ext cx="1581912" cy="292608"/>
+          </a:xfrm>
+          <a:prstGeom prst="rect">
+            <a:avLst/>
+          </a:prstGeom>
+          <a:noFill/>
+          <a:ln/>
+        </p:spPr>
+        <p:txBody>
+          <a:bodyPr wrap="square" lIns="0" tIns="0" rIns="0" bIns="0" rtlCol="0" anchor="ctr"/>
+          <a:lstStyle/>
+          <a:p>
+            <a:pPr algn="ctr" indent="0" marL="0">
+              <a:buNone/>
+            </a:pPr>
+            <a:r>
+              <a:rPr lang="en-US" sz="1300" b="1" dirty="0">
+                <a:solidFill>
+                  <a:srgbClr val="9D174D"/>
+                </a:solidFill>
+                <a:latin typeface="Trebuchet MS" pitchFamily="34" charset="0"/>
+                <a:ea typeface="Trebuchet MS" pitchFamily="34" charset="-122"/>
+                <a:cs typeface="Trebuchet MS" pitchFamily="34" charset="-120"/>
+              </a:rPr>
+              <a:t>ing</a:t>
+            </a:r>
+            <a:endParaRPr lang="en-US" sz="1300" dirty="0"/>
+          </a:p>
+        </p:txBody>
+      </p:sp>
+      <p:sp>
+        <p:nvSpPr>
+          <p:cNvPr id="28" name="Text 26"/>
+          <p:cNvSpPr/>
+          <p:nvPr/>
+        </p:nvSpPr>
+        <p:spPr>
+          <a:xfrm>
+            <a:off x="6998818" y="2569464"/>
+            <a:ext cx="1581912" cy="201168"/>
+          </a:xfrm>
+          <a:prstGeom prst="rect">
+            <a:avLst/>
+          </a:prstGeom>
+          <a:noFill/>
+          <a:ln/>
+        </p:spPr>
+        <p:txBody>
+          <a:bodyPr wrap="square" lIns="0" tIns="0" rIns="0" bIns="0" rtlCol="0" anchor="t"/>
+          <a:lstStyle/>
+          <a:p>
+            <a:pPr algn="ctr" indent="0" marL="0">
+              <a:buNone/>
+            </a:pPr>
+            <a:r>
+              <a:rPr lang="en-US" sz="850" dirty="0">
+                <a:solidFill>
+                  <a:srgbClr val="475569"/>
+                </a:solidFill>
+                <a:latin typeface="Calibri" pitchFamily="34" charset="0"/>
+                <a:ea typeface="Calibri" pitchFamily="34" charset="-122"/>
+                <a:cs typeface="Calibri" pitchFamily="34" charset="-120"/>
+              </a:rPr>
+              <a:t>ongoing action or process</a:t>
+            </a:r>
+            <a:endParaRPr lang="en-US" sz="850" dirty="0"/>
+          </a:p>
+        </p:txBody>
+      </p:sp>
+      <p:sp>
+        <p:nvSpPr>
+          <p:cNvPr id="29" name="Shape 27"/>
           <p:cNvSpPr/>
           <p:nvPr/>
         </p:nvSpPr>
@@ -8007,7 +8270,7 @@
       </p:sp>
       <p:sp>
         <p:nvSpPr>
-          <p:cNvPr id="23" name="Text 21"/>
+          <p:cNvPr id="30" name="Text 28"/>
           <p:cNvSpPr/>
           <p:nvPr/>
         </p:nvSpPr>
@@ -8046,7 +8309,7 @@
       </p:sp>
       <p:sp>
         <p:nvSpPr>
-          <p:cNvPr id="24" name="Shape 22"/>
+          <p:cNvPr id="31" name="Shape 29"/>
           <p:cNvSpPr/>
           <p:nvPr/>
         </p:nvSpPr>
@@ -8073,7 +8336,7 @@
       </p:sp>
       <p:sp>
         <p:nvSpPr>
-          <p:cNvPr id="25" name="Text 23"/>
+          <p:cNvPr id="32" name="Text 30"/>
           <p:cNvSpPr/>
           <p:nvPr/>
         </p:nvSpPr>
@@ -8112,7 +8375,7 @@
       </p:sp>
       <p:sp>
         <p:nvSpPr>
-          <p:cNvPr id="26" name="Shape 24"/>
+          <p:cNvPr id="33" name="Shape 31"/>
           <p:cNvSpPr/>
           <p:nvPr/>
         </p:nvSpPr>
@@ -8139,7 +8402,7 @@
       </p:sp>
       <p:sp>
         <p:nvSpPr>
-          <p:cNvPr id="27" name="Text 25"/>
+          <p:cNvPr id="34" name="Text 32"/>
           <p:cNvSpPr/>
           <p:nvPr/>
         </p:nvSpPr>
@@ -8178,7 +8441,7 @@
       </p:sp>
       <p:sp>
         <p:nvSpPr>
-          <p:cNvPr id="28" name="Shape 26"/>
+          <p:cNvPr id="35" name="Shape 33"/>
           <p:cNvSpPr/>
           <p:nvPr/>
         </p:nvSpPr>
@@ -8205,7 +8468,7 @@
       </p:sp>
       <p:sp>
         <p:nvSpPr>
-          <p:cNvPr id="29" name="Text 27"/>
+          <p:cNvPr id="36" name="Text 34"/>
           <p:cNvSpPr/>
           <p:nvPr/>
         </p:nvSpPr>
@@ -8667,7 +8930,7 @@
                 <a:ea typeface="Trebuchet MS" pitchFamily="34" charset="-122"/>
                 <a:cs typeface="Trebuchet MS" pitchFamily="34" charset="-120"/>
               </a:rPr>
-              <a:t>sadly</a:t>
+              <a:t>saddening</a:t>
             </a:r>
             <a:endParaRPr lang="en-US" sz="2800" dirty="0"/>
           </a:p>
@@ -8747,8 +9010,8 @@
         </p:nvSpPr>
         <p:spPr>
           <a:xfrm>
-            <a:off x="2938272" y="2258568"/>
-            <a:ext cx="1828800" cy="292608"/>
+            <a:off x="1989734" y="2258568"/>
+            <a:ext cx="1581912" cy="292608"/>
           </a:xfrm>
           <a:prstGeom prst="rect">
             <a:avLst>
@@ -8781,8 +9044,8 @@
         </p:nvSpPr>
         <p:spPr>
           <a:xfrm>
-            <a:off x="2938272" y="2258568"/>
-            <a:ext cx="1828800" cy="292608"/>
+            <a:off x="1989734" y="2258568"/>
+            <a:ext cx="1581912" cy="292608"/>
           </a:xfrm>
           <a:prstGeom prst="rect">
             <a:avLst/>
@@ -8820,8 +9083,8 @@
         </p:nvSpPr>
         <p:spPr>
           <a:xfrm>
-            <a:off x="2938272" y="2569464"/>
-            <a:ext cx="1828800" cy="201168"/>
+            <a:off x="1989734" y="2569464"/>
+            <a:ext cx="1581912" cy="201168"/>
           </a:xfrm>
           <a:prstGeom prst="rect">
             <a:avLst/>
@@ -8859,8 +9122,8 @@
         </p:nvSpPr>
         <p:spPr>
           <a:xfrm>
-            <a:off x="5803392" y="2258568"/>
-            <a:ext cx="1828800" cy="292608"/>
+            <a:off x="3659429" y="2258568"/>
+            <a:ext cx="1581912" cy="292608"/>
           </a:xfrm>
           <a:prstGeom prst="rect">
             <a:avLst>
@@ -8893,8 +9156,8 @@
         </p:nvSpPr>
         <p:spPr>
           <a:xfrm>
-            <a:off x="5803392" y="2258568"/>
-            <a:ext cx="1828800" cy="292608"/>
+            <a:off x="3659429" y="2258568"/>
+            <a:ext cx="1581912" cy="292608"/>
           </a:xfrm>
           <a:prstGeom prst="rect">
             <a:avLst/>
@@ -8918,7 +9181,7 @@
                 <a:ea typeface="Trebuchet MS" pitchFamily="34" charset="-122"/>
                 <a:cs typeface="Trebuchet MS" pitchFamily="34" charset="-120"/>
               </a:rPr>
-              <a:t>ly</a:t>
+              <a:t>d</a:t>
             </a:r>
             <a:endParaRPr lang="en-US" sz="1300" dirty="0"/>
           </a:p>
@@ -8932,8 +9195,8 @@
         </p:nvSpPr>
         <p:spPr>
           <a:xfrm>
-            <a:off x="5803392" y="2569464"/>
-            <a:ext cx="1828800" cy="201168"/>
+            <a:off x="3659429" y="2569464"/>
+            <a:ext cx="1581912" cy="201168"/>
           </a:xfrm>
           <a:prstGeom prst="rect">
             <a:avLst/>
@@ -8957,7 +9220,7 @@
                 <a:ea typeface="Calibri" pitchFamily="34" charset="-122"/>
                 <a:cs typeface="Calibri" pitchFamily="34" charset="-120"/>
               </a:rPr>
-              <a:t>in a way that is</a:t>
+              <a:t>doubled consonant before suffix</a:t>
             </a:r>
             <a:endParaRPr lang="en-US" sz="850" dirty="0"/>
           </a:p>
@@ -8965,7 +9228,270 @@
       </p:sp>
       <p:sp>
         <p:nvSpPr>
-          <p:cNvPr id="22" name="Shape 20"/>
+          <p:cNvPr id="22" name="Text 20"/>
+          <p:cNvSpPr/>
+          <p:nvPr/>
+        </p:nvSpPr>
+        <p:spPr>
+          <a:xfrm>
+            <a:off x="3659429" y="2752344"/>
+            <a:ext cx="1581912" cy="182880"/>
+          </a:xfrm>
+          <a:prstGeom prst="rect">
+            <a:avLst/>
+          </a:prstGeom>
+          <a:noFill/>
+          <a:ln/>
+        </p:spPr>
+        <p:txBody>
+          <a:bodyPr wrap="square" lIns="0" tIns="0" rIns="0" bIns="0" rtlCol="0" anchor="t"/>
+          <a:lstStyle/>
+          <a:p>
+            <a:pPr algn="ctr" indent="0" marL="0">
+              <a:buNone/>
+            </a:pPr>
+            <a:r>
+              <a:rPr lang="en-US" sz="700" i="1" dirty="0">
+                <a:solidFill>
+                  <a:srgbClr val="94A3B8"/>
+                </a:solidFill>
+                <a:latin typeface="Calibri" pitchFamily="34" charset="0"/>
+                <a:ea typeface="Calibri" pitchFamily="34" charset="-122"/>
+                <a:cs typeface="Calibri" pitchFamily="34" charset="-120"/>
+              </a:rPr>
+              <a:t>final consonant doubled before vowel suffix</a:t>
+            </a:r>
+            <a:endParaRPr lang="en-US" sz="700" dirty="0"/>
+          </a:p>
+        </p:txBody>
+      </p:sp>
+      <p:sp>
+        <p:nvSpPr>
+          <p:cNvPr id="23" name="Shape 21"/>
+          <p:cNvSpPr/>
+          <p:nvPr/>
+        </p:nvSpPr>
+        <p:spPr>
+          <a:xfrm>
+            <a:off x="5329123" y="2258568"/>
+            <a:ext cx="1581912" cy="292608"/>
+          </a:xfrm>
+          <a:prstGeom prst="rect">
+            <a:avLst>
+              <a:gd name="adj" fmla="val 25000"/>
+            </a:avLst>
+          </a:prstGeom>
+          <a:solidFill>
+            <a:srgbClr val="FCE7F3"/>
+          </a:solidFill>
+          <a:ln w="19050">
+            <a:solidFill>
+              <a:srgbClr val="DB2777"/>
+            </a:solidFill>
+            <a:prstDash val="solid"/>
+          </a:ln>
+          <a:effectLst>
+            <a:outerShdw sx="100000" sy="100000" kx="0" ky="0" algn="bl" rotWithShape="0" blurRad="101600" dist="38100" dir="8100000">
+              <a:srgbClr val="000000">
+                <a:alpha val="12000"/>
+              </a:srgbClr>
+            </a:outerShdw>
+          </a:effectLst>
+        </p:spPr>
+      </p:sp>
+      <p:sp>
+        <p:nvSpPr>
+          <p:cNvPr id="24" name="Text 22"/>
+          <p:cNvSpPr/>
+          <p:nvPr/>
+        </p:nvSpPr>
+        <p:spPr>
+          <a:xfrm>
+            <a:off x="5329123" y="2258568"/>
+            <a:ext cx="1581912" cy="292608"/>
+          </a:xfrm>
+          <a:prstGeom prst="rect">
+            <a:avLst/>
+          </a:prstGeom>
+          <a:noFill/>
+          <a:ln/>
+        </p:spPr>
+        <p:txBody>
+          <a:bodyPr wrap="square" lIns="0" tIns="0" rIns="0" bIns="0" rtlCol="0" anchor="ctr"/>
+          <a:lstStyle/>
+          <a:p>
+            <a:pPr algn="ctr" indent="0" marL="0">
+              <a:buNone/>
+            </a:pPr>
+            <a:r>
+              <a:rPr lang="en-US" sz="1300" b="1" dirty="0">
+                <a:solidFill>
+                  <a:srgbClr val="9D174D"/>
+                </a:solidFill>
+                <a:latin typeface="Trebuchet MS" pitchFamily="34" charset="0"/>
+                <a:ea typeface="Trebuchet MS" pitchFamily="34" charset="-122"/>
+                <a:cs typeface="Trebuchet MS" pitchFamily="34" charset="-120"/>
+              </a:rPr>
+              <a:t>en</a:t>
+            </a:r>
+            <a:endParaRPr lang="en-US" sz="1300" dirty="0"/>
+          </a:p>
+        </p:txBody>
+      </p:sp>
+      <p:sp>
+        <p:nvSpPr>
+          <p:cNvPr id="25" name="Text 23"/>
+          <p:cNvSpPr/>
+          <p:nvPr/>
+        </p:nvSpPr>
+        <p:spPr>
+          <a:xfrm>
+            <a:off x="5329123" y="2569464"/>
+            <a:ext cx="1581912" cy="201168"/>
+          </a:xfrm>
+          <a:prstGeom prst="rect">
+            <a:avLst/>
+          </a:prstGeom>
+          <a:noFill/>
+          <a:ln/>
+        </p:spPr>
+        <p:txBody>
+          <a:bodyPr wrap="square" lIns="0" tIns="0" rIns="0" bIns="0" rtlCol="0" anchor="t"/>
+          <a:lstStyle/>
+          <a:p>
+            <a:pPr algn="ctr" indent="0" marL="0">
+              <a:buNone/>
+            </a:pPr>
+            <a:r>
+              <a:rPr lang="en-US" sz="850" dirty="0">
+                <a:solidFill>
+                  <a:srgbClr val="475569"/>
+                </a:solidFill>
+                <a:latin typeface="Calibri" pitchFamily="34" charset="0"/>
+                <a:ea typeface="Calibri" pitchFamily="34" charset="-122"/>
+                <a:cs typeface="Calibri" pitchFamily="34" charset="-120"/>
+              </a:rPr>
+              <a:t>to make or become</a:t>
+            </a:r>
+            <a:endParaRPr lang="en-US" sz="850" dirty="0"/>
+          </a:p>
+        </p:txBody>
+      </p:sp>
+      <p:sp>
+        <p:nvSpPr>
+          <p:cNvPr id="26" name="Shape 24"/>
+          <p:cNvSpPr/>
+          <p:nvPr/>
+        </p:nvSpPr>
+        <p:spPr>
+          <a:xfrm>
+            <a:off x="6998818" y="2258568"/>
+            <a:ext cx="1581912" cy="292608"/>
+          </a:xfrm>
+          <a:prstGeom prst="rect">
+            <a:avLst>
+              <a:gd name="adj" fmla="val 25000"/>
+            </a:avLst>
+          </a:prstGeom>
+          <a:solidFill>
+            <a:srgbClr val="FCE7F3"/>
+          </a:solidFill>
+          <a:ln w="19050">
+            <a:solidFill>
+              <a:srgbClr val="DB2777"/>
+            </a:solidFill>
+            <a:prstDash val="solid"/>
+          </a:ln>
+          <a:effectLst>
+            <a:outerShdw sx="100000" sy="100000" kx="0" ky="0" algn="bl" rotWithShape="0" blurRad="101600" dist="38100" dir="8100000">
+              <a:srgbClr val="000000">
+                <a:alpha val="12000"/>
+              </a:srgbClr>
+            </a:outerShdw>
+          </a:effectLst>
+        </p:spPr>
+      </p:sp>
+      <p:sp>
+        <p:nvSpPr>
+          <p:cNvPr id="27" name="Text 25"/>
+          <p:cNvSpPr/>
+          <p:nvPr/>
+        </p:nvSpPr>
+        <p:spPr>
+          <a:xfrm>
+            <a:off x="6998818" y="2258568"/>
+            <a:ext cx="1581912" cy="292608"/>
+          </a:xfrm>
+          <a:prstGeom prst="rect">
+            <a:avLst/>
+          </a:prstGeom>
+          <a:noFill/>
+          <a:ln/>
+        </p:spPr>
+        <p:txBody>
+          <a:bodyPr wrap="square" lIns="0" tIns="0" rIns="0" bIns="0" rtlCol="0" anchor="ctr"/>
+          <a:lstStyle/>
+          <a:p>
+            <a:pPr algn="ctr" indent="0" marL="0">
+              <a:buNone/>
+            </a:pPr>
+            <a:r>
+              <a:rPr lang="en-US" sz="1300" b="1" dirty="0">
+                <a:solidFill>
+                  <a:srgbClr val="9D174D"/>
+                </a:solidFill>
+                <a:latin typeface="Trebuchet MS" pitchFamily="34" charset="0"/>
+                <a:ea typeface="Trebuchet MS" pitchFamily="34" charset="-122"/>
+                <a:cs typeface="Trebuchet MS" pitchFamily="34" charset="-120"/>
+              </a:rPr>
+              <a:t>ing</a:t>
+            </a:r>
+            <a:endParaRPr lang="en-US" sz="1300" dirty="0"/>
+          </a:p>
+        </p:txBody>
+      </p:sp>
+      <p:sp>
+        <p:nvSpPr>
+          <p:cNvPr id="28" name="Text 26"/>
+          <p:cNvSpPr/>
+          <p:nvPr/>
+        </p:nvSpPr>
+        <p:spPr>
+          <a:xfrm>
+            <a:off x="6998818" y="2569464"/>
+            <a:ext cx="1581912" cy="201168"/>
+          </a:xfrm>
+          <a:prstGeom prst="rect">
+            <a:avLst/>
+          </a:prstGeom>
+          <a:noFill/>
+          <a:ln/>
+        </p:spPr>
+        <p:txBody>
+          <a:bodyPr wrap="square" lIns="0" tIns="0" rIns="0" bIns="0" rtlCol="0" anchor="t"/>
+          <a:lstStyle/>
+          <a:p>
+            <a:pPr algn="ctr" indent="0" marL="0">
+              <a:buNone/>
+            </a:pPr>
+            <a:r>
+              <a:rPr lang="en-US" sz="850" dirty="0">
+                <a:solidFill>
+                  <a:srgbClr val="475569"/>
+                </a:solidFill>
+                <a:latin typeface="Calibri" pitchFamily="34" charset="0"/>
+                <a:ea typeface="Calibri" pitchFamily="34" charset="-122"/>
+                <a:cs typeface="Calibri" pitchFamily="34" charset="-120"/>
+              </a:rPr>
+              <a:t>ongoing action or process</a:t>
+            </a:r>
+            <a:endParaRPr lang="en-US" sz="850" dirty="0"/>
+          </a:p>
+        </p:txBody>
+      </p:sp>
+      <p:sp>
+        <p:nvSpPr>
+          <p:cNvPr id="29" name="Shape 27"/>
           <p:cNvSpPr/>
           <p:nvPr/>
         </p:nvSpPr>
@@ -8992,7 +9518,7 @@
       </p:sp>
       <p:sp>
         <p:nvSpPr>
-          <p:cNvPr id="23" name="Text 21"/>
+          <p:cNvPr id="30" name="Text 28"/>
           <p:cNvSpPr/>
           <p:nvPr/>
         </p:nvSpPr>
@@ -9031,7 +9557,7 @@
       </p:sp>
       <p:sp>
         <p:nvSpPr>
-          <p:cNvPr id="24" name="Shape 22"/>
+          <p:cNvPr id="31" name="Shape 29"/>
           <p:cNvSpPr/>
           <p:nvPr/>
         </p:nvSpPr>
@@ -9058,13 +9584,13 @@
       </p:sp>
       <p:sp>
         <p:nvSpPr>
-          <p:cNvPr id="25" name="Shape 23"/>
-          <p:cNvSpPr/>
-          <p:nvPr/>
-        </p:nvSpPr>
-        <p:spPr>
-          <a:xfrm>
-            <a:off x="2999232" y="3364992"/>
+          <p:cNvPr id="32" name="Shape 30"/>
+          <p:cNvSpPr/>
+          <p:nvPr/>
+        </p:nvSpPr>
+        <p:spPr>
+          <a:xfrm>
+            <a:off x="2313432" y="3364992"/>
             <a:ext cx="1645920" cy="475488"/>
           </a:xfrm>
           <a:prstGeom prst="rect">
@@ -9085,13 +9611,13 @@
       </p:sp>
       <p:sp>
         <p:nvSpPr>
-          <p:cNvPr id="26" name="Text 24"/>
-          <p:cNvSpPr/>
-          <p:nvPr/>
-        </p:nvSpPr>
-        <p:spPr>
-          <a:xfrm>
-            <a:off x="2999232" y="3364992"/>
+          <p:cNvPr id="33" name="Text 31"/>
+          <p:cNvSpPr/>
+          <p:nvPr/>
+        </p:nvSpPr>
+        <p:spPr>
+          <a:xfrm>
+            <a:off x="2313432" y="3364992"/>
             <a:ext cx="1645920" cy="475488"/>
           </a:xfrm>
           <a:prstGeom prst="rect">
@@ -9124,14 +9650,14 @@
       </p:sp>
       <p:sp>
         <p:nvSpPr>
-          <p:cNvPr id="27" name="Text 25"/>
-          <p:cNvSpPr/>
-          <p:nvPr/>
-        </p:nvSpPr>
-        <p:spPr>
-          <a:xfrm>
-            <a:off x="4645152" y="3364992"/>
-            <a:ext cx="1097280" cy="475488"/>
+          <p:cNvPr id="34" name="Text 32"/>
+          <p:cNvSpPr/>
+          <p:nvPr/>
+        </p:nvSpPr>
+        <p:spPr>
+          <a:xfrm>
+            <a:off x="3959352" y="3364992"/>
+            <a:ext cx="411480" cy="475488"/>
           </a:xfrm>
           <a:prstGeom prst="rect">
             <a:avLst/>
@@ -9163,13 +9689,13 @@
       </p:sp>
       <p:sp>
         <p:nvSpPr>
-          <p:cNvPr id="28" name="Shape 26"/>
-          <p:cNvSpPr/>
-          <p:nvPr/>
-        </p:nvSpPr>
-        <p:spPr>
-          <a:xfrm>
-            <a:off x="5742432" y="3364992"/>
+          <p:cNvPr id="35" name="Shape 33"/>
+          <p:cNvSpPr/>
+          <p:nvPr/>
+        </p:nvSpPr>
+        <p:spPr>
+          <a:xfrm>
+            <a:off x="4370832" y="3364992"/>
             <a:ext cx="1645920" cy="475488"/>
           </a:xfrm>
           <a:prstGeom prst="rect">
@@ -9190,13 +9716,13 @@
       </p:sp>
       <p:sp>
         <p:nvSpPr>
-          <p:cNvPr id="29" name="Text 27"/>
-          <p:cNvSpPr/>
-          <p:nvPr/>
-        </p:nvSpPr>
-        <p:spPr>
-          <a:xfrm>
-            <a:off x="5742432" y="3364992"/>
+          <p:cNvPr id="36" name="Text 34"/>
+          <p:cNvSpPr/>
+          <p:nvPr/>
+        </p:nvSpPr>
+        <p:spPr>
+          <a:xfrm>
+            <a:off x="4370832" y="3364992"/>
             <a:ext cx="1645920" cy="475488"/>
           </a:xfrm>
           <a:prstGeom prst="rect">
@@ -9221,7 +9747,7 @@
                 <a:ea typeface="Trebuchet MS" pitchFamily="34" charset="-122"/>
                 <a:cs typeface="Trebuchet MS" pitchFamily="34" charset="-120"/>
               </a:rPr>
-              <a:t>ly</a:t>
+              <a:t>den</a:t>
             </a:r>
             <a:endParaRPr lang="en-US" sz="1400" dirty="0"/>
           </a:p>
@@ -9229,7 +9755,112 @@
       </p:sp>
       <p:sp>
         <p:nvSpPr>
-          <p:cNvPr id="30" name="Shape 28"/>
+          <p:cNvPr id="37" name="Text 35"/>
+          <p:cNvSpPr/>
+          <p:nvPr/>
+        </p:nvSpPr>
+        <p:spPr>
+          <a:xfrm>
+            <a:off x="6016752" y="3364992"/>
+            <a:ext cx="411480" cy="475488"/>
+          </a:xfrm>
+          <a:prstGeom prst="rect">
+            <a:avLst/>
+          </a:prstGeom>
+          <a:noFill/>
+          <a:ln/>
+        </p:spPr>
+        <p:txBody>
+          <a:bodyPr wrap="square" lIns="0" tIns="0" rIns="0" bIns="0" rtlCol="0" anchor="ctr"/>
+          <a:lstStyle/>
+          <a:p>
+            <a:pPr algn="ctr" indent="0" marL="0">
+              <a:buNone/>
+            </a:pPr>
+            <a:r>
+              <a:rPr lang="en-US" sz="1600" b="1" dirty="0">
+                <a:solidFill>
+                  <a:srgbClr val="0D9488"/>
+                </a:solidFill>
+                <a:latin typeface="Trebuchet MS" pitchFamily="34" charset="0"/>
+                <a:ea typeface="Trebuchet MS" pitchFamily="34" charset="-122"/>
+                <a:cs typeface="Trebuchet MS" pitchFamily="34" charset="-120"/>
+              </a:rPr>
+              <a:t>·</a:t>
+            </a:r>
+            <a:endParaRPr lang="en-US" sz="1600" dirty="0"/>
+          </a:p>
+        </p:txBody>
+      </p:sp>
+      <p:sp>
+        <p:nvSpPr>
+          <p:cNvPr id="38" name="Shape 36"/>
+          <p:cNvSpPr/>
+          <p:nvPr/>
+        </p:nvSpPr>
+        <p:spPr>
+          <a:xfrm>
+            <a:off x="6428232" y="3364992"/>
+            <a:ext cx="1645920" cy="475488"/>
+          </a:xfrm>
+          <a:prstGeom prst="rect">
+            <a:avLst>
+              <a:gd name="adj" fmla="val 9615"/>
+            </a:avLst>
+          </a:prstGeom>
+          <a:solidFill>
+            <a:srgbClr val="FFFFFF"/>
+          </a:solidFill>
+          <a:ln w="12700">
+            <a:solidFill>
+              <a:srgbClr val="0D9488"/>
+            </a:solidFill>
+            <a:prstDash val="solid"/>
+          </a:ln>
+        </p:spPr>
+      </p:sp>
+      <p:sp>
+        <p:nvSpPr>
+          <p:cNvPr id="39" name="Text 37"/>
+          <p:cNvSpPr/>
+          <p:nvPr/>
+        </p:nvSpPr>
+        <p:spPr>
+          <a:xfrm>
+            <a:off x="6428232" y="3364992"/>
+            <a:ext cx="1645920" cy="475488"/>
+          </a:xfrm>
+          <a:prstGeom prst="rect">
+            <a:avLst/>
+          </a:prstGeom>
+          <a:noFill/>
+          <a:ln/>
+        </p:spPr>
+        <p:txBody>
+          <a:bodyPr wrap="square" lIns="0" tIns="0" rIns="0" bIns="0" rtlCol="0" anchor="ctr"/>
+          <a:lstStyle/>
+          <a:p>
+            <a:pPr algn="ctr" indent="0" marL="0">
+              <a:buNone/>
+            </a:pPr>
+            <a:r>
+              <a:rPr lang="en-US" sz="1400" b="1" dirty="0">
+                <a:solidFill>
+                  <a:srgbClr val="0D9488"/>
+                </a:solidFill>
+                <a:latin typeface="Trebuchet MS" pitchFamily="34" charset="0"/>
+                <a:ea typeface="Trebuchet MS" pitchFamily="34" charset="-122"/>
+                <a:cs typeface="Trebuchet MS" pitchFamily="34" charset="-120"/>
+              </a:rPr>
+              <a:t>ing</a:t>
+            </a:r>
+            <a:endParaRPr lang="en-US" sz="1400" dirty="0"/>
+          </a:p>
+        </p:txBody>
+      </p:sp>
+      <p:sp>
+        <p:nvSpPr>
+          <p:cNvPr id="40" name="Shape 38"/>
           <p:cNvSpPr/>
           <p:nvPr/>
         </p:nvSpPr>
@@ -9256,7 +9887,7 @@
       </p:sp>
       <p:sp>
         <p:nvSpPr>
-          <p:cNvPr id="31" name="Text 29"/>
+          <p:cNvPr id="41" name="Text 39"/>
           <p:cNvSpPr/>
           <p:nvPr/>
         </p:nvSpPr>
@@ -9295,7 +9926,7 @@
       </p:sp>
       <p:sp>
         <p:nvSpPr>
-          <p:cNvPr id="32" name="Shape 30"/>
+          <p:cNvPr id="42" name="Shape 40"/>
           <p:cNvSpPr/>
           <p:nvPr/>
         </p:nvSpPr>
@@ -9322,7 +9953,7 @@
       </p:sp>
       <p:sp>
         <p:nvSpPr>
-          <p:cNvPr id="33" name="Text 31"/>
+          <p:cNvPr id="43" name="Text 41"/>
           <p:cNvSpPr/>
           <p:nvPr/>
         </p:nvSpPr>
@@ -9784,7 +10415,7 @@
                 <a:ea typeface="Trebuchet MS" pitchFamily="34" charset="-122"/>
                 <a:cs typeface="Trebuchet MS" pitchFamily="34" charset="-120"/>
               </a:rPr>
-              <a:t>sadly</a:t>
+              <a:t>saddening</a:t>
             </a:r>
             <a:endParaRPr lang="en-US" sz="2800" dirty="0"/>
           </a:p>
@@ -9864,8 +10495,8 @@
         </p:nvSpPr>
         <p:spPr>
           <a:xfrm>
-            <a:off x="2938272" y="2258568"/>
-            <a:ext cx="1828800" cy="292608"/>
+            <a:off x="1989734" y="2258568"/>
+            <a:ext cx="1581912" cy="292608"/>
           </a:xfrm>
           <a:prstGeom prst="rect">
             <a:avLst>
@@ -9898,8 +10529,8 @@
         </p:nvSpPr>
         <p:spPr>
           <a:xfrm>
-            <a:off x="2938272" y="2258568"/>
-            <a:ext cx="1828800" cy="292608"/>
+            <a:off x="1989734" y="2258568"/>
+            <a:ext cx="1581912" cy="292608"/>
           </a:xfrm>
           <a:prstGeom prst="rect">
             <a:avLst/>
@@ -9937,8 +10568,8 @@
         </p:nvSpPr>
         <p:spPr>
           <a:xfrm>
-            <a:off x="2938272" y="2569464"/>
-            <a:ext cx="1828800" cy="201168"/>
+            <a:off x="1989734" y="2569464"/>
+            <a:ext cx="1581912" cy="201168"/>
           </a:xfrm>
           <a:prstGeom prst="rect">
             <a:avLst/>
@@ -9976,8 +10607,8 @@
         </p:nvSpPr>
         <p:spPr>
           <a:xfrm>
-            <a:off x="5803392" y="2258568"/>
-            <a:ext cx="1828800" cy="292608"/>
+            <a:off x="3659429" y="2258568"/>
+            <a:ext cx="1581912" cy="292608"/>
           </a:xfrm>
           <a:prstGeom prst="rect">
             <a:avLst>
@@ -10010,8 +10641,8 @@
         </p:nvSpPr>
         <p:spPr>
           <a:xfrm>
-            <a:off x="5803392" y="2258568"/>
-            <a:ext cx="1828800" cy="292608"/>
+            <a:off x="3659429" y="2258568"/>
+            <a:ext cx="1581912" cy="292608"/>
           </a:xfrm>
           <a:prstGeom prst="rect">
             <a:avLst/>
@@ -10035,7 +10666,7 @@
                 <a:ea typeface="Trebuchet MS" pitchFamily="34" charset="-122"/>
                 <a:cs typeface="Trebuchet MS" pitchFamily="34" charset="-120"/>
               </a:rPr>
-              <a:t>ly</a:t>
+              <a:t>d</a:t>
             </a:r>
             <a:endParaRPr lang="en-US" sz="1300" dirty="0"/>
           </a:p>
@@ -10049,8 +10680,8 @@
         </p:nvSpPr>
         <p:spPr>
           <a:xfrm>
-            <a:off x="5803392" y="2569464"/>
-            <a:ext cx="1828800" cy="201168"/>
+            <a:off x="3659429" y="2569464"/>
+            <a:ext cx="1581912" cy="201168"/>
           </a:xfrm>
           <a:prstGeom prst="rect">
             <a:avLst/>
@@ -10074,7 +10705,7 @@
                 <a:ea typeface="Calibri" pitchFamily="34" charset="-122"/>
                 <a:cs typeface="Calibri" pitchFamily="34" charset="-120"/>
               </a:rPr>
-              <a:t>in a way that is</a:t>
+              <a:t>doubled consonant before suffix</a:t>
             </a:r>
             <a:endParaRPr lang="en-US" sz="850" dirty="0"/>
           </a:p>
@@ -10082,7 +10713,270 @@
       </p:sp>
       <p:sp>
         <p:nvSpPr>
-          <p:cNvPr id="22" name="Shape 20"/>
+          <p:cNvPr id="22" name="Text 20"/>
+          <p:cNvSpPr/>
+          <p:nvPr/>
+        </p:nvSpPr>
+        <p:spPr>
+          <a:xfrm>
+            <a:off x="3659429" y="2752344"/>
+            <a:ext cx="1581912" cy="182880"/>
+          </a:xfrm>
+          <a:prstGeom prst="rect">
+            <a:avLst/>
+          </a:prstGeom>
+          <a:noFill/>
+          <a:ln/>
+        </p:spPr>
+        <p:txBody>
+          <a:bodyPr wrap="square" lIns="0" tIns="0" rIns="0" bIns="0" rtlCol="0" anchor="t"/>
+          <a:lstStyle/>
+          <a:p>
+            <a:pPr algn="ctr" indent="0" marL="0">
+              <a:buNone/>
+            </a:pPr>
+            <a:r>
+              <a:rPr lang="en-US" sz="700" i="1" dirty="0">
+                <a:solidFill>
+                  <a:srgbClr val="94A3B8"/>
+                </a:solidFill>
+                <a:latin typeface="Calibri" pitchFamily="34" charset="0"/>
+                <a:ea typeface="Calibri" pitchFamily="34" charset="-122"/>
+                <a:cs typeface="Calibri" pitchFamily="34" charset="-120"/>
+              </a:rPr>
+              <a:t>final consonant doubled before vowel suffix</a:t>
+            </a:r>
+            <a:endParaRPr lang="en-US" sz="700" dirty="0"/>
+          </a:p>
+        </p:txBody>
+      </p:sp>
+      <p:sp>
+        <p:nvSpPr>
+          <p:cNvPr id="23" name="Shape 21"/>
+          <p:cNvSpPr/>
+          <p:nvPr/>
+        </p:nvSpPr>
+        <p:spPr>
+          <a:xfrm>
+            <a:off x="5329123" y="2258568"/>
+            <a:ext cx="1581912" cy="292608"/>
+          </a:xfrm>
+          <a:prstGeom prst="rect">
+            <a:avLst>
+              <a:gd name="adj" fmla="val 25000"/>
+            </a:avLst>
+          </a:prstGeom>
+          <a:solidFill>
+            <a:srgbClr val="FCE7F3"/>
+          </a:solidFill>
+          <a:ln w="19050">
+            <a:solidFill>
+              <a:srgbClr val="DB2777"/>
+            </a:solidFill>
+            <a:prstDash val="solid"/>
+          </a:ln>
+          <a:effectLst>
+            <a:outerShdw sx="100000" sy="100000" kx="0" ky="0" algn="bl" rotWithShape="0" blurRad="101600" dist="38100" dir="8100000">
+              <a:srgbClr val="000000">
+                <a:alpha val="12000"/>
+              </a:srgbClr>
+            </a:outerShdw>
+          </a:effectLst>
+        </p:spPr>
+      </p:sp>
+      <p:sp>
+        <p:nvSpPr>
+          <p:cNvPr id="24" name="Text 22"/>
+          <p:cNvSpPr/>
+          <p:nvPr/>
+        </p:nvSpPr>
+        <p:spPr>
+          <a:xfrm>
+            <a:off x="5329123" y="2258568"/>
+            <a:ext cx="1581912" cy="292608"/>
+          </a:xfrm>
+          <a:prstGeom prst="rect">
+            <a:avLst/>
+          </a:prstGeom>
+          <a:noFill/>
+          <a:ln/>
+        </p:spPr>
+        <p:txBody>
+          <a:bodyPr wrap="square" lIns="0" tIns="0" rIns="0" bIns="0" rtlCol="0" anchor="ctr"/>
+          <a:lstStyle/>
+          <a:p>
+            <a:pPr algn="ctr" indent="0" marL="0">
+              <a:buNone/>
+            </a:pPr>
+            <a:r>
+              <a:rPr lang="en-US" sz="1300" b="1" dirty="0">
+                <a:solidFill>
+                  <a:srgbClr val="9D174D"/>
+                </a:solidFill>
+                <a:latin typeface="Trebuchet MS" pitchFamily="34" charset="0"/>
+                <a:ea typeface="Trebuchet MS" pitchFamily="34" charset="-122"/>
+                <a:cs typeface="Trebuchet MS" pitchFamily="34" charset="-120"/>
+              </a:rPr>
+              <a:t>en</a:t>
+            </a:r>
+            <a:endParaRPr lang="en-US" sz="1300" dirty="0"/>
+          </a:p>
+        </p:txBody>
+      </p:sp>
+      <p:sp>
+        <p:nvSpPr>
+          <p:cNvPr id="25" name="Text 23"/>
+          <p:cNvSpPr/>
+          <p:nvPr/>
+        </p:nvSpPr>
+        <p:spPr>
+          <a:xfrm>
+            <a:off x="5329123" y="2569464"/>
+            <a:ext cx="1581912" cy="201168"/>
+          </a:xfrm>
+          <a:prstGeom prst="rect">
+            <a:avLst/>
+          </a:prstGeom>
+          <a:noFill/>
+          <a:ln/>
+        </p:spPr>
+        <p:txBody>
+          <a:bodyPr wrap="square" lIns="0" tIns="0" rIns="0" bIns="0" rtlCol="0" anchor="t"/>
+          <a:lstStyle/>
+          <a:p>
+            <a:pPr algn="ctr" indent="0" marL="0">
+              <a:buNone/>
+            </a:pPr>
+            <a:r>
+              <a:rPr lang="en-US" sz="850" dirty="0">
+                <a:solidFill>
+                  <a:srgbClr val="475569"/>
+                </a:solidFill>
+                <a:latin typeface="Calibri" pitchFamily="34" charset="0"/>
+                <a:ea typeface="Calibri" pitchFamily="34" charset="-122"/>
+                <a:cs typeface="Calibri" pitchFamily="34" charset="-120"/>
+              </a:rPr>
+              <a:t>to make or become</a:t>
+            </a:r>
+            <a:endParaRPr lang="en-US" sz="850" dirty="0"/>
+          </a:p>
+        </p:txBody>
+      </p:sp>
+      <p:sp>
+        <p:nvSpPr>
+          <p:cNvPr id="26" name="Shape 24"/>
+          <p:cNvSpPr/>
+          <p:nvPr/>
+        </p:nvSpPr>
+        <p:spPr>
+          <a:xfrm>
+            <a:off x="6998818" y="2258568"/>
+            <a:ext cx="1581912" cy="292608"/>
+          </a:xfrm>
+          <a:prstGeom prst="rect">
+            <a:avLst>
+              <a:gd name="adj" fmla="val 25000"/>
+            </a:avLst>
+          </a:prstGeom>
+          <a:solidFill>
+            <a:srgbClr val="FCE7F3"/>
+          </a:solidFill>
+          <a:ln w="19050">
+            <a:solidFill>
+              <a:srgbClr val="DB2777"/>
+            </a:solidFill>
+            <a:prstDash val="solid"/>
+          </a:ln>
+          <a:effectLst>
+            <a:outerShdw sx="100000" sy="100000" kx="0" ky="0" algn="bl" rotWithShape="0" blurRad="101600" dist="38100" dir="8100000">
+              <a:srgbClr val="000000">
+                <a:alpha val="12000"/>
+              </a:srgbClr>
+            </a:outerShdw>
+          </a:effectLst>
+        </p:spPr>
+      </p:sp>
+      <p:sp>
+        <p:nvSpPr>
+          <p:cNvPr id="27" name="Text 25"/>
+          <p:cNvSpPr/>
+          <p:nvPr/>
+        </p:nvSpPr>
+        <p:spPr>
+          <a:xfrm>
+            <a:off x="6998818" y="2258568"/>
+            <a:ext cx="1581912" cy="292608"/>
+          </a:xfrm>
+          <a:prstGeom prst="rect">
+            <a:avLst/>
+          </a:prstGeom>
+          <a:noFill/>
+          <a:ln/>
+        </p:spPr>
+        <p:txBody>
+          <a:bodyPr wrap="square" lIns="0" tIns="0" rIns="0" bIns="0" rtlCol="0" anchor="ctr"/>
+          <a:lstStyle/>
+          <a:p>
+            <a:pPr algn="ctr" indent="0" marL="0">
+              <a:buNone/>
+            </a:pPr>
+            <a:r>
+              <a:rPr lang="en-US" sz="1300" b="1" dirty="0">
+                <a:solidFill>
+                  <a:srgbClr val="9D174D"/>
+                </a:solidFill>
+                <a:latin typeface="Trebuchet MS" pitchFamily="34" charset="0"/>
+                <a:ea typeface="Trebuchet MS" pitchFamily="34" charset="-122"/>
+                <a:cs typeface="Trebuchet MS" pitchFamily="34" charset="-120"/>
+              </a:rPr>
+              <a:t>ing</a:t>
+            </a:r>
+            <a:endParaRPr lang="en-US" sz="1300" dirty="0"/>
+          </a:p>
+        </p:txBody>
+      </p:sp>
+      <p:sp>
+        <p:nvSpPr>
+          <p:cNvPr id="28" name="Text 26"/>
+          <p:cNvSpPr/>
+          <p:nvPr/>
+        </p:nvSpPr>
+        <p:spPr>
+          <a:xfrm>
+            <a:off x="6998818" y="2569464"/>
+            <a:ext cx="1581912" cy="201168"/>
+          </a:xfrm>
+          <a:prstGeom prst="rect">
+            <a:avLst/>
+          </a:prstGeom>
+          <a:noFill/>
+          <a:ln/>
+        </p:spPr>
+        <p:txBody>
+          <a:bodyPr wrap="square" lIns="0" tIns="0" rIns="0" bIns="0" rtlCol="0" anchor="t"/>
+          <a:lstStyle/>
+          <a:p>
+            <a:pPr algn="ctr" indent="0" marL="0">
+              <a:buNone/>
+            </a:pPr>
+            <a:r>
+              <a:rPr lang="en-US" sz="850" dirty="0">
+                <a:solidFill>
+                  <a:srgbClr val="475569"/>
+                </a:solidFill>
+                <a:latin typeface="Calibri" pitchFamily="34" charset="0"/>
+                <a:ea typeface="Calibri" pitchFamily="34" charset="-122"/>
+                <a:cs typeface="Calibri" pitchFamily="34" charset="-120"/>
+              </a:rPr>
+              <a:t>ongoing action or process</a:t>
+            </a:r>
+            <a:endParaRPr lang="en-US" sz="850" dirty="0"/>
+          </a:p>
+        </p:txBody>
+      </p:sp>
+      <p:sp>
+        <p:nvSpPr>
+          <p:cNvPr id="29" name="Shape 27"/>
           <p:cNvSpPr/>
           <p:nvPr/>
         </p:nvSpPr>
@@ -10109,7 +11003,7 @@
       </p:sp>
       <p:sp>
         <p:nvSpPr>
-          <p:cNvPr id="23" name="Text 21"/>
+          <p:cNvPr id="30" name="Text 28"/>
           <p:cNvSpPr/>
           <p:nvPr/>
         </p:nvSpPr>
@@ -10148,7 +11042,7 @@
       </p:sp>
       <p:sp>
         <p:nvSpPr>
-          <p:cNvPr id="24" name="Shape 22"/>
+          <p:cNvPr id="31" name="Shape 29"/>
           <p:cNvSpPr/>
           <p:nvPr/>
         </p:nvSpPr>
@@ -10175,13 +11069,13 @@
       </p:sp>
       <p:sp>
         <p:nvSpPr>
-          <p:cNvPr id="25" name="Shape 23"/>
-          <p:cNvSpPr/>
-          <p:nvPr/>
-        </p:nvSpPr>
-        <p:spPr>
-          <a:xfrm>
-            <a:off x="2999232" y="3364992"/>
+          <p:cNvPr id="32" name="Shape 30"/>
+          <p:cNvSpPr/>
+          <p:nvPr/>
+        </p:nvSpPr>
+        <p:spPr>
+          <a:xfrm>
+            <a:off x="2313432" y="3364992"/>
             <a:ext cx="1645920" cy="475488"/>
           </a:xfrm>
           <a:prstGeom prst="rect">
@@ -10202,13 +11096,13 @@
       </p:sp>
       <p:sp>
         <p:nvSpPr>
-          <p:cNvPr id="26" name="Text 24"/>
-          <p:cNvSpPr/>
-          <p:nvPr/>
-        </p:nvSpPr>
-        <p:spPr>
-          <a:xfrm>
-            <a:off x="2999232" y="3364992"/>
+          <p:cNvPr id="33" name="Text 31"/>
+          <p:cNvSpPr/>
+          <p:nvPr/>
+        </p:nvSpPr>
+        <p:spPr>
+          <a:xfrm>
+            <a:off x="2313432" y="3364992"/>
             <a:ext cx="1645920" cy="475488"/>
           </a:xfrm>
           <a:prstGeom prst="rect">
@@ -10241,14 +11135,14 @@
       </p:sp>
       <p:sp>
         <p:nvSpPr>
-          <p:cNvPr id="27" name="Text 25"/>
-          <p:cNvSpPr/>
-          <p:nvPr/>
-        </p:nvSpPr>
-        <p:spPr>
-          <a:xfrm>
-            <a:off x="4645152" y="3364992"/>
-            <a:ext cx="1097280" cy="475488"/>
+          <p:cNvPr id="34" name="Text 32"/>
+          <p:cNvSpPr/>
+          <p:nvPr/>
+        </p:nvSpPr>
+        <p:spPr>
+          <a:xfrm>
+            <a:off x="3959352" y="3364992"/>
+            <a:ext cx="411480" cy="475488"/>
           </a:xfrm>
           <a:prstGeom prst="rect">
             <a:avLst/>
@@ -10280,13 +11174,13 @@
       </p:sp>
       <p:sp>
         <p:nvSpPr>
-          <p:cNvPr id="28" name="Shape 26"/>
-          <p:cNvSpPr/>
-          <p:nvPr/>
-        </p:nvSpPr>
-        <p:spPr>
-          <a:xfrm>
-            <a:off x="5742432" y="3364992"/>
+          <p:cNvPr id="35" name="Shape 33"/>
+          <p:cNvSpPr/>
+          <p:nvPr/>
+        </p:nvSpPr>
+        <p:spPr>
+          <a:xfrm>
+            <a:off x="4370832" y="3364992"/>
             <a:ext cx="1645920" cy="475488"/>
           </a:xfrm>
           <a:prstGeom prst="rect">
@@ -10307,13 +11201,13 @@
       </p:sp>
       <p:sp>
         <p:nvSpPr>
-          <p:cNvPr id="29" name="Text 27"/>
-          <p:cNvSpPr/>
-          <p:nvPr/>
-        </p:nvSpPr>
-        <p:spPr>
-          <a:xfrm>
-            <a:off x="5742432" y="3364992"/>
+          <p:cNvPr id="36" name="Text 34"/>
+          <p:cNvSpPr/>
+          <p:nvPr/>
+        </p:nvSpPr>
+        <p:spPr>
+          <a:xfrm>
+            <a:off x="4370832" y="3364992"/>
             <a:ext cx="1645920" cy="475488"/>
           </a:xfrm>
           <a:prstGeom prst="rect">
@@ -10338,7 +11232,7 @@
                 <a:ea typeface="Trebuchet MS" pitchFamily="34" charset="-122"/>
                 <a:cs typeface="Trebuchet MS" pitchFamily="34" charset="-120"/>
               </a:rPr>
-              <a:t>ly</a:t>
+              <a:t>den</a:t>
             </a:r>
             <a:endParaRPr lang="en-US" sz="1400" dirty="0"/>
           </a:p>
@@ -10346,7 +11240,112 @@
       </p:sp>
       <p:sp>
         <p:nvSpPr>
-          <p:cNvPr id="30" name="Shape 28"/>
+          <p:cNvPr id="37" name="Text 35"/>
+          <p:cNvSpPr/>
+          <p:nvPr/>
+        </p:nvSpPr>
+        <p:spPr>
+          <a:xfrm>
+            <a:off x="6016752" y="3364992"/>
+            <a:ext cx="411480" cy="475488"/>
+          </a:xfrm>
+          <a:prstGeom prst="rect">
+            <a:avLst/>
+          </a:prstGeom>
+          <a:noFill/>
+          <a:ln/>
+        </p:spPr>
+        <p:txBody>
+          <a:bodyPr wrap="square" lIns="0" tIns="0" rIns="0" bIns="0" rtlCol="0" anchor="ctr"/>
+          <a:lstStyle/>
+          <a:p>
+            <a:pPr algn="ctr" indent="0" marL="0">
+              <a:buNone/>
+            </a:pPr>
+            <a:r>
+              <a:rPr lang="en-US" sz="1600" b="1" dirty="0">
+                <a:solidFill>
+                  <a:srgbClr val="0D9488"/>
+                </a:solidFill>
+                <a:latin typeface="Trebuchet MS" pitchFamily="34" charset="0"/>
+                <a:ea typeface="Trebuchet MS" pitchFamily="34" charset="-122"/>
+                <a:cs typeface="Trebuchet MS" pitchFamily="34" charset="-120"/>
+              </a:rPr>
+              <a:t>·</a:t>
+            </a:r>
+            <a:endParaRPr lang="en-US" sz="1600" dirty="0"/>
+          </a:p>
+        </p:txBody>
+      </p:sp>
+      <p:sp>
+        <p:nvSpPr>
+          <p:cNvPr id="38" name="Shape 36"/>
+          <p:cNvSpPr/>
+          <p:nvPr/>
+        </p:nvSpPr>
+        <p:spPr>
+          <a:xfrm>
+            <a:off x="6428232" y="3364992"/>
+            <a:ext cx="1645920" cy="475488"/>
+          </a:xfrm>
+          <a:prstGeom prst="rect">
+            <a:avLst>
+              <a:gd name="adj" fmla="val 9615"/>
+            </a:avLst>
+          </a:prstGeom>
+          <a:solidFill>
+            <a:srgbClr val="FFFFFF"/>
+          </a:solidFill>
+          <a:ln w="12700">
+            <a:solidFill>
+              <a:srgbClr val="0D9488"/>
+            </a:solidFill>
+            <a:prstDash val="solid"/>
+          </a:ln>
+        </p:spPr>
+      </p:sp>
+      <p:sp>
+        <p:nvSpPr>
+          <p:cNvPr id="39" name="Text 37"/>
+          <p:cNvSpPr/>
+          <p:nvPr/>
+        </p:nvSpPr>
+        <p:spPr>
+          <a:xfrm>
+            <a:off x="6428232" y="3364992"/>
+            <a:ext cx="1645920" cy="475488"/>
+          </a:xfrm>
+          <a:prstGeom prst="rect">
+            <a:avLst/>
+          </a:prstGeom>
+          <a:noFill/>
+          <a:ln/>
+        </p:spPr>
+        <p:txBody>
+          <a:bodyPr wrap="square" lIns="0" tIns="0" rIns="0" bIns="0" rtlCol="0" anchor="ctr"/>
+          <a:lstStyle/>
+          <a:p>
+            <a:pPr algn="ctr" indent="0" marL="0">
+              <a:buNone/>
+            </a:pPr>
+            <a:r>
+              <a:rPr lang="en-US" sz="1400" b="1" dirty="0">
+                <a:solidFill>
+                  <a:srgbClr val="0D9488"/>
+                </a:solidFill>
+                <a:latin typeface="Trebuchet MS" pitchFamily="34" charset="0"/>
+                <a:ea typeface="Trebuchet MS" pitchFamily="34" charset="-122"/>
+                <a:cs typeface="Trebuchet MS" pitchFamily="34" charset="-120"/>
+              </a:rPr>
+              <a:t>ing</a:t>
+            </a:r>
+            <a:endParaRPr lang="en-US" sz="1400" dirty="0"/>
+          </a:p>
+        </p:txBody>
+      </p:sp>
+      <p:sp>
+        <p:nvSpPr>
+          <p:cNvPr id="40" name="Shape 38"/>
           <p:cNvSpPr/>
           <p:nvPr/>
         </p:nvSpPr>
@@ -10373,7 +11372,7 @@
       </p:sp>
       <p:sp>
         <p:nvSpPr>
-          <p:cNvPr id="31" name="Text 29"/>
+          <p:cNvPr id="41" name="Text 39"/>
           <p:cNvSpPr/>
           <p:nvPr/>
         </p:nvSpPr>
@@ -10412,7 +11411,7 @@
       </p:sp>
       <p:sp>
         <p:nvSpPr>
-          <p:cNvPr id="32" name="Shape 30"/>
+          <p:cNvPr id="42" name="Shape 40"/>
           <p:cNvSpPr/>
           <p:nvPr/>
         </p:nvSpPr>
@@ -10439,13 +11438,13 @@
       </p:sp>
       <p:sp>
         <p:nvSpPr>
-          <p:cNvPr id="33" name="Shape 31"/>
-          <p:cNvSpPr/>
-          <p:nvPr/>
-        </p:nvSpPr>
-        <p:spPr>
-          <a:xfrm>
-            <a:off x="2427732" y="4169664"/>
+          <p:cNvPr id="43" name="Shape 41"/>
+          <p:cNvSpPr/>
+          <p:nvPr/>
+        </p:nvSpPr>
+        <p:spPr>
+          <a:xfrm>
+            <a:off x="2124837" y="4169664"/>
             <a:ext cx="685800" cy="475488"/>
           </a:xfrm>
           <a:prstGeom prst="rect">
@@ -10466,13 +11465,13 @@
       </p:sp>
       <p:sp>
         <p:nvSpPr>
-          <p:cNvPr id="34" name="Text 32"/>
-          <p:cNvSpPr/>
-          <p:nvPr/>
-        </p:nvSpPr>
-        <p:spPr>
-          <a:xfrm>
-            <a:off x="2427732" y="4169664"/>
+          <p:cNvPr id="44" name="Text 42"/>
+          <p:cNvSpPr/>
+          <p:nvPr/>
+        </p:nvSpPr>
+        <p:spPr>
+          <a:xfrm>
+            <a:off x="2124837" y="4169664"/>
             <a:ext cx="685800" cy="475488"/>
           </a:xfrm>
           <a:prstGeom prst="rect">
@@ -10505,13 +11504,13 @@
       </p:sp>
       <p:sp>
         <p:nvSpPr>
-          <p:cNvPr id="35" name="Shape 33"/>
-          <p:cNvSpPr/>
-          <p:nvPr/>
-        </p:nvSpPr>
-        <p:spPr>
-          <a:xfrm>
-            <a:off x="3639312" y="4169664"/>
+          <p:cNvPr id="45" name="Shape 43"/>
+          <p:cNvSpPr/>
+          <p:nvPr/>
+        </p:nvSpPr>
+        <p:spPr>
+          <a:xfrm>
+            <a:off x="3033522" y="4169664"/>
             <a:ext cx="685800" cy="475488"/>
           </a:xfrm>
           <a:prstGeom prst="rect">
@@ -10532,13 +11531,13 @@
       </p:sp>
       <p:sp>
         <p:nvSpPr>
-          <p:cNvPr id="36" name="Text 34"/>
-          <p:cNvSpPr/>
-          <p:nvPr/>
-        </p:nvSpPr>
-        <p:spPr>
-          <a:xfrm>
-            <a:off x="3639312" y="4169664"/>
+          <p:cNvPr id="46" name="Text 44"/>
+          <p:cNvSpPr/>
+          <p:nvPr/>
+        </p:nvSpPr>
+        <p:spPr>
+          <a:xfrm>
+            <a:off x="3033522" y="4169664"/>
             <a:ext cx="685800" cy="475488"/>
           </a:xfrm>
           <a:prstGeom prst="rect">
@@ -10571,13 +11570,13 @@
       </p:sp>
       <p:sp>
         <p:nvSpPr>
-          <p:cNvPr id="37" name="Shape 35"/>
-          <p:cNvSpPr/>
-          <p:nvPr/>
-        </p:nvSpPr>
-        <p:spPr>
-          <a:xfrm>
-            <a:off x="4850892" y="4169664"/>
+          <p:cNvPr id="47" name="Shape 45"/>
+          <p:cNvSpPr/>
+          <p:nvPr/>
+        </p:nvSpPr>
+        <p:spPr>
+          <a:xfrm>
+            <a:off x="3942207" y="4169664"/>
             <a:ext cx="685800" cy="475488"/>
           </a:xfrm>
           <a:prstGeom prst="rect">
@@ -10598,13 +11597,13 @@
       </p:sp>
       <p:sp>
         <p:nvSpPr>
-          <p:cNvPr id="38" name="Text 36"/>
-          <p:cNvSpPr/>
-          <p:nvPr/>
-        </p:nvSpPr>
-        <p:spPr>
-          <a:xfrm>
-            <a:off x="4850892" y="4169664"/>
+          <p:cNvPr id="48" name="Text 46"/>
+          <p:cNvSpPr/>
+          <p:nvPr/>
+        </p:nvSpPr>
+        <p:spPr>
+          <a:xfrm>
+            <a:off x="3942207" y="4169664"/>
             <a:ext cx="685800" cy="475488"/>
           </a:xfrm>
           <a:prstGeom prst="rect">
@@ -10629,7 +11628,7 @@
                 <a:ea typeface="Trebuchet MS" pitchFamily="34" charset="-122"/>
                 <a:cs typeface="Trebuchet MS" pitchFamily="34" charset="-120"/>
               </a:rPr>
-              <a:t>d</a:t>
+              <a:t>dd</a:t>
             </a:r>
             <a:endParaRPr lang="en-US" sz="900" dirty="0"/>
           </a:p>
@@ -10637,13 +11636,13 @@
       </p:sp>
       <p:sp>
         <p:nvSpPr>
-          <p:cNvPr id="39" name="Shape 37"/>
-          <p:cNvSpPr/>
-          <p:nvPr/>
-        </p:nvSpPr>
-        <p:spPr>
-          <a:xfrm>
-            <a:off x="6062472" y="4169664"/>
+          <p:cNvPr id="49" name="Shape 47"/>
+          <p:cNvSpPr/>
+          <p:nvPr/>
+        </p:nvSpPr>
+        <p:spPr>
+          <a:xfrm>
+            <a:off x="4850892" y="4169664"/>
             <a:ext cx="685800" cy="475488"/>
           </a:xfrm>
           <a:prstGeom prst="rect">
@@ -10664,13 +11663,13 @@
       </p:sp>
       <p:sp>
         <p:nvSpPr>
-          <p:cNvPr id="40" name="Text 38"/>
-          <p:cNvSpPr/>
-          <p:nvPr/>
-        </p:nvSpPr>
-        <p:spPr>
-          <a:xfrm>
-            <a:off x="6062472" y="4169664"/>
+          <p:cNvPr id="50" name="Text 48"/>
+          <p:cNvSpPr/>
+          <p:nvPr/>
+        </p:nvSpPr>
+        <p:spPr>
+          <a:xfrm>
+            <a:off x="4850892" y="4169664"/>
             <a:ext cx="685800" cy="475488"/>
           </a:xfrm>
           <a:prstGeom prst="rect">
@@ -10695,7 +11694,7 @@
                 <a:ea typeface="Trebuchet MS" pitchFamily="34" charset="-122"/>
                 <a:cs typeface="Trebuchet MS" pitchFamily="34" charset="-120"/>
               </a:rPr>
-              <a:t>l</a:t>
+              <a:t>e</a:t>
             </a:r>
             <a:endParaRPr lang="en-US" sz="900" dirty="0"/>
           </a:p>
@@ -10703,13 +11702,13 @@
       </p:sp>
       <p:sp>
         <p:nvSpPr>
-          <p:cNvPr id="41" name="Shape 39"/>
-          <p:cNvSpPr/>
-          <p:nvPr/>
-        </p:nvSpPr>
-        <p:spPr>
-          <a:xfrm>
-            <a:off x="7274052" y="4169664"/>
+          <p:cNvPr id="51" name="Shape 49"/>
+          <p:cNvSpPr/>
+          <p:nvPr/>
+        </p:nvSpPr>
+        <p:spPr>
+          <a:xfrm>
+            <a:off x="5759577" y="4169664"/>
             <a:ext cx="685800" cy="475488"/>
           </a:xfrm>
           <a:prstGeom prst="rect">
@@ -10730,13 +11729,13 @@
       </p:sp>
       <p:sp>
         <p:nvSpPr>
-          <p:cNvPr id="42" name="Text 40"/>
-          <p:cNvSpPr/>
-          <p:nvPr/>
-        </p:nvSpPr>
-        <p:spPr>
-          <a:xfrm>
-            <a:off x="7274052" y="4169664"/>
+          <p:cNvPr id="52" name="Text 50"/>
+          <p:cNvSpPr/>
+          <p:nvPr/>
+        </p:nvSpPr>
+        <p:spPr>
+          <a:xfrm>
+            <a:off x="5759577" y="4169664"/>
             <a:ext cx="685800" cy="475488"/>
           </a:xfrm>
           <a:prstGeom prst="rect">
@@ -10761,7 +11760,139 @@
                 <a:ea typeface="Trebuchet MS" pitchFamily="34" charset="-122"/>
                 <a:cs typeface="Trebuchet MS" pitchFamily="34" charset="-120"/>
               </a:rPr>
-              <a:t>y</a:t>
+              <a:t>n</a:t>
+            </a:r>
+            <a:endParaRPr lang="en-US" sz="900" dirty="0"/>
+          </a:p>
+        </p:txBody>
+      </p:sp>
+      <p:sp>
+        <p:nvSpPr>
+          <p:cNvPr id="53" name="Shape 51"/>
+          <p:cNvSpPr/>
+          <p:nvPr/>
+        </p:nvSpPr>
+        <p:spPr>
+          <a:xfrm>
+            <a:off x="6668262" y="4169664"/>
+            <a:ext cx="685800" cy="475488"/>
+          </a:xfrm>
+          <a:prstGeom prst="rect">
+            <a:avLst>
+              <a:gd name="adj" fmla="val 7692"/>
+            </a:avLst>
+          </a:prstGeom>
+          <a:solidFill>
+            <a:srgbClr val="FFFFFF"/>
+          </a:solidFill>
+          <a:ln w="12700">
+            <a:solidFill>
+              <a:srgbClr val="DB2777"/>
+            </a:solidFill>
+            <a:prstDash val="solid"/>
+          </a:ln>
+        </p:spPr>
+      </p:sp>
+      <p:sp>
+        <p:nvSpPr>
+          <p:cNvPr id="54" name="Text 52"/>
+          <p:cNvSpPr/>
+          <p:nvPr/>
+        </p:nvSpPr>
+        <p:spPr>
+          <a:xfrm>
+            <a:off x="6668262" y="4169664"/>
+            <a:ext cx="685800" cy="475488"/>
+          </a:xfrm>
+          <a:prstGeom prst="rect">
+            <a:avLst/>
+          </a:prstGeom>
+          <a:noFill/>
+          <a:ln/>
+        </p:spPr>
+        <p:txBody>
+          <a:bodyPr wrap="square" lIns="0" tIns="0" rIns="0" bIns="0" rtlCol="0" anchor="ctr"/>
+          <a:lstStyle/>
+          <a:p>
+            <a:pPr algn="ctr" indent="0" marL="0">
+              <a:buNone/>
+            </a:pPr>
+            <a:r>
+              <a:rPr lang="en-US" sz="900" b="1" dirty="0">
+                <a:solidFill>
+                  <a:srgbClr val="9D174D"/>
+                </a:solidFill>
+                <a:latin typeface="Trebuchet MS" pitchFamily="34" charset="0"/>
+                <a:ea typeface="Trebuchet MS" pitchFamily="34" charset="-122"/>
+                <a:cs typeface="Trebuchet MS" pitchFamily="34" charset="-120"/>
+              </a:rPr>
+              <a:t>i</a:t>
+            </a:r>
+            <a:endParaRPr lang="en-US" sz="900" dirty="0"/>
+          </a:p>
+        </p:txBody>
+      </p:sp>
+      <p:sp>
+        <p:nvSpPr>
+          <p:cNvPr id="55" name="Shape 53"/>
+          <p:cNvSpPr/>
+          <p:nvPr/>
+        </p:nvSpPr>
+        <p:spPr>
+          <a:xfrm>
+            <a:off x="7576947" y="4169664"/>
+            <a:ext cx="685800" cy="475488"/>
+          </a:xfrm>
+          <a:prstGeom prst="rect">
+            <a:avLst>
+              <a:gd name="adj" fmla="val 7692"/>
+            </a:avLst>
+          </a:prstGeom>
+          <a:solidFill>
+            <a:srgbClr val="FFFFFF"/>
+          </a:solidFill>
+          <a:ln w="12700">
+            <a:solidFill>
+              <a:srgbClr val="DB2777"/>
+            </a:solidFill>
+            <a:prstDash val="solid"/>
+          </a:ln>
+        </p:spPr>
+      </p:sp>
+      <p:sp>
+        <p:nvSpPr>
+          <p:cNvPr id="56" name="Text 54"/>
+          <p:cNvSpPr/>
+          <p:nvPr/>
+        </p:nvSpPr>
+        <p:spPr>
+          <a:xfrm>
+            <a:off x="7576947" y="4169664"/>
+            <a:ext cx="685800" cy="475488"/>
+          </a:xfrm>
+          <a:prstGeom prst="rect">
+            <a:avLst/>
+          </a:prstGeom>
+          <a:noFill/>
+          <a:ln/>
+        </p:spPr>
+        <p:txBody>
+          <a:bodyPr wrap="square" lIns="0" tIns="0" rIns="0" bIns="0" rtlCol="0" anchor="ctr"/>
+          <a:lstStyle/>
+          <a:p>
+            <a:pPr algn="ctr" indent="0" marL="0">
+              <a:buNone/>
+            </a:pPr>
+            <a:r>
+              <a:rPr lang="en-US" sz="900" b="1" dirty="0">
+                <a:solidFill>
+                  <a:srgbClr val="9D174D"/>
+                </a:solidFill>
+                <a:latin typeface="Trebuchet MS" pitchFamily="34" charset="0"/>
+                <a:ea typeface="Trebuchet MS" pitchFamily="34" charset="-122"/>
+                <a:cs typeface="Trebuchet MS" pitchFamily="34" charset="-120"/>
+              </a:rPr>
+              <a:t>ng</a:t>
             </a:r>
             <a:endParaRPr lang="en-US" sz="900" dirty="0"/>
           </a:p>
@@ -16755,7 +17886,7 @@
                 <a:ea typeface="Calibri" pitchFamily="34" charset="-122"/>
                 <a:cs typeface="Calibri" pitchFamily="34" charset="-120"/>
               </a:rPr>
-              <a:t>The </a:t>
+              <a:t>Although he was </a:t>
             </a:r>
             <a:pPr algn="l" indent="0" marL="0">
               <a:buNone/>
@@ -16772,7 +17903,7 @@
                 <a:ea typeface="Calibri" pitchFamily="34" charset="-122"/>
                 <a:cs typeface="Calibri" pitchFamily="34" charset="-120"/>
               </a:rPr>
-              <a:t>saddest</a:t>
+              <a:t>saddened</a:t>
             </a:r>
             <a:pPr algn="l" indent="0" marL="0">
               <a:buNone/>
@@ -16786,7 +17917,7 @@
                 <a:ea typeface="Calibri" pitchFamily="34" charset="-122"/>
                 <a:cs typeface="Calibri" pitchFamily="34" charset="-120"/>
               </a:rPr>
-              <a:t> part of the film made everyone cry </a:t>
+              <a:t> by the loss, he </a:t>
             </a:r>
             <a:pPr algn="l" indent="0" marL="0">
               <a:buNone/>
@@ -16817,7 +17948,7 @@
                 <a:ea typeface="Calibri" pitchFamily="34" charset="-122"/>
                 <a:cs typeface="Calibri" pitchFamily="34" charset="-120"/>
               </a:rPr>
-              <a:t>, and a deep </a:t>
+              <a:t> smiled and remembered the </a:t>
             </a:r>
             <a:pPr algn="l" indent="0" marL="0">
               <a:buNone/>
@@ -16834,7 +17965,7 @@
                 <a:ea typeface="Calibri" pitchFamily="34" charset="-122"/>
                 <a:cs typeface="Calibri" pitchFamily="34" charset="-120"/>
               </a:rPr>
-              <a:t>sadness</a:t>
+              <a:t>saddest</a:t>
             </a:r>
             <a:pPr algn="l" indent="0" marL="0">
               <a:buNone/>
@@ -16848,7 +17979,7 @@
                 <a:ea typeface="Calibri" pitchFamily="34" charset="-122"/>
                 <a:cs typeface="Calibri" pitchFamily="34" charset="-120"/>
               </a:rPr>
-              <a:t> settled over the whole room.</a:t>
+              <a:t> moments they had shared.</a:t>
             </a:r>
             <a:endParaRPr lang="en-US" sz="1800" dirty="0"/>
           </a:p>
@@ -17003,7 +18134,7 @@
                 <a:ea typeface="Trebuchet MS" pitchFamily="34" charset="-122"/>
                 <a:cs typeface="Trebuchet MS" pitchFamily="34" charset="-120"/>
               </a:rPr>
-              <a:t>saddest</a:t>
+              <a:t>saddened</a:t>
             </a:r>
             <a:endParaRPr lang="en-US" sz="1400" dirty="0"/>
           </a:p>
@@ -17259,7 +18390,7 @@
                 <a:ea typeface="Trebuchet MS" pitchFamily="34" charset="-122"/>
                 <a:cs typeface="Trebuchet MS" pitchFamily="34" charset="-120"/>
               </a:rPr>
-              <a:t>sadness</a:t>
+              <a:t>saddest</a:t>
             </a:r>
             <a:endParaRPr lang="en-US" sz="1400" dirty="0"/>
           </a:p>
@@ -17729,7 +18860,7 @@
                 <a:ea typeface="Trebuchet MS" pitchFamily="34" charset="-122"/>
                 <a:cs typeface="Trebuchet MS" pitchFamily="34" charset="-120"/>
               </a:rPr>
-              <a:t>saddest</a:t>
+              <a:t>saddened</a:t>
             </a:r>
             <a:endParaRPr lang="en-US" sz="2800" dirty="0"/>
           </a:p>
@@ -18556,7 +19687,7 @@
                 <a:ea typeface="Trebuchet MS" pitchFamily="34" charset="-122"/>
                 <a:cs typeface="Trebuchet MS" pitchFamily="34" charset="-120"/>
               </a:rPr>
-              <a:t>saddest</a:t>
+              <a:t>saddened</a:t>
             </a:r>
             <a:endParaRPr lang="en-US" sz="2800" dirty="0"/>
           </a:p>
@@ -18636,8 +19767,8 @@
         </p:nvSpPr>
         <p:spPr>
           <a:xfrm>
-            <a:off x="2938272" y="2258568"/>
-            <a:ext cx="1828800" cy="292608"/>
+            <a:off x="1989734" y="2258568"/>
+            <a:ext cx="1581912" cy="292608"/>
           </a:xfrm>
           <a:prstGeom prst="rect">
             <a:avLst>
@@ -18670,8 +19801,8 @@
         </p:nvSpPr>
         <p:spPr>
           <a:xfrm>
-            <a:off x="2938272" y="2258568"/>
-            <a:ext cx="1828800" cy="292608"/>
+            <a:off x="1989734" y="2258568"/>
+            <a:ext cx="1581912" cy="292608"/>
           </a:xfrm>
           <a:prstGeom prst="rect">
             <a:avLst/>
@@ -18709,8 +19840,8 @@
         </p:nvSpPr>
         <p:spPr>
           <a:xfrm>
-            <a:off x="2938272" y="2569464"/>
-            <a:ext cx="1828800" cy="201168"/>
+            <a:off x="1989734" y="2569464"/>
+            <a:ext cx="1581912" cy="201168"/>
           </a:xfrm>
           <a:prstGeom prst="rect">
             <a:avLst/>
@@ -18742,53 +19873,14 @@
       </p:sp>
       <p:sp>
         <p:nvSpPr>
-          <p:cNvPr id="19" name="Text 17"/>
-          <p:cNvSpPr/>
-          <p:nvPr/>
-        </p:nvSpPr>
-        <p:spPr>
-          <a:xfrm>
-            <a:off x="2938272" y="2752344"/>
-            <a:ext cx="1828800" cy="182880"/>
-          </a:xfrm>
-          <a:prstGeom prst="rect">
-            <a:avLst/>
-          </a:prstGeom>
-          <a:noFill/>
-          <a:ln/>
-        </p:spPr>
-        <p:txBody>
-          <a:bodyPr wrap="square" lIns="0" tIns="0" rIns="0" bIns="0" rtlCol="0" anchor="t"/>
-          <a:lstStyle/>
-          <a:p>
-            <a:pPr algn="ctr" indent="0" marL="0">
-              <a:buNone/>
-            </a:pPr>
-            <a:r>
-              <a:rPr lang="en-US" sz="700" i="1" dirty="0">
-                <a:solidFill>
-                  <a:srgbClr val="94A3B8"/>
-                </a:solidFill>
-                <a:latin typeface="Calibri" pitchFamily="34" charset="0"/>
-                <a:ea typeface="Calibri" pitchFamily="34" charset="-122"/>
-                <a:cs typeface="Calibri" pitchFamily="34" charset="-120"/>
-              </a:rPr>
-              <a:t>double 'd' before suffix</a:t>
-            </a:r>
-            <a:endParaRPr lang="en-US" sz="700" dirty="0"/>
-          </a:p>
-        </p:txBody>
-      </p:sp>
-      <p:sp>
-        <p:nvSpPr>
-          <p:cNvPr id="20" name="Shape 18"/>
-          <p:cNvSpPr/>
-          <p:nvPr/>
-        </p:nvSpPr>
-        <p:spPr>
-          <a:xfrm>
-            <a:off x="5803392" y="2258568"/>
-            <a:ext cx="1828800" cy="292608"/>
+          <p:cNvPr id="19" name="Shape 17"/>
+          <p:cNvSpPr/>
+          <p:nvPr/>
+        </p:nvSpPr>
+        <p:spPr>
+          <a:xfrm>
+            <a:off x="3659429" y="2258568"/>
+            <a:ext cx="1581912" cy="292608"/>
           </a:xfrm>
           <a:prstGeom prst="rect">
             <a:avLst>
@@ -18815,14 +19907,14 @@
       </p:sp>
       <p:sp>
         <p:nvSpPr>
-          <p:cNvPr id="21" name="Text 19"/>
-          <p:cNvSpPr/>
-          <p:nvPr/>
-        </p:nvSpPr>
-        <p:spPr>
-          <a:xfrm>
-            <a:off x="5803392" y="2258568"/>
-            <a:ext cx="1828800" cy="292608"/>
+          <p:cNvPr id="20" name="Text 18"/>
+          <p:cNvSpPr/>
+          <p:nvPr/>
+        </p:nvSpPr>
+        <p:spPr>
+          <a:xfrm>
+            <a:off x="3659429" y="2258568"/>
+            <a:ext cx="1581912" cy="292608"/>
           </a:xfrm>
           <a:prstGeom prst="rect">
             <a:avLst/>
@@ -18846,7 +19938,7 @@
                 <a:ea typeface="Trebuchet MS" pitchFamily="34" charset="-122"/>
                 <a:cs typeface="Trebuchet MS" pitchFamily="34" charset="-120"/>
               </a:rPr>
-              <a:t>est</a:t>
+              <a:t>d</a:t>
             </a:r>
             <a:endParaRPr lang="en-US" sz="1300" dirty="0"/>
           </a:p>
@@ -18854,14 +19946,14 @@
       </p:sp>
       <p:sp>
         <p:nvSpPr>
-          <p:cNvPr id="22" name="Text 20"/>
-          <p:cNvSpPr/>
-          <p:nvPr/>
-        </p:nvSpPr>
-        <p:spPr>
-          <a:xfrm>
-            <a:off x="5803392" y="2569464"/>
-            <a:ext cx="1828800" cy="201168"/>
+          <p:cNvPr id="21" name="Text 19"/>
+          <p:cNvSpPr/>
+          <p:nvPr/>
+        </p:nvSpPr>
+        <p:spPr>
+          <a:xfrm>
+            <a:off x="3659429" y="2569464"/>
+            <a:ext cx="1581912" cy="201168"/>
           </a:xfrm>
           <a:prstGeom prst="rect">
             <a:avLst/>
@@ -18885,7 +19977,7 @@
                 <a:ea typeface="Calibri" pitchFamily="34" charset="-122"/>
                 <a:cs typeface="Calibri" pitchFamily="34" charset="-120"/>
               </a:rPr>
-              <a:t>the most</a:t>
+              <a:t>doubled consonant before suffix</a:t>
             </a:r>
             <a:endParaRPr lang="en-US" sz="850" dirty="0"/>
           </a:p>
@@ -18893,7 +19985,270 @@
       </p:sp>
       <p:sp>
         <p:nvSpPr>
+          <p:cNvPr id="22" name="Text 20"/>
+          <p:cNvSpPr/>
+          <p:nvPr/>
+        </p:nvSpPr>
+        <p:spPr>
+          <a:xfrm>
+            <a:off x="3659429" y="2752344"/>
+            <a:ext cx="1581912" cy="182880"/>
+          </a:xfrm>
+          <a:prstGeom prst="rect">
+            <a:avLst/>
+          </a:prstGeom>
+          <a:noFill/>
+          <a:ln/>
+        </p:spPr>
+        <p:txBody>
+          <a:bodyPr wrap="square" lIns="0" tIns="0" rIns="0" bIns="0" rtlCol="0" anchor="t"/>
+          <a:lstStyle/>
+          <a:p>
+            <a:pPr algn="ctr" indent="0" marL="0">
+              <a:buNone/>
+            </a:pPr>
+            <a:r>
+              <a:rPr lang="en-US" sz="700" i="1" dirty="0">
+                <a:solidFill>
+                  <a:srgbClr val="94A3B8"/>
+                </a:solidFill>
+                <a:latin typeface="Calibri" pitchFamily="34" charset="0"/>
+                <a:ea typeface="Calibri" pitchFamily="34" charset="-122"/>
+                <a:cs typeface="Calibri" pitchFamily="34" charset="-120"/>
+              </a:rPr>
+              <a:t>final consonant doubled before vowel suffix</a:t>
+            </a:r>
+            <a:endParaRPr lang="en-US" sz="700" dirty="0"/>
+          </a:p>
+        </p:txBody>
+      </p:sp>
+      <p:sp>
+        <p:nvSpPr>
           <p:cNvPr id="23" name="Shape 21"/>
+          <p:cNvSpPr/>
+          <p:nvPr/>
+        </p:nvSpPr>
+        <p:spPr>
+          <a:xfrm>
+            <a:off x="5329123" y="2258568"/>
+            <a:ext cx="1581912" cy="292608"/>
+          </a:xfrm>
+          <a:prstGeom prst="rect">
+            <a:avLst>
+              <a:gd name="adj" fmla="val 25000"/>
+            </a:avLst>
+          </a:prstGeom>
+          <a:solidFill>
+            <a:srgbClr val="FCE7F3"/>
+          </a:solidFill>
+          <a:ln w="19050">
+            <a:solidFill>
+              <a:srgbClr val="DB2777"/>
+            </a:solidFill>
+            <a:prstDash val="solid"/>
+          </a:ln>
+          <a:effectLst>
+            <a:outerShdw sx="100000" sy="100000" kx="0" ky="0" algn="bl" rotWithShape="0" blurRad="101600" dist="38100" dir="8100000">
+              <a:srgbClr val="000000">
+                <a:alpha val="12000"/>
+              </a:srgbClr>
+            </a:outerShdw>
+          </a:effectLst>
+        </p:spPr>
+      </p:sp>
+      <p:sp>
+        <p:nvSpPr>
+          <p:cNvPr id="24" name="Text 22"/>
+          <p:cNvSpPr/>
+          <p:nvPr/>
+        </p:nvSpPr>
+        <p:spPr>
+          <a:xfrm>
+            <a:off x="5329123" y="2258568"/>
+            <a:ext cx="1581912" cy="292608"/>
+          </a:xfrm>
+          <a:prstGeom prst="rect">
+            <a:avLst/>
+          </a:prstGeom>
+          <a:noFill/>
+          <a:ln/>
+        </p:spPr>
+        <p:txBody>
+          <a:bodyPr wrap="square" lIns="0" tIns="0" rIns="0" bIns="0" rtlCol="0" anchor="ctr"/>
+          <a:lstStyle/>
+          <a:p>
+            <a:pPr algn="ctr" indent="0" marL="0">
+              <a:buNone/>
+            </a:pPr>
+            <a:r>
+              <a:rPr lang="en-US" sz="1300" b="1" dirty="0">
+                <a:solidFill>
+                  <a:srgbClr val="9D174D"/>
+                </a:solidFill>
+                <a:latin typeface="Trebuchet MS" pitchFamily="34" charset="0"/>
+                <a:ea typeface="Trebuchet MS" pitchFamily="34" charset="-122"/>
+                <a:cs typeface="Trebuchet MS" pitchFamily="34" charset="-120"/>
+              </a:rPr>
+              <a:t>en</a:t>
+            </a:r>
+            <a:endParaRPr lang="en-US" sz="1300" dirty="0"/>
+          </a:p>
+        </p:txBody>
+      </p:sp>
+      <p:sp>
+        <p:nvSpPr>
+          <p:cNvPr id="25" name="Text 23"/>
+          <p:cNvSpPr/>
+          <p:nvPr/>
+        </p:nvSpPr>
+        <p:spPr>
+          <a:xfrm>
+            <a:off x="5329123" y="2569464"/>
+            <a:ext cx="1581912" cy="201168"/>
+          </a:xfrm>
+          <a:prstGeom prst="rect">
+            <a:avLst/>
+          </a:prstGeom>
+          <a:noFill/>
+          <a:ln/>
+        </p:spPr>
+        <p:txBody>
+          <a:bodyPr wrap="square" lIns="0" tIns="0" rIns="0" bIns="0" rtlCol="0" anchor="t"/>
+          <a:lstStyle/>
+          <a:p>
+            <a:pPr algn="ctr" indent="0" marL="0">
+              <a:buNone/>
+            </a:pPr>
+            <a:r>
+              <a:rPr lang="en-US" sz="850" dirty="0">
+                <a:solidFill>
+                  <a:srgbClr val="475569"/>
+                </a:solidFill>
+                <a:latin typeface="Calibri" pitchFamily="34" charset="0"/>
+                <a:ea typeface="Calibri" pitchFamily="34" charset="-122"/>
+                <a:cs typeface="Calibri" pitchFamily="34" charset="-120"/>
+              </a:rPr>
+              <a:t>to make or become</a:t>
+            </a:r>
+            <a:endParaRPr lang="en-US" sz="850" dirty="0"/>
+          </a:p>
+        </p:txBody>
+      </p:sp>
+      <p:sp>
+        <p:nvSpPr>
+          <p:cNvPr id="26" name="Shape 24"/>
+          <p:cNvSpPr/>
+          <p:nvPr/>
+        </p:nvSpPr>
+        <p:spPr>
+          <a:xfrm>
+            <a:off x="6998818" y="2258568"/>
+            <a:ext cx="1581912" cy="292608"/>
+          </a:xfrm>
+          <a:prstGeom prst="rect">
+            <a:avLst>
+              <a:gd name="adj" fmla="val 25000"/>
+            </a:avLst>
+          </a:prstGeom>
+          <a:solidFill>
+            <a:srgbClr val="FCE7F3"/>
+          </a:solidFill>
+          <a:ln w="19050">
+            <a:solidFill>
+              <a:srgbClr val="DB2777"/>
+            </a:solidFill>
+            <a:prstDash val="solid"/>
+          </a:ln>
+          <a:effectLst>
+            <a:outerShdw sx="100000" sy="100000" kx="0" ky="0" algn="bl" rotWithShape="0" blurRad="101600" dist="38100" dir="8100000">
+              <a:srgbClr val="000000">
+                <a:alpha val="12000"/>
+              </a:srgbClr>
+            </a:outerShdw>
+          </a:effectLst>
+        </p:spPr>
+      </p:sp>
+      <p:sp>
+        <p:nvSpPr>
+          <p:cNvPr id="27" name="Text 25"/>
+          <p:cNvSpPr/>
+          <p:nvPr/>
+        </p:nvSpPr>
+        <p:spPr>
+          <a:xfrm>
+            <a:off x="6998818" y="2258568"/>
+            <a:ext cx="1581912" cy="292608"/>
+          </a:xfrm>
+          <a:prstGeom prst="rect">
+            <a:avLst/>
+          </a:prstGeom>
+          <a:noFill/>
+          <a:ln/>
+        </p:spPr>
+        <p:txBody>
+          <a:bodyPr wrap="square" lIns="0" tIns="0" rIns="0" bIns="0" rtlCol="0" anchor="ctr"/>
+          <a:lstStyle/>
+          <a:p>
+            <a:pPr algn="ctr" indent="0" marL="0">
+              <a:buNone/>
+            </a:pPr>
+            <a:r>
+              <a:rPr lang="en-US" sz="1300" b="1" dirty="0">
+                <a:solidFill>
+                  <a:srgbClr val="9D174D"/>
+                </a:solidFill>
+                <a:latin typeface="Trebuchet MS" pitchFamily="34" charset="0"/>
+                <a:ea typeface="Trebuchet MS" pitchFamily="34" charset="-122"/>
+                <a:cs typeface="Trebuchet MS" pitchFamily="34" charset="-120"/>
+              </a:rPr>
+              <a:t>ed</a:t>
+            </a:r>
+            <a:endParaRPr lang="en-US" sz="1300" dirty="0"/>
+          </a:p>
+        </p:txBody>
+      </p:sp>
+      <p:sp>
+        <p:nvSpPr>
+          <p:cNvPr id="28" name="Text 26"/>
+          <p:cNvSpPr/>
+          <p:nvPr/>
+        </p:nvSpPr>
+        <p:spPr>
+          <a:xfrm>
+            <a:off x="6998818" y="2569464"/>
+            <a:ext cx="1581912" cy="201168"/>
+          </a:xfrm>
+          <a:prstGeom prst="rect">
+            <a:avLst/>
+          </a:prstGeom>
+          <a:noFill/>
+          <a:ln/>
+        </p:spPr>
+        <p:txBody>
+          <a:bodyPr wrap="square" lIns="0" tIns="0" rIns="0" bIns="0" rtlCol="0" anchor="t"/>
+          <a:lstStyle/>
+          <a:p>
+            <a:pPr algn="ctr" indent="0" marL="0">
+              <a:buNone/>
+            </a:pPr>
+            <a:r>
+              <a:rPr lang="en-US" sz="850" dirty="0">
+                <a:solidFill>
+                  <a:srgbClr val="475569"/>
+                </a:solidFill>
+                <a:latin typeface="Calibri" pitchFamily="34" charset="0"/>
+                <a:ea typeface="Calibri" pitchFamily="34" charset="-122"/>
+                <a:cs typeface="Calibri" pitchFamily="34" charset="-120"/>
+              </a:rPr>
+              <a:t>past tense</a:t>
+            </a:r>
+            <a:endParaRPr lang="en-US" sz="850" dirty="0"/>
+          </a:p>
+        </p:txBody>
+      </p:sp>
+      <p:sp>
+        <p:nvSpPr>
+          <p:cNvPr id="29" name="Shape 27"/>
           <p:cNvSpPr/>
           <p:nvPr/>
         </p:nvSpPr>
@@ -18920,7 +20275,7 @@
       </p:sp>
       <p:sp>
         <p:nvSpPr>
-          <p:cNvPr id="24" name="Text 22"/>
+          <p:cNvPr id="30" name="Text 28"/>
           <p:cNvSpPr/>
           <p:nvPr/>
         </p:nvSpPr>
@@ -18959,7 +20314,7 @@
       </p:sp>
       <p:sp>
         <p:nvSpPr>
-          <p:cNvPr id="25" name="Shape 23"/>
+          <p:cNvPr id="31" name="Shape 29"/>
           <p:cNvSpPr/>
           <p:nvPr/>
         </p:nvSpPr>
@@ -18986,7 +20341,7 @@
       </p:sp>
       <p:sp>
         <p:nvSpPr>
-          <p:cNvPr id="26" name="Text 24"/>
+          <p:cNvPr id="32" name="Text 30"/>
           <p:cNvSpPr/>
           <p:nvPr/>
         </p:nvSpPr>
@@ -19025,7 +20380,7 @@
       </p:sp>
       <p:sp>
         <p:nvSpPr>
-          <p:cNvPr id="27" name="Shape 25"/>
+          <p:cNvPr id="33" name="Shape 31"/>
           <p:cNvSpPr/>
           <p:nvPr/>
         </p:nvSpPr>
@@ -19052,7 +20407,7 @@
       </p:sp>
       <p:sp>
         <p:nvSpPr>
-          <p:cNvPr id="28" name="Text 26"/>
+          <p:cNvPr id="34" name="Text 32"/>
           <p:cNvSpPr/>
           <p:nvPr/>
         </p:nvSpPr>
@@ -19091,7 +20446,7 @@
       </p:sp>
       <p:sp>
         <p:nvSpPr>
-          <p:cNvPr id="29" name="Shape 27"/>
+          <p:cNvPr id="35" name="Shape 33"/>
           <p:cNvSpPr/>
           <p:nvPr/>
         </p:nvSpPr>
@@ -19118,7 +20473,7 @@
       </p:sp>
       <p:sp>
         <p:nvSpPr>
-          <p:cNvPr id="30" name="Text 28"/>
+          <p:cNvPr id="36" name="Text 34"/>
           <p:cNvSpPr/>
           <p:nvPr/>
         </p:nvSpPr>
@@ -19580,7 +20935,7 @@
                 <a:ea typeface="Trebuchet MS" pitchFamily="34" charset="-122"/>
                 <a:cs typeface="Trebuchet MS" pitchFamily="34" charset="-120"/>
               </a:rPr>
-              <a:t>saddest</a:t>
+              <a:t>saddened</a:t>
             </a:r>
             <a:endParaRPr lang="en-US" sz="2800" dirty="0"/>
           </a:p>
@@ -19660,8 +21015,8 @@
         </p:nvSpPr>
         <p:spPr>
           <a:xfrm>
-            <a:off x="2938272" y="2258568"/>
-            <a:ext cx="1828800" cy="292608"/>
+            <a:off x="1989734" y="2258568"/>
+            <a:ext cx="1581912" cy="292608"/>
           </a:xfrm>
           <a:prstGeom prst="rect">
             <a:avLst>
@@ -19694,8 +21049,8 @@
         </p:nvSpPr>
         <p:spPr>
           <a:xfrm>
-            <a:off x="2938272" y="2258568"/>
-            <a:ext cx="1828800" cy="292608"/>
+            <a:off x="1989734" y="2258568"/>
+            <a:ext cx="1581912" cy="292608"/>
           </a:xfrm>
           <a:prstGeom prst="rect">
             <a:avLst/>
@@ -19733,8 +21088,8 @@
         </p:nvSpPr>
         <p:spPr>
           <a:xfrm>
-            <a:off x="2938272" y="2569464"/>
-            <a:ext cx="1828800" cy="201168"/>
+            <a:off x="1989734" y="2569464"/>
+            <a:ext cx="1581912" cy="201168"/>
           </a:xfrm>
           <a:prstGeom prst="rect">
             <a:avLst/>
@@ -19766,53 +21121,14 @@
       </p:sp>
       <p:sp>
         <p:nvSpPr>
-          <p:cNvPr id="19" name="Text 17"/>
-          <p:cNvSpPr/>
-          <p:nvPr/>
-        </p:nvSpPr>
-        <p:spPr>
-          <a:xfrm>
-            <a:off x="2938272" y="2752344"/>
-            <a:ext cx="1828800" cy="182880"/>
-          </a:xfrm>
-          <a:prstGeom prst="rect">
-            <a:avLst/>
-          </a:prstGeom>
-          <a:noFill/>
-          <a:ln/>
-        </p:spPr>
-        <p:txBody>
-          <a:bodyPr wrap="square" lIns="0" tIns="0" rIns="0" bIns="0" rtlCol="0" anchor="t"/>
-          <a:lstStyle/>
-          <a:p>
-            <a:pPr algn="ctr" indent="0" marL="0">
-              <a:buNone/>
-            </a:pPr>
-            <a:r>
-              <a:rPr lang="en-US" sz="700" i="1" dirty="0">
-                <a:solidFill>
-                  <a:srgbClr val="94A3B8"/>
-                </a:solidFill>
-                <a:latin typeface="Calibri" pitchFamily="34" charset="0"/>
-                <a:ea typeface="Calibri" pitchFamily="34" charset="-122"/>
-                <a:cs typeface="Calibri" pitchFamily="34" charset="-120"/>
-              </a:rPr>
-              <a:t>double 'd' before suffix</a:t>
-            </a:r>
-            <a:endParaRPr lang="en-US" sz="700" dirty="0"/>
-          </a:p>
-        </p:txBody>
-      </p:sp>
-      <p:sp>
-        <p:nvSpPr>
-          <p:cNvPr id="20" name="Shape 18"/>
-          <p:cNvSpPr/>
-          <p:nvPr/>
-        </p:nvSpPr>
-        <p:spPr>
-          <a:xfrm>
-            <a:off x="5803392" y="2258568"/>
-            <a:ext cx="1828800" cy="292608"/>
+          <p:cNvPr id="19" name="Shape 17"/>
+          <p:cNvSpPr/>
+          <p:nvPr/>
+        </p:nvSpPr>
+        <p:spPr>
+          <a:xfrm>
+            <a:off x="3659429" y="2258568"/>
+            <a:ext cx="1581912" cy="292608"/>
           </a:xfrm>
           <a:prstGeom prst="rect">
             <a:avLst>
@@ -19839,14 +21155,14 @@
       </p:sp>
       <p:sp>
         <p:nvSpPr>
-          <p:cNvPr id="21" name="Text 19"/>
-          <p:cNvSpPr/>
-          <p:nvPr/>
-        </p:nvSpPr>
-        <p:spPr>
-          <a:xfrm>
-            <a:off x="5803392" y="2258568"/>
-            <a:ext cx="1828800" cy="292608"/>
+          <p:cNvPr id="20" name="Text 18"/>
+          <p:cNvSpPr/>
+          <p:nvPr/>
+        </p:nvSpPr>
+        <p:spPr>
+          <a:xfrm>
+            <a:off x="3659429" y="2258568"/>
+            <a:ext cx="1581912" cy="292608"/>
           </a:xfrm>
           <a:prstGeom prst="rect">
             <a:avLst/>
@@ -19870,7 +21186,7 @@
                 <a:ea typeface="Trebuchet MS" pitchFamily="34" charset="-122"/>
                 <a:cs typeface="Trebuchet MS" pitchFamily="34" charset="-120"/>
               </a:rPr>
-              <a:t>est</a:t>
+              <a:t>d</a:t>
             </a:r>
             <a:endParaRPr lang="en-US" sz="1300" dirty="0"/>
           </a:p>
@@ -19878,14 +21194,14 @@
       </p:sp>
       <p:sp>
         <p:nvSpPr>
-          <p:cNvPr id="22" name="Text 20"/>
-          <p:cNvSpPr/>
-          <p:nvPr/>
-        </p:nvSpPr>
-        <p:spPr>
-          <a:xfrm>
-            <a:off x="5803392" y="2569464"/>
-            <a:ext cx="1828800" cy="201168"/>
+          <p:cNvPr id="21" name="Text 19"/>
+          <p:cNvSpPr/>
+          <p:nvPr/>
+        </p:nvSpPr>
+        <p:spPr>
+          <a:xfrm>
+            <a:off x="3659429" y="2569464"/>
+            <a:ext cx="1581912" cy="201168"/>
           </a:xfrm>
           <a:prstGeom prst="rect">
             <a:avLst/>
@@ -19909,7 +21225,7 @@
                 <a:ea typeface="Calibri" pitchFamily="34" charset="-122"/>
                 <a:cs typeface="Calibri" pitchFamily="34" charset="-120"/>
               </a:rPr>
-              <a:t>the most</a:t>
+              <a:t>doubled consonant before suffix</a:t>
             </a:r>
             <a:endParaRPr lang="en-US" sz="850" dirty="0"/>
           </a:p>
@@ -19917,7 +21233,270 @@
       </p:sp>
       <p:sp>
         <p:nvSpPr>
+          <p:cNvPr id="22" name="Text 20"/>
+          <p:cNvSpPr/>
+          <p:nvPr/>
+        </p:nvSpPr>
+        <p:spPr>
+          <a:xfrm>
+            <a:off x="3659429" y="2752344"/>
+            <a:ext cx="1581912" cy="182880"/>
+          </a:xfrm>
+          <a:prstGeom prst="rect">
+            <a:avLst/>
+          </a:prstGeom>
+          <a:noFill/>
+          <a:ln/>
+        </p:spPr>
+        <p:txBody>
+          <a:bodyPr wrap="square" lIns="0" tIns="0" rIns="0" bIns="0" rtlCol="0" anchor="t"/>
+          <a:lstStyle/>
+          <a:p>
+            <a:pPr algn="ctr" indent="0" marL="0">
+              <a:buNone/>
+            </a:pPr>
+            <a:r>
+              <a:rPr lang="en-US" sz="700" i="1" dirty="0">
+                <a:solidFill>
+                  <a:srgbClr val="94A3B8"/>
+                </a:solidFill>
+                <a:latin typeface="Calibri" pitchFamily="34" charset="0"/>
+                <a:ea typeface="Calibri" pitchFamily="34" charset="-122"/>
+                <a:cs typeface="Calibri" pitchFamily="34" charset="-120"/>
+              </a:rPr>
+              <a:t>final consonant doubled before vowel suffix</a:t>
+            </a:r>
+            <a:endParaRPr lang="en-US" sz="700" dirty="0"/>
+          </a:p>
+        </p:txBody>
+      </p:sp>
+      <p:sp>
+        <p:nvSpPr>
           <p:cNvPr id="23" name="Shape 21"/>
+          <p:cNvSpPr/>
+          <p:nvPr/>
+        </p:nvSpPr>
+        <p:spPr>
+          <a:xfrm>
+            <a:off x="5329123" y="2258568"/>
+            <a:ext cx="1581912" cy="292608"/>
+          </a:xfrm>
+          <a:prstGeom prst="rect">
+            <a:avLst>
+              <a:gd name="adj" fmla="val 25000"/>
+            </a:avLst>
+          </a:prstGeom>
+          <a:solidFill>
+            <a:srgbClr val="FCE7F3"/>
+          </a:solidFill>
+          <a:ln w="19050">
+            <a:solidFill>
+              <a:srgbClr val="DB2777"/>
+            </a:solidFill>
+            <a:prstDash val="solid"/>
+          </a:ln>
+          <a:effectLst>
+            <a:outerShdw sx="100000" sy="100000" kx="0" ky="0" algn="bl" rotWithShape="0" blurRad="101600" dist="38100" dir="8100000">
+              <a:srgbClr val="000000">
+                <a:alpha val="12000"/>
+              </a:srgbClr>
+            </a:outerShdw>
+          </a:effectLst>
+        </p:spPr>
+      </p:sp>
+      <p:sp>
+        <p:nvSpPr>
+          <p:cNvPr id="24" name="Text 22"/>
+          <p:cNvSpPr/>
+          <p:nvPr/>
+        </p:nvSpPr>
+        <p:spPr>
+          <a:xfrm>
+            <a:off x="5329123" y="2258568"/>
+            <a:ext cx="1581912" cy="292608"/>
+          </a:xfrm>
+          <a:prstGeom prst="rect">
+            <a:avLst/>
+          </a:prstGeom>
+          <a:noFill/>
+          <a:ln/>
+        </p:spPr>
+        <p:txBody>
+          <a:bodyPr wrap="square" lIns="0" tIns="0" rIns="0" bIns="0" rtlCol="0" anchor="ctr"/>
+          <a:lstStyle/>
+          <a:p>
+            <a:pPr algn="ctr" indent="0" marL="0">
+              <a:buNone/>
+            </a:pPr>
+            <a:r>
+              <a:rPr lang="en-US" sz="1300" b="1" dirty="0">
+                <a:solidFill>
+                  <a:srgbClr val="9D174D"/>
+                </a:solidFill>
+                <a:latin typeface="Trebuchet MS" pitchFamily="34" charset="0"/>
+                <a:ea typeface="Trebuchet MS" pitchFamily="34" charset="-122"/>
+                <a:cs typeface="Trebuchet MS" pitchFamily="34" charset="-120"/>
+              </a:rPr>
+              <a:t>en</a:t>
+            </a:r>
+            <a:endParaRPr lang="en-US" sz="1300" dirty="0"/>
+          </a:p>
+        </p:txBody>
+      </p:sp>
+      <p:sp>
+        <p:nvSpPr>
+          <p:cNvPr id="25" name="Text 23"/>
+          <p:cNvSpPr/>
+          <p:nvPr/>
+        </p:nvSpPr>
+        <p:spPr>
+          <a:xfrm>
+            <a:off x="5329123" y="2569464"/>
+            <a:ext cx="1581912" cy="201168"/>
+          </a:xfrm>
+          <a:prstGeom prst="rect">
+            <a:avLst/>
+          </a:prstGeom>
+          <a:noFill/>
+          <a:ln/>
+        </p:spPr>
+        <p:txBody>
+          <a:bodyPr wrap="square" lIns="0" tIns="0" rIns="0" bIns="0" rtlCol="0" anchor="t"/>
+          <a:lstStyle/>
+          <a:p>
+            <a:pPr algn="ctr" indent="0" marL="0">
+              <a:buNone/>
+            </a:pPr>
+            <a:r>
+              <a:rPr lang="en-US" sz="850" dirty="0">
+                <a:solidFill>
+                  <a:srgbClr val="475569"/>
+                </a:solidFill>
+                <a:latin typeface="Calibri" pitchFamily="34" charset="0"/>
+                <a:ea typeface="Calibri" pitchFamily="34" charset="-122"/>
+                <a:cs typeface="Calibri" pitchFamily="34" charset="-120"/>
+              </a:rPr>
+              <a:t>to make or become</a:t>
+            </a:r>
+            <a:endParaRPr lang="en-US" sz="850" dirty="0"/>
+          </a:p>
+        </p:txBody>
+      </p:sp>
+      <p:sp>
+        <p:nvSpPr>
+          <p:cNvPr id="26" name="Shape 24"/>
+          <p:cNvSpPr/>
+          <p:nvPr/>
+        </p:nvSpPr>
+        <p:spPr>
+          <a:xfrm>
+            <a:off x="6998818" y="2258568"/>
+            <a:ext cx="1581912" cy="292608"/>
+          </a:xfrm>
+          <a:prstGeom prst="rect">
+            <a:avLst>
+              <a:gd name="adj" fmla="val 25000"/>
+            </a:avLst>
+          </a:prstGeom>
+          <a:solidFill>
+            <a:srgbClr val="FCE7F3"/>
+          </a:solidFill>
+          <a:ln w="19050">
+            <a:solidFill>
+              <a:srgbClr val="DB2777"/>
+            </a:solidFill>
+            <a:prstDash val="solid"/>
+          </a:ln>
+          <a:effectLst>
+            <a:outerShdw sx="100000" sy="100000" kx="0" ky="0" algn="bl" rotWithShape="0" blurRad="101600" dist="38100" dir="8100000">
+              <a:srgbClr val="000000">
+                <a:alpha val="12000"/>
+              </a:srgbClr>
+            </a:outerShdw>
+          </a:effectLst>
+        </p:spPr>
+      </p:sp>
+      <p:sp>
+        <p:nvSpPr>
+          <p:cNvPr id="27" name="Text 25"/>
+          <p:cNvSpPr/>
+          <p:nvPr/>
+        </p:nvSpPr>
+        <p:spPr>
+          <a:xfrm>
+            <a:off x="6998818" y="2258568"/>
+            <a:ext cx="1581912" cy="292608"/>
+          </a:xfrm>
+          <a:prstGeom prst="rect">
+            <a:avLst/>
+          </a:prstGeom>
+          <a:noFill/>
+          <a:ln/>
+        </p:spPr>
+        <p:txBody>
+          <a:bodyPr wrap="square" lIns="0" tIns="0" rIns="0" bIns="0" rtlCol="0" anchor="ctr"/>
+          <a:lstStyle/>
+          <a:p>
+            <a:pPr algn="ctr" indent="0" marL="0">
+              <a:buNone/>
+            </a:pPr>
+            <a:r>
+              <a:rPr lang="en-US" sz="1300" b="1" dirty="0">
+                <a:solidFill>
+                  <a:srgbClr val="9D174D"/>
+                </a:solidFill>
+                <a:latin typeface="Trebuchet MS" pitchFamily="34" charset="0"/>
+                <a:ea typeface="Trebuchet MS" pitchFamily="34" charset="-122"/>
+                <a:cs typeface="Trebuchet MS" pitchFamily="34" charset="-120"/>
+              </a:rPr>
+              <a:t>ed</a:t>
+            </a:r>
+            <a:endParaRPr lang="en-US" sz="1300" dirty="0"/>
+          </a:p>
+        </p:txBody>
+      </p:sp>
+      <p:sp>
+        <p:nvSpPr>
+          <p:cNvPr id="28" name="Text 26"/>
+          <p:cNvSpPr/>
+          <p:nvPr/>
+        </p:nvSpPr>
+        <p:spPr>
+          <a:xfrm>
+            <a:off x="6998818" y="2569464"/>
+            <a:ext cx="1581912" cy="201168"/>
+          </a:xfrm>
+          <a:prstGeom prst="rect">
+            <a:avLst/>
+          </a:prstGeom>
+          <a:noFill/>
+          <a:ln/>
+        </p:spPr>
+        <p:txBody>
+          <a:bodyPr wrap="square" lIns="0" tIns="0" rIns="0" bIns="0" rtlCol="0" anchor="t"/>
+          <a:lstStyle/>
+          <a:p>
+            <a:pPr algn="ctr" indent="0" marL="0">
+              <a:buNone/>
+            </a:pPr>
+            <a:r>
+              <a:rPr lang="en-US" sz="850" dirty="0">
+                <a:solidFill>
+                  <a:srgbClr val="475569"/>
+                </a:solidFill>
+                <a:latin typeface="Calibri" pitchFamily="34" charset="0"/>
+                <a:ea typeface="Calibri" pitchFamily="34" charset="-122"/>
+                <a:cs typeface="Calibri" pitchFamily="34" charset="-120"/>
+              </a:rPr>
+              <a:t>past tense</a:t>
+            </a:r>
+            <a:endParaRPr lang="en-US" sz="850" dirty="0"/>
+          </a:p>
+        </p:txBody>
+      </p:sp>
+      <p:sp>
+        <p:nvSpPr>
+          <p:cNvPr id="29" name="Shape 27"/>
           <p:cNvSpPr/>
           <p:nvPr/>
         </p:nvSpPr>
@@ -19944,7 +21523,7 @@
       </p:sp>
       <p:sp>
         <p:nvSpPr>
-          <p:cNvPr id="24" name="Text 22"/>
+          <p:cNvPr id="30" name="Text 28"/>
           <p:cNvSpPr/>
           <p:nvPr/>
         </p:nvSpPr>
@@ -19983,7 +21562,7 @@
       </p:sp>
       <p:sp>
         <p:nvSpPr>
-          <p:cNvPr id="25" name="Shape 23"/>
+          <p:cNvPr id="31" name="Shape 29"/>
           <p:cNvSpPr/>
           <p:nvPr/>
         </p:nvSpPr>
@@ -20010,7 +21589,7 @@
       </p:sp>
       <p:sp>
         <p:nvSpPr>
-          <p:cNvPr id="26" name="Shape 24"/>
+          <p:cNvPr id="32" name="Shape 30"/>
           <p:cNvSpPr/>
           <p:nvPr/>
         </p:nvSpPr>
@@ -20037,7 +21616,7 @@
       </p:sp>
       <p:sp>
         <p:nvSpPr>
-          <p:cNvPr id="27" name="Text 25"/>
+          <p:cNvPr id="33" name="Text 31"/>
           <p:cNvSpPr/>
           <p:nvPr/>
         </p:nvSpPr>
@@ -20076,7 +21655,7 @@
       </p:sp>
       <p:sp>
         <p:nvSpPr>
-          <p:cNvPr id="28" name="Text 26"/>
+          <p:cNvPr id="34" name="Text 32"/>
           <p:cNvSpPr/>
           <p:nvPr/>
         </p:nvSpPr>
@@ -20115,7 +21694,7 @@
       </p:sp>
       <p:sp>
         <p:nvSpPr>
-          <p:cNvPr id="29" name="Shape 27"/>
+          <p:cNvPr id="35" name="Shape 33"/>
           <p:cNvSpPr/>
           <p:nvPr/>
         </p:nvSpPr>
@@ -20142,7 +21721,7 @@
       </p:sp>
       <p:sp>
         <p:nvSpPr>
-          <p:cNvPr id="30" name="Text 28"/>
+          <p:cNvPr id="36" name="Text 34"/>
           <p:cNvSpPr/>
           <p:nvPr/>
         </p:nvSpPr>
@@ -20173,7 +21752,7 @@
                 <a:ea typeface="Trebuchet MS" pitchFamily="34" charset="-122"/>
                 <a:cs typeface="Trebuchet MS" pitchFamily="34" charset="-120"/>
               </a:rPr>
-              <a:t>dest</a:t>
+              <a:t>dened</a:t>
             </a:r>
             <a:endParaRPr lang="en-US" sz="1400" dirty="0"/>
           </a:p>
@@ -20181,7 +21760,7 @@
       </p:sp>
       <p:sp>
         <p:nvSpPr>
-          <p:cNvPr id="31" name="Shape 29"/>
+          <p:cNvPr id="37" name="Shape 35"/>
           <p:cNvSpPr/>
           <p:nvPr/>
         </p:nvSpPr>
@@ -20208,7 +21787,7 @@
       </p:sp>
       <p:sp>
         <p:nvSpPr>
-          <p:cNvPr id="32" name="Text 30"/>
+          <p:cNvPr id="38" name="Text 36"/>
           <p:cNvSpPr/>
           <p:nvPr/>
         </p:nvSpPr>
@@ -20247,7 +21826,7 @@
       </p:sp>
       <p:sp>
         <p:nvSpPr>
-          <p:cNvPr id="33" name="Shape 31"/>
+          <p:cNvPr id="39" name="Shape 37"/>
           <p:cNvSpPr/>
           <p:nvPr/>
         </p:nvSpPr>
@@ -20274,7 +21853,7 @@
       </p:sp>
       <p:sp>
         <p:nvSpPr>
-          <p:cNvPr id="34" name="Text 32"/>
+          <p:cNvPr id="40" name="Text 38"/>
           <p:cNvSpPr/>
           <p:nvPr/>
         </p:nvSpPr>
@@ -20736,7 +22315,7 @@
                 <a:ea typeface="Trebuchet MS" pitchFamily="34" charset="-122"/>
                 <a:cs typeface="Trebuchet MS" pitchFamily="34" charset="-120"/>
               </a:rPr>
-              <a:t>saddest</a:t>
+              <a:t>saddened</a:t>
             </a:r>
             <a:endParaRPr lang="en-US" sz="2800" dirty="0"/>
           </a:p>
@@ -20816,8 +22395,8 @@
         </p:nvSpPr>
         <p:spPr>
           <a:xfrm>
-            <a:off x="2938272" y="2258568"/>
-            <a:ext cx="1828800" cy="292608"/>
+            <a:off x="1989734" y="2258568"/>
+            <a:ext cx="1581912" cy="292608"/>
           </a:xfrm>
           <a:prstGeom prst="rect">
             <a:avLst>
@@ -20850,8 +22429,8 @@
         </p:nvSpPr>
         <p:spPr>
           <a:xfrm>
-            <a:off x="2938272" y="2258568"/>
-            <a:ext cx="1828800" cy="292608"/>
+            <a:off x="1989734" y="2258568"/>
+            <a:ext cx="1581912" cy="292608"/>
           </a:xfrm>
           <a:prstGeom prst="rect">
             <a:avLst/>
@@ -20889,8 +22468,8 @@
         </p:nvSpPr>
         <p:spPr>
           <a:xfrm>
-            <a:off x="2938272" y="2569464"/>
-            <a:ext cx="1828800" cy="201168"/>
+            <a:off x="1989734" y="2569464"/>
+            <a:ext cx="1581912" cy="201168"/>
           </a:xfrm>
           <a:prstGeom prst="rect">
             <a:avLst/>
@@ -20922,53 +22501,14 @@
       </p:sp>
       <p:sp>
         <p:nvSpPr>
-          <p:cNvPr id="19" name="Text 17"/>
-          <p:cNvSpPr/>
-          <p:nvPr/>
-        </p:nvSpPr>
-        <p:spPr>
-          <a:xfrm>
-            <a:off x="2938272" y="2752344"/>
-            <a:ext cx="1828800" cy="182880"/>
-          </a:xfrm>
-          <a:prstGeom prst="rect">
-            <a:avLst/>
-          </a:prstGeom>
-          <a:noFill/>
-          <a:ln/>
-        </p:spPr>
-        <p:txBody>
-          <a:bodyPr wrap="square" lIns="0" tIns="0" rIns="0" bIns="0" rtlCol="0" anchor="t"/>
-          <a:lstStyle/>
-          <a:p>
-            <a:pPr algn="ctr" indent="0" marL="0">
-              <a:buNone/>
-            </a:pPr>
-            <a:r>
-              <a:rPr lang="en-US" sz="700" i="1" dirty="0">
-                <a:solidFill>
-                  <a:srgbClr val="94A3B8"/>
-                </a:solidFill>
-                <a:latin typeface="Calibri" pitchFamily="34" charset="0"/>
-                <a:ea typeface="Calibri" pitchFamily="34" charset="-122"/>
-                <a:cs typeface="Calibri" pitchFamily="34" charset="-120"/>
-              </a:rPr>
-              <a:t>double 'd' before suffix</a:t>
-            </a:r>
-            <a:endParaRPr lang="en-US" sz="700" dirty="0"/>
-          </a:p>
-        </p:txBody>
-      </p:sp>
-      <p:sp>
-        <p:nvSpPr>
-          <p:cNvPr id="20" name="Shape 18"/>
-          <p:cNvSpPr/>
-          <p:nvPr/>
-        </p:nvSpPr>
-        <p:spPr>
-          <a:xfrm>
-            <a:off x="5803392" y="2258568"/>
-            <a:ext cx="1828800" cy="292608"/>
+          <p:cNvPr id="19" name="Shape 17"/>
+          <p:cNvSpPr/>
+          <p:nvPr/>
+        </p:nvSpPr>
+        <p:spPr>
+          <a:xfrm>
+            <a:off x="3659429" y="2258568"/>
+            <a:ext cx="1581912" cy="292608"/>
           </a:xfrm>
           <a:prstGeom prst="rect">
             <a:avLst>
@@ -20995,14 +22535,14 @@
       </p:sp>
       <p:sp>
         <p:nvSpPr>
-          <p:cNvPr id="21" name="Text 19"/>
-          <p:cNvSpPr/>
-          <p:nvPr/>
-        </p:nvSpPr>
-        <p:spPr>
-          <a:xfrm>
-            <a:off x="5803392" y="2258568"/>
-            <a:ext cx="1828800" cy="292608"/>
+          <p:cNvPr id="20" name="Text 18"/>
+          <p:cNvSpPr/>
+          <p:nvPr/>
+        </p:nvSpPr>
+        <p:spPr>
+          <a:xfrm>
+            <a:off x="3659429" y="2258568"/>
+            <a:ext cx="1581912" cy="292608"/>
           </a:xfrm>
           <a:prstGeom prst="rect">
             <a:avLst/>
@@ -21026,7 +22566,7 @@
                 <a:ea typeface="Trebuchet MS" pitchFamily="34" charset="-122"/>
                 <a:cs typeface="Trebuchet MS" pitchFamily="34" charset="-120"/>
               </a:rPr>
-              <a:t>est</a:t>
+              <a:t>d</a:t>
             </a:r>
             <a:endParaRPr lang="en-US" sz="1300" dirty="0"/>
           </a:p>
@@ -21034,14 +22574,14 @@
       </p:sp>
       <p:sp>
         <p:nvSpPr>
-          <p:cNvPr id="22" name="Text 20"/>
-          <p:cNvSpPr/>
-          <p:nvPr/>
-        </p:nvSpPr>
-        <p:spPr>
-          <a:xfrm>
-            <a:off x="5803392" y="2569464"/>
-            <a:ext cx="1828800" cy="201168"/>
+          <p:cNvPr id="21" name="Text 19"/>
+          <p:cNvSpPr/>
+          <p:nvPr/>
+        </p:nvSpPr>
+        <p:spPr>
+          <a:xfrm>
+            <a:off x="3659429" y="2569464"/>
+            <a:ext cx="1581912" cy="201168"/>
           </a:xfrm>
           <a:prstGeom prst="rect">
             <a:avLst/>
@@ -21065,7 +22605,7 @@
                 <a:ea typeface="Calibri" pitchFamily="34" charset="-122"/>
                 <a:cs typeface="Calibri" pitchFamily="34" charset="-120"/>
               </a:rPr>
-              <a:t>the most</a:t>
+              <a:t>doubled consonant before suffix</a:t>
             </a:r>
             <a:endParaRPr lang="en-US" sz="850" dirty="0"/>
           </a:p>
@@ -21073,7 +22613,270 @@
       </p:sp>
       <p:sp>
         <p:nvSpPr>
+          <p:cNvPr id="22" name="Text 20"/>
+          <p:cNvSpPr/>
+          <p:nvPr/>
+        </p:nvSpPr>
+        <p:spPr>
+          <a:xfrm>
+            <a:off x="3659429" y="2752344"/>
+            <a:ext cx="1581912" cy="182880"/>
+          </a:xfrm>
+          <a:prstGeom prst="rect">
+            <a:avLst/>
+          </a:prstGeom>
+          <a:noFill/>
+          <a:ln/>
+        </p:spPr>
+        <p:txBody>
+          <a:bodyPr wrap="square" lIns="0" tIns="0" rIns="0" bIns="0" rtlCol="0" anchor="t"/>
+          <a:lstStyle/>
+          <a:p>
+            <a:pPr algn="ctr" indent="0" marL="0">
+              <a:buNone/>
+            </a:pPr>
+            <a:r>
+              <a:rPr lang="en-US" sz="700" i="1" dirty="0">
+                <a:solidFill>
+                  <a:srgbClr val="94A3B8"/>
+                </a:solidFill>
+                <a:latin typeface="Calibri" pitchFamily="34" charset="0"/>
+                <a:ea typeface="Calibri" pitchFamily="34" charset="-122"/>
+                <a:cs typeface="Calibri" pitchFamily="34" charset="-120"/>
+              </a:rPr>
+              <a:t>final consonant doubled before vowel suffix</a:t>
+            </a:r>
+            <a:endParaRPr lang="en-US" sz="700" dirty="0"/>
+          </a:p>
+        </p:txBody>
+      </p:sp>
+      <p:sp>
+        <p:nvSpPr>
           <p:cNvPr id="23" name="Shape 21"/>
+          <p:cNvSpPr/>
+          <p:nvPr/>
+        </p:nvSpPr>
+        <p:spPr>
+          <a:xfrm>
+            <a:off x="5329123" y="2258568"/>
+            <a:ext cx="1581912" cy="292608"/>
+          </a:xfrm>
+          <a:prstGeom prst="rect">
+            <a:avLst>
+              <a:gd name="adj" fmla="val 25000"/>
+            </a:avLst>
+          </a:prstGeom>
+          <a:solidFill>
+            <a:srgbClr val="FCE7F3"/>
+          </a:solidFill>
+          <a:ln w="19050">
+            <a:solidFill>
+              <a:srgbClr val="DB2777"/>
+            </a:solidFill>
+            <a:prstDash val="solid"/>
+          </a:ln>
+          <a:effectLst>
+            <a:outerShdw sx="100000" sy="100000" kx="0" ky="0" algn="bl" rotWithShape="0" blurRad="101600" dist="38100" dir="8100000">
+              <a:srgbClr val="000000">
+                <a:alpha val="12000"/>
+              </a:srgbClr>
+            </a:outerShdw>
+          </a:effectLst>
+        </p:spPr>
+      </p:sp>
+      <p:sp>
+        <p:nvSpPr>
+          <p:cNvPr id="24" name="Text 22"/>
+          <p:cNvSpPr/>
+          <p:nvPr/>
+        </p:nvSpPr>
+        <p:spPr>
+          <a:xfrm>
+            <a:off x="5329123" y="2258568"/>
+            <a:ext cx="1581912" cy="292608"/>
+          </a:xfrm>
+          <a:prstGeom prst="rect">
+            <a:avLst/>
+          </a:prstGeom>
+          <a:noFill/>
+          <a:ln/>
+        </p:spPr>
+        <p:txBody>
+          <a:bodyPr wrap="square" lIns="0" tIns="0" rIns="0" bIns="0" rtlCol="0" anchor="ctr"/>
+          <a:lstStyle/>
+          <a:p>
+            <a:pPr algn="ctr" indent="0" marL="0">
+              <a:buNone/>
+            </a:pPr>
+            <a:r>
+              <a:rPr lang="en-US" sz="1300" b="1" dirty="0">
+                <a:solidFill>
+                  <a:srgbClr val="9D174D"/>
+                </a:solidFill>
+                <a:latin typeface="Trebuchet MS" pitchFamily="34" charset="0"/>
+                <a:ea typeface="Trebuchet MS" pitchFamily="34" charset="-122"/>
+                <a:cs typeface="Trebuchet MS" pitchFamily="34" charset="-120"/>
+              </a:rPr>
+              <a:t>en</a:t>
+            </a:r>
+            <a:endParaRPr lang="en-US" sz="1300" dirty="0"/>
+          </a:p>
+        </p:txBody>
+      </p:sp>
+      <p:sp>
+        <p:nvSpPr>
+          <p:cNvPr id="25" name="Text 23"/>
+          <p:cNvSpPr/>
+          <p:nvPr/>
+        </p:nvSpPr>
+        <p:spPr>
+          <a:xfrm>
+            <a:off x="5329123" y="2569464"/>
+            <a:ext cx="1581912" cy="201168"/>
+          </a:xfrm>
+          <a:prstGeom prst="rect">
+            <a:avLst/>
+          </a:prstGeom>
+          <a:noFill/>
+          <a:ln/>
+        </p:spPr>
+        <p:txBody>
+          <a:bodyPr wrap="square" lIns="0" tIns="0" rIns="0" bIns="0" rtlCol="0" anchor="t"/>
+          <a:lstStyle/>
+          <a:p>
+            <a:pPr algn="ctr" indent="0" marL="0">
+              <a:buNone/>
+            </a:pPr>
+            <a:r>
+              <a:rPr lang="en-US" sz="850" dirty="0">
+                <a:solidFill>
+                  <a:srgbClr val="475569"/>
+                </a:solidFill>
+                <a:latin typeface="Calibri" pitchFamily="34" charset="0"/>
+                <a:ea typeface="Calibri" pitchFamily="34" charset="-122"/>
+                <a:cs typeface="Calibri" pitchFamily="34" charset="-120"/>
+              </a:rPr>
+              <a:t>to make or become</a:t>
+            </a:r>
+            <a:endParaRPr lang="en-US" sz="850" dirty="0"/>
+          </a:p>
+        </p:txBody>
+      </p:sp>
+      <p:sp>
+        <p:nvSpPr>
+          <p:cNvPr id="26" name="Shape 24"/>
+          <p:cNvSpPr/>
+          <p:nvPr/>
+        </p:nvSpPr>
+        <p:spPr>
+          <a:xfrm>
+            <a:off x="6998818" y="2258568"/>
+            <a:ext cx="1581912" cy="292608"/>
+          </a:xfrm>
+          <a:prstGeom prst="rect">
+            <a:avLst>
+              <a:gd name="adj" fmla="val 25000"/>
+            </a:avLst>
+          </a:prstGeom>
+          <a:solidFill>
+            <a:srgbClr val="FCE7F3"/>
+          </a:solidFill>
+          <a:ln w="19050">
+            <a:solidFill>
+              <a:srgbClr val="DB2777"/>
+            </a:solidFill>
+            <a:prstDash val="solid"/>
+          </a:ln>
+          <a:effectLst>
+            <a:outerShdw sx="100000" sy="100000" kx="0" ky="0" algn="bl" rotWithShape="0" blurRad="101600" dist="38100" dir="8100000">
+              <a:srgbClr val="000000">
+                <a:alpha val="12000"/>
+              </a:srgbClr>
+            </a:outerShdw>
+          </a:effectLst>
+        </p:spPr>
+      </p:sp>
+      <p:sp>
+        <p:nvSpPr>
+          <p:cNvPr id="27" name="Text 25"/>
+          <p:cNvSpPr/>
+          <p:nvPr/>
+        </p:nvSpPr>
+        <p:spPr>
+          <a:xfrm>
+            <a:off x="6998818" y="2258568"/>
+            <a:ext cx="1581912" cy="292608"/>
+          </a:xfrm>
+          <a:prstGeom prst="rect">
+            <a:avLst/>
+          </a:prstGeom>
+          <a:noFill/>
+          <a:ln/>
+        </p:spPr>
+        <p:txBody>
+          <a:bodyPr wrap="square" lIns="0" tIns="0" rIns="0" bIns="0" rtlCol="0" anchor="ctr"/>
+          <a:lstStyle/>
+          <a:p>
+            <a:pPr algn="ctr" indent="0" marL="0">
+              <a:buNone/>
+            </a:pPr>
+            <a:r>
+              <a:rPr lang="en-US" sz="1300" b="1" dirty="0">
+                <a:solidFill>
+                  <a:srgbClr val="9D174D"/>
+                </a:solidFill>
+                <a:latin typeface="Trebuchet MS" pitchFamily="34" charset="0"/>
+                <a:ea typeface="Trebuchet MS" pitchFamily="34" charset="-122"/>
+                <a:cs typeface="Trebuchet MS" pitchFamily="34" charset="-120"/>
+              </a:rPr>
+              <a:t>ed</a:t>
+            </a:r>
+            <a:endParaRPr lang="en-US" sz="1300" dirty="0"/>
+          </a:p>
+        </p:txBody>
+      </p:sp>
+      <p:sp>
+        <p:nvSpPr>
+          <p:cNvPr id="28" name="Text 26"/>
+          <p:cNvSpPr/>
+          <p:nvPr/>
+        </p:nvSpPr>
+        <p:spPr>
+          <a:xfrm>
+            <a:off x="6998818" y="2569464"/>
+            <a:ext cx="1581912" cy="201168"/>
+          </a:xfrm>
+          <a:prstGeom prst="rect">
+            <a:avLst/>
+          </a:prstGeom>
+          <a:noFill/>
+          <a:ln/>
+        </p:spPr>
+        <p:txBody>
+          <a:bodyPr wrap="square" lIns="0" tIns="0" rIns="0" bIns="0" rtlCol="0" anchor="t"/>
+          <a:lstStyle/>
+          <a:p>
+            <a:pPr algn="ctr" indent="0" marL="0">
+              <a:buNone/>
+            </a:pPr>
+            <a:r>
+              <a:rPr lang="en-US" sz="850" dirty="0">
+                <a:solidFill>
+                  <a:srgbClr val="475569"/>
+                </a:solidFill>
+                <a:latin typeface="Calibri" pitchFamily="34" charset="0"/>
+                <a:ea typeface="Calibri" pitchFamily="34" charset="-122"/>
+                <a:cs typeface="Calibri" pitchFamily="34" charset="-120"/>
+              </a:rPr>
+              <a:t>past tense</a:t>
+            </a:r>
+            <a:endParaRPr lang="en-US" sz="850" dirty="0"/>
+          </a:p>
+        </p:txBody>
+      </p:sp>
+      <p:sp>
+        <p:nvSpPr>
+          <p:cNvPr id="29" name="Shape 27"/>
           <p:cNvSpPr/>
           <p:nvPr/>
         </p:nvSpPr>
@@ -21100,7 +22903,7 @@
       </p:sp>
       <p:sp>
         <p:nvSpPr>
-          <p:cNvPr id="24" name="Text 22"/>
+          <p:cNvPr id="30" name="Text 28"/>
           <p:cNvSpPr/>
           <p:nvPr/>
         </p:nvSpPr>
@@ -21139,7 +22942,7 @@
       </p:sp>
       <p:sp>
         <p:nvSpPr>
-          <p:cNvPr id="25" name="Shape 23"/>
+          <p:cNvPr id="31" name="Shape 29"/>
           <p:cNvSpPr/>
           <p:nvPr/>
         </p:nvSpPr>
@@ -21166,7 +22969,7 @@
       </p:sp>
       <p:sp>
         <p:nvSpPr>
-          <p:cNvPr id="26" name="Shape 24"/>
+          <p:cNvPr id="32" name="Shape 30"/>
           <p:cNvSpPr/>
           <p:nvPr/>
         </p:nvSpPr>
@@ -21193,7 +22996,7 @@
       </p:sp>
       <p:sp>
         <p:nvSpPr>
-          <p:cNvPr id="27" name="Text 25"/>
+          <p:cNvPr id="33" name="Text 31"/>
           <p:cNvSpPr/>
           <p:nvPr/>
         </p:nvSpPr>
@@ -21232,7 +23035,7 @@
       </p:sp>
       <p:sp>
         <p:nvSpPr>
-          <p:cNvPr id="28" name="Text 26"/>
+          <p:cNvPr id="34" name="Text 32"/>
           <p:cNvSpPr/>
           <p:nvPr/>
         </p:nvSpPr>
@@ -21271,7 +23074,7 @@
       </p:sp>
       <p:sp>
         <p:nvSpPr>
-          <p:cNvPr id="29" name="Shape 27"/>
+          <p:cNvPr id="35" name="Shape 33"/>
           <p:cNvSpPr/>
           <p:nvPr/>
         </p:nvSpPr>
@@ -21298,7 +23101,7 @@
       </p:sp>
       <p:sp>
         <p:nvSpPr>
-          <p:cNvPr id="30" name="Text 28"/>
+          <p:cNvPr id="36" name="Text 34"/>
           <p:cNvSpPr/>
           <p:nvPr/>
         </p:nvSpPr>
@@ -21329,7 +23132,7 @@
                 <a:ea typeface="Trebuchet MS" pitchFamily="34" charset="-122"/>
                 <a:cs typeface="Trebuchet MS" pitchFamily="34" charset="-120"/>
               </a:rPr>
-              <a:t>dest</a:t>
+              <a:t>dened</a:t>
             </a:r>
             <a:endParaRPr lang="en-US" sz="1400" dirty="0"/>
           </a:p>
@@ -21337,7 +23140,7 @@
       </p:sp>
       <p:sp>
         <p:nvSpPr>
-          <p:cNvPr id="31" name="Shape 29"/>
+          <p:cNvPr id="37" name="Shape 35"/>
           <p:cNvSpPr/>
           <p:nvPr/>
         </p:nvSpPr>
@@ -21364,7 +23167,7 @@
       </p:sp>
       <p:sp>
         <p:nvSpPr>
-          <p:cNvPr id="32" name="Text 30"/>
+          <p:cNvPr id="38" name="Text 36"/>
           <p:cNvSpPr/>
           <p:nvPr/>
         </p:nvSpPr>
@@ -21403,7 +23206,7 @@
       </p:sp>
       <p:sp>
         <p:nvSpPr>
-          <p:cNvPr id="33" name="Shape 31"/>
+          <p:cNvPr id="39" name="Shape 37"/>
           <p:cNvSpPr/>
           <p:nvPr/>
         </p:nvSpPr>
@@ -21430,7 +23233,7 @@
       </p:sp>
       <p:sp>
         <p:nvSpPr>
-          <p:cNvPr id="34" name="Shape 32"/>
+          <p:cNvPr id="40" name="Shape 38"/>
           <p:cNvSpPr/>
           <p:nvPr/>
         </p:nvSpPr>
@@ -21457,7 +23260,7 @@
       </p:sp>
       <p:sp>
         <p:nvSpPr>
-          <p:cNvPr id="35" name="Text 33"/>
+          <p:cNvPr id="41" name="Text 39"/>
           <p:cNvSpPr/>
           <p:nvPr/>
         </p:nvSpPr>
@@ -21496,7 +23299,7 @@
       </p:sp>
       <p:sp>
         <p:nvSpPr>
-          <p:cNvPr id="36" name="Shape 34"/>
+          <p:cNvPr id="42" name="Shape 40"/>
           <p:cNvSpPr/>
           <p:nvPr/>
         </p:nvSpPr>
@@ -21523,7 +23326,7 @@
       </p:sp>
       <p:sp>
         <p:nvSpPr>
-          <p:cNvPr id="37" name="Text 35"/>
+          <p:cNvPr id="43" name="Text 41"/>
           <p:cNvSpPr/>
           <p:nvPr/>
         </p:nvSpPr>
@@ -21562,7 +23365,7 @@
       </p:sp>
       <p:sp>
         <p:nvSpPr>
-          <p:cNvPr id="38" name="Shape 36"/>
+          <p:cNvPr id="44" name="Shape 42"/>
           <p:cNvSpPr/>
           <p:nvPr/>
         </p:nvSpPr>
@@ -21589,7 +23392,7 @@
       </p:sp>
       <p:sp>
         <p:nvSpPr>
-          <p:cNvPr id="39" name="Text 37"/>
+          <p:cNvPr id="45" name="Text 43"/>
           <p:cNvSpPr/>
           <p:nvPr/>
         </p:nvSpPr>
@@ -21628,7 +23431,7 @@
       </p:sp>
       <p:sp>
         <p:nvSpPr>
-          <p:cNvPr id="40" name="Shape 38"/>
+          <p:cNvPr id="46" name="Shape 44"/>
           <p:cNvSpPr/>
           <p:nvPr/>
         </p:nvSpPr>
@@ -21655,7 +23458,7 @@
       </p:sp>
       <p:sp>
         <p:nvSpPr>
-          <p:cNvPr id="41" name="Text 39"/>
+          <p:cNvPr id="47" name="Text 45"/>
           <p:cNvSpPr/>
           <p:nvPr/>
         </p:nvSpPr>
@@ -21694,7 +23497,7 @@
       </p:sp>
       <p:sp>
         <p:nvSpPr>
-          <p:cNvPr id="42" name="Shape 40"/>
+          <p:cNvPr id="48" name="Shape 46"/>
           <p:cNvSpPr/>
           <p:nvPr/>
         </p:nvSpPr>
@@ -21721,7 +23524,7 @@
       </p:sp>
       <p:sp>
         <p:nvSpPr>
-          <p:cNvPr id="43" name="Text 41"/>
+          <p:cNvPr id="49" name="Text 47"/>
           <p:cNvSpPr/>
           <p:nvPr/>
         </p:nvSpPr>
@@ -21752,7 +23555,7 @@
                 <a:ea typeface="Trebuchet MS" pitchFamily="34" charset="-122"/>
                 <a:cs typeface="Trebuchet MS" pitchFamily="34" charset="-120"/>
               </a:rPr>
-              <a:t>s</a:t>
+              <a:t>n</a:t>
             </a:r>
             <a:endParaRPr lang="en-US" sz="900" dirty="0"/>
           </a:p>
@@ -21760,7 +23563,7 @@
       </p:sp>
       <p:sp>
         <p:nvSpPr>
-          <p:cNvPr id="44" name="Shape 42"/>
+          <p:cNvPr id="50" name="Shape 48"/>
           <p:cNvSpPr/>
           <p:nvPr/>
         </p:nvSpPr>
@@ -21787,7 +23590,7 @@
       </p:sp>
       <p:sp>
         <p:nvSpPr>
-          <p:cNvPr id="45" name="Text 43"/>
+          <p:cNvPr id="51" name="Text 49"/>
           <p:cNvSpPr/>
           <p:nvPr/>
         </p:nvSpPr>
@@ -21818,7 +23621,7 @@
                 <a:ea typeface="Trebuchet MS" pitchFamily="34" charset="-122"/>
                 <a:cs typeface="Trebuchet MS" pitchFamily="34" charset="-120"/>
               </a:rPr>
-              <a:t>t</a:t>
+              <a:t>ed</a:t>
             </a:r>
             <a:endParaRPr lang="en-US" sz="900" dirty="0"/>
           </a:p>
@@ -23366,7 +25169,7 @@
                 <a:ea typeface="Calibri" pitchFamily="34" charset="-122"/>
                 <a:cs typeface="Calibri" pitchFamily="34" charset="-120"/>
               </a:rPr>
-              <a:t>in a way that is</a:t>
+              <a:t>in a certain way</a:t>
             </a:r>
             <a:endParaRPr lang="en-US" sz="850" dirty="0"/>
           </a:p>
@@ -25070,7 +26873,7 @@
                 <a:ea typeface="Calibri" pitchFamily="34" charset="-122"/>
                 <a:cs typeface="Calibri" pitchFamily="34" charset="-120"/>
               </a:rPr>
-              <a:t>in a way that is</a:t>
+              <a:t>in a certain way</a:t>
             </a:r>
             <a:endParaRPr lang="en-US" sz="850" dirty="0"/>
           </a:p>
@@ -26187,7 +27990,7 @@
                 <a:ea typeface="Calibri" pitchFamily="34" charset="-122"/>
                 <a:cs typeface="Calibri" pitchFamily="34" charset="-120"/>
               </a:rPr>
-              <a:t>in a way that is</a:t>
+              <a:t>in a certain way</a:t>
             </a:r>
             <a:endParaRPr lang="en-US" sz="850" dirty="0"/>
           </a:p>
@@ -26532,11 +28335,11 @@
         <p:spPr>
           <a:xfrm>
             <a:off x="1874520" y="4096512"/>
-            <a:ext cx="6903720" cy="658368"/>
+            <a:ext cx="6903720" cy="804672"/>
           </a:xfrm>
           <a:prstGeom prst="rect">
             <a:avLst>
-              <a:gd name="adj" fmla="val 8333"/>
+              <a:gd name="adj" fmla="val 6818"/>
             </a:avLst>
           </a:prstGeom>
           <a:solidFill>
@@ -26559,11 +28362,11 @@
         <p:spPr>
           <a:xfrm>
             <a:off x="2427732" y="4169664"/>
-            <a:ext cx="685800" cy="475488"/>
+            <a:ext cx="685800" cy="384048"/>
           </a:xfrm>
           <a:prstGeom prst="rect">
             <a:avLst>
-              <a:gd name="adj" fmla="val 7692"/>
+              <a:gd name="adj" fmla="val 9524"/>
             </a:avLst>
           </a:prstGeom>
           <a:solidFill>
@@ -26586,7 +28389,7 @@
         <p:spPr>
           <a:xfrm>
             <a:off x="2427732" y="4169664"/>
-            <a:ext cx="685800" cy="475488"/>
+            <a:ext cx="685800" cy="384048"/>
           </a:xfrm>
           <a:prstGeom prst="rect">
             <a:avLst/>
@@ -26625,11 +28428,11 @@
         <p:spPr>
           <a:xfrm>
             <a:off x="3639312" y="4169664"/>
-            <a:ext cx="685800" cy="475488"/>
+            <a:ext cx="685800" cy="384048"/>
           </a:xfrm>
           <a:prstGeom prst="rect">
             <a:avLst>
-              <a:gd name="adj" fmla="val 7692"/>
+              <a:gd name="adj" fmla="val 9524"/>
             </a:avLst>
           </a:prstGeom>
           <a:solidFill>
@@ -26652,7 +28455,7 @@
         <p:spPr>
           <a:xfrm>
             <a:off x="3639312" y="4169664"/>
-            <a:ext cx="685800" cy="475488"/>
+            <a:ext cx="685800" cy="384048"/>
           </a:xfrm>
           <a:prstGeom prst="rect">
             <a:avLst/>
@@ -26691,11 +28494,11 @@
         <p:spPr>
           <a:xfrm>
             <a:off x="4850892" y="4169664"/>
-            <a:ext cx="685800" cy="475488"/>
+            <a:ext cx="685800" cy="384048"/>
           </a:xfrm>
           <a:prstGeom prst="rect">
             <a:avLst>
-              <a:gd name="adj" fmla="val 7692"/>
+              <a:gd name="adj" fmla="val 9524"/>
             </a:avLst>
           </a:prstGeom>
           <a:solidFill>
@@ -26718,7 +28521,7 @@
         <p:spPr>
           <a:xfrm>
             <a:off x="4850892" y="4169664"/>
-            <a:ext cx="685800" cy="475488"/>
+            <a:ext cx="685800" cy="384048"/>
           </a:xfrm>
           <a:prstGeom prst="rect">
             <a:avLst/>
@@ -26757,11 +28560,11 @@
         <p:spPr>
           <a:xfrm>
             <a:off x="6062472" y="4169664"/>
-            <a:ext cx="685800" cy="475488"/>
+            <a:ext cx="685800" cy="384048"/>
           </a:xfrm>
           <a:prstGeom prst="rect">
             <a:avLst>
-              <a:gd name="adj" fmla="val 7692"/>
+              <a:gd name="adj" fmla="val 9524"/>
             </a:avLst>
           </a:prstGeom>
           <a:solidFill>
@@ -26784,7 +28587,7 @@
         <p:spPr>
           <a:xfrm>
             <a:off x="6062472" y="4169664"/>
-            <a:ext cx="685800" cy="475488"/>
+            <a:ext cx="685800" cy="384048"/>
           </a:xfrm>
           <a:prstGeom prst="rect">
             <a:avLst/>
@@ -26823,11 +28626,11 @@
         <p:spPr>
           <a:xfrm>
             <a:off x="7274052" y="4169664"/>
-            <a:ext cx="685800" cy="475488"/>
+            <a:ext cx="685800" cy="384048"/>
           </a:xfrm>
           <a:prstGeom prst="rect">
             <a:avLst>
-              <a:gd name="adj" fmla="val 7692"/>
+              <a:gd name="adj" fmla="val 9524"/>
             </a:avLst>
           </a:prstGeom>
           <a:solidFill>
@@ -26850,7 +28653,7 @@
         <p:spPr>
           <a:xfrm>
             <a:off x="7274052" y="4169664"/>
-            <a:ext cx="685800" cy="475488"/>
+            <a:ext cx="685800" cy="384048"/>
           </a:xfrm>
           <a:prstGeom prst="rect">
             <a:avLst/>
@@ -26874,9 +28677,48 @@
                 <a:ea typeface="Trebuchet MS" pitchFamily="34" charset="-122"/>
                 <a:cs typeface="Trebuchet MS" pitchFamily="34" charset="-120"/>
               </a:rPr>
-              <a:t>y</a:t>
+              <a:t>ee</a:t>
             </a:r>
             <a:endParaRPr lang="en-US" sz="900" dirty="0"/>
+          </a:p>
+        </p:txBody>
+      </p:sp>
+      <p:sp>
+        <p:nvSpPr>
+          <p:cNvPr id="43" name="Text 41"/>
+          <p:cNvSpPr/>
+          <p:nvPr/>
+        </p:nvSpPr>
+        <p:spPr>
+          <a:xfrm>
+            <a:off x="7274052" y="4572000"/>
+            <a:ext cx="685800" cy="219456"/>
+          </a:xfrm>
+          <a:prstGeom prst="rect">
+            <a:avLst/>
+          </a:prstGeom>
+          <a:noFill/>
+          <a:ln/>
+        </p:spPr>
+        <p:txBody>
+          <a:bodyPr wrap="square" lIns="0" tIns="0" rIns="0" bIns="0" rtlCol="0" anchor="t"/>
+          <a:lstStyle/>
+          <a:p>
+            <a:pPr algn="ctr" indent="0" marL="0">
+              <a:buNone/>
+            </a:pPr>
+            <a:r>
+              <a:rPr lang="en-US" sz="750" i="1" dirty="0">
+                <a:solidFill>
+                  <a:srgbClr val="94A3B8"/>
+                </a:solidFill>
+                <a:latin typeface="Calibri" pitchFamily="34" charset="0"/>
+                <a:ea typeface="Calibri" pitchFamily="34" charset="-122"/>
+                <a:cs typeface="Calibri" pitchFamily="34" charset="-120"/>
+              </a:rPr>
+              <a:t>/ee/</a:t>
+            </a:r>
+            <a:endParaRPr lang="en-US" sz="750" dirty="0"/>
           </a:p>
         </p:txBody>
       </p:sp>
@@ -27305,7 +29147,7 @@
                 <a:ea typeface="Trebuchet MS" pitchFamily="34" charset="-122"/>
                 <a:cs typeface="Trebuchet MS" pitchFamily="34" charset="-120"/>
               </a:rPr>
-              <a:t>sadness</a:t>
+              <a:t>saddest</a:t>
             </a:r>
             <a:endParaRPr lang="en-US" sz="2800" dirty="0"/>
           </a:p>
@@ -28132,7 +29974,7 @@
                 <a:ea typeface="Trebuchet MS" pitchFamily="34" charset="-122"/>
                 <a:cs typeface="Trebuchet MS" pitchFamily="34" charset="-120"/>
               </a:rPr>
-              <a:t>sadness</a:t>
+              <a:t>saddest</a:t>
             </a:r>
             <a:endParaRPr lang="en-US" sz="2800" dirty="0"/>
           </a:p>
@@ -28212,7 +30054,7 @@
         </p:nvSpPr>
         <p:spPr>
           <a:xfrm>
-            <a:off x="2938272" y="2258568"/>
+            <a:off x="2221992" y="2258568"/>
             <a:ext cx="1828800" cy="292608"/>
           </a:xfrm>
           <a:prstGeom prst="rect">
@@ -28246,7 +30088,7 @@
         </p:nvSpPr>
         <p:spPr>
           <a:xfrm>
-            <a:off x="2938272" y="2258568"/>
+            <a:off x="2221992" y="2258568"/>
             <a:ext cx="1828800" cy="292608"/>
           </a:xfrm>
           <a:prstGeom prst="rect">
@@ -28285,7 +30127,7 @@
         </p:nvSpPr>
         <p:spPr>
           <a:xfrm>
-            <a:off x="2938272" y="2569464"/>
+            <a:off x="2221992" y="2569464"/>
             <a:ext cx="1828800" cy="201168"/>
           </a:xfrm>
           <a:prstGeom prst="rect">
@@ -28324,7 +30166,7 @@
         </p:nvSpPr>
         <p:spPr>
           <a:xfrm>
-            <a:off x="5803392" y="2258568"/>
+            <a:off x="4370832" y="2258568"/>
             <a:ext cx="1828800" cy="292608"/>
           </a:xfrm>
           <a:prstGeom prst="rect">
@@ -28358,7 +30200,7 @@
         </p:nvSpPr>
         <p:spPr>
           <a:xfrm>
-            <a:off x="5803392" y="2258568"/>
+            <a:off x="4370832" y="2258568"/>
             <a:ext cx="1828800" cy="292608"/>
           </a:xfrm>
           <a:prstGeom prst="rect">
@@ -28383,7 +30225,7 @@
                 <a:ea typeface="Trebuchet MS" pitchFamily="34" charset="-122"/>
                 <a:cs typeface="Trebuchet MS" pitchFamily="34" charset="-120"/>
               </a:rPr>
-              <a:t>ness</a:t>
+              <a:t>d</a:t>
             </a:r>
             <a:endParaRPr lang="en-US" sz="1300" dirty="0"/>
           </a:p>
@@ -28397,7 +30239,7 @@
         </p:nvSpPr>
         <p:spPr>
           <a:xfrm>
-            <a:off x="5803392" y="2569464"/>
+            <a:off x="4370832" y="2569464"/>
             <a:ext cx="1828800" cy="201168"/>
           </a:xfrm>
           <a:prstGeom prst="rect">
@@ -28422,7 +30264,7 @@
                 <a:ea typeface="Calibri" pitchFamily="34" charset="-122"/>
                 <a:cs typeface="Calibri" pitchFamily="34" charset="-120"/>
               </a:rPr>
-              <a:t>state or quality of</a:t>
+              <a:t>doubled consonant before suffix</a:t>
             </a:r>
             <a:endParaRPr lang="en-US" sz="850" dirty="0"/>
           </a:p>
@@ -28430,7 +30272,158 @@
       </p:sp>
       <p:sp>
         <p:nvSpPr>
-          <p:cNvPr id="22" name="Shape 20"/>
+          <p:cNvPr id="22" name="Text 20"/>
+          <p:cNvSpPr/>
+          <p:nvPr/>
+        </p:nvSpPr>
+        <p:spPr>
+          <a:xfrm>
+            <a:off x="4370832" y="2752344"/>
+            <a:ext cx="1828800" cy="182880"/>
+          </a:xfrm>
+          <a:prstGeom prst="rect">
+            <a:avLst/>
+          </a:prstGeom>
+          <a:noFill/>
+          <a:ln/>
+        </p:spPr>
+        <p:txBody>
+          <a:bodyPr wrap="square" lIns="0" tIns="0" rIns="0" bIns="0" rtlCol="0" anchor="t"/>
+          <a:lstStyle/>
+          <a:p>
+            <a:pPr algn="ctr" indent="0" marL="0">
+              <a:buNone/>
+            </a:pPr>
+            <a:r>
+              <a:rPr lang="en-US" sz="700" i="1" dirty="0">
+                <a:solidFill>
+                  <a:srgbClr val="94A3B8"/>
+                </a:solidFill>
+                <a:latin typeface="Calibri" pitchFamily="34" charset="0"/>
+                <a:ea typeface="Calibri" pitchFamily="34" charset="-122"/>
+                <a:cs typeface="Calibri" pitchFamily="34" charset="-120"/>
+              </a:rPr>
+              <a:t>final consonant doubled before vowel suffix</a:t>
+            </a:r>
+            <a:endParaRPr lang="en-US" sz="700" dirty="0"/>
+          </a:p>
+        </p:txBody>
+      </p:sp>
+      <p:sp>
+        <p:nvSpPr>
+          <p:cNvPr id="23" name="Shape 21"/>
+          <p:cNvSpPr/>
+          <p:nvPr/>
+        </p:nvSpPr>
+        <p:spPr>
+          <a:xfrm>
+            <a:off x="6519672" y="2258568"/>
+            <a:ext cx="1828800" cy="292608"/>
+          </a:xfrm>
+          <a:prstGeom prst="rect">
+            <a:avLst>
+              <a:gd name="adj" fmla="val 25000"/>
+            </a:avLst>
+          </a:prstGeom>
+          <a:solidFill>
+            <a:srgbClr val="FCE7F3"/>
+          </a:solidFill>
+          <a:ln w="19050">
+            <a:solidFill>
+              <a:srgbClr val="DB2777"/>
+            </a:solidFill>
+            <a:prstDash val="solid"/>
+          </a:ln>
+          <a:effectLst>
+            <a:outerShdw sx="100000" sy="100000" kx="0" ky="0" algn="bl" rotWithShape="0" blurRad="101600" dist="38100" dir="8100000">
+              <a:srgbClr val="000000">
+                <a:alpha val="12000"/>
+              </a:srgbClr>
+            </a:outerShdw>
+          </a:effectLst>
+        </p:spPr>
+      </p:sp>
+      <p:sp>
+        <p:nvSpPr>
+          <p:cNvPr id="24" name="Text 22"/>
+          <p:cNvSpPr/>
+          <p:nvPr/>
+        </p:nvSpPr>
+        <p:spPr>
+          <a:xfrm>
+            <a:off x="6519672" y="2258568"/>
+            <a:ext cx="1828800" cy="292608"/>
+          </a:xfrm>
+          <a:prstGeom prst="rect">
+            <a:avLst/>
+          </a:prstGeom>
+          <a:noFill/>
+          <a:ln/>
+        </p:spPr>
+        <p:txBody>
+          <a:bodyPr wrap="square" lIns="0" tIns="0" rIns="0" bIns="0" rtlCol="0" anchor="ctr"/>
+          <a:lstStyle/>
+          <a:p>
+            <a:pPr algn="ctr" indent="0" marL="0">
+              <a:buNone/>
+            </a:pPr>
+            <a:r>
+              <a:rPr lang="en-US" sz="1300" b="1" dirty="0">
+                <a:solidFill>
+                  <a:srgbClr val="9D174D"/>
+                </a:solidFill>
+                <a:latin typeface="Trebuchet MS" pitchFamily="34" charset="0"/>
+                <a:ea typeface="Trebuchet MS" pitchFamily="34" charset="-122"/>
+                <a:cs typeface="Trebuchet MS" pitchFamily="34" charset="-120"/>
+              </a:rPr>
+              <a:t>est</a:t>
+            </a:r>
+            <a:endParaRPr lang="en-US" sz="1300" dirty="0"/>
+          </a:p>
+        </p:txBody>
+      </p:sp>
+      <p:sp>
+        <p:nvSpPr>
+          <p:cNvPr id="25" name="Text 23"/>
+          <p:cNvSpPr/>
+          <p:nvPr/>
+        </p:nvSpPr>
+        <p:spPr>
+          <a:xfrm>
+            <a:off x="6519672" y="2569464"/>
+            <a:ext cx="1828800" cy="201168"/>
+          </a:xfrm>
+          <a:prstGeom prst="rect">
+            <a:avLst/>
+          </a:prstGeom>
+          <a:noFill/>
+          <a:ln/>
+        </p:spPr>
+        <p:txBody>
+          <a:bodyPr wrap="square" lIns="0" tIns="0" rIns="0" bIns="0" rtlCol="0" anchor="t"/>
+          <a:lstStyle/>
+          <a:p>
+            <a:pPr algn="ctr" indent="0" marL="0">
+              <a:buNone/>
+            </a:pPr>
+            <a:r>
+              <a:rPr lang="en-US" sz="850" dirty="0">
+                <a:solidFill>
+                  <a:srgbClr val="475569"/>
+                </a:solidFill>
+                <a:latin typeface="Calibri" pitchFamily="34" charset="0"/>
+                <a:ea typeface="Calibri" pitchFamily="34" charset="-122"/>
+                <a:cs typeface="Calibri" pitchFamily="34" charset="-120"/>
+              </a:rPr>
+              <a:t>most of all</a:t>
+            </a:r>
+            <a:endParaRPr lang="en-US" sz="850" dirty="0"/>
+          </a:p>
+        </p:txBody>
+      </p:sp>
+      <p:sp>
+        <p:nvSpPr>
+          <p:cNvPr id="26" name="Shape 24"/>
           <p:cNvSpPr/>
           <p:nvPr/>
         </p:nvSpPr>
@@ -28457,7 +30450,7 @@
       </p:sp>
       <p:sp>
         <p:nvSpPr>
-          <p:cNvPr id="23" name="Text 21"/>
+          <p:cNvPr id="27" name="Text 25"/>
           <p:cNvSpPr/>
           <p:nvPr/>
         </p:nvSpPr>
@@ -28496,7 +30489,7 @@
       </p:sp>
       <p:sp>
         <p:nvSpPr>
-          <p:cNvPr id="24" name="Shape 22"/>
+          <p:cNvPr id="28" name="Shape 26"/>
           <p:cNvSpPr/>
           <p:nvPr/>
         </p:nvSpPr>
@@ -28523,7 +30516,7 @@
       </p:sp>
       <p:sp>
         <p:nvSpPr>
-          <p:cNvPr id="25" name="Text 23"/>
+          <p:cNvPr id="29" name="Text 27"/>
           <p:cNvSpPr/>
           <p:nvPr/>
         </p:nvSpPr>
@@ -28562,7 +30555,7 @@
       </p:sp>
       <p:sp>
         <p:nvSpPr>
-          <p:cNvPr id="26" name="Shape 24"/>
+          <p:cNvPr id="30" name="Shape 28"/>
           <p:cNvSpPr/>
           <p:nvPr/>
         </p:nvSpPr>
@@ -28589,7 +30582,7 @@
       </p:sp>
       <p:sp>
         <p:nvSpPr>
-          <p:cNvPr id="27" name="Text 25"/>
+          <p:cNvPr id="31" name="Text 29"/>
           <p:cNvSpPr/>
           <p:nvPr/>
         </p:nvSpPr>
@@ -28628,7 +30621,7 @@
       </p:sp>
       <p:sp>
         <p:nvSpPr>
-          <p:cNvPr id="28" name="Shape 26"/>
+          <p:cNvPr id="32" name="Shape 30"/>
           <p:cNvSpPr/>
           <p:nvPr/>
         </p:nvSpPr>
@@ -28655,7 +30648,7 @@
       </p:sp>
       <p:sp>
         <p:nvSpPr>
-          <p:cNvPr id="29" name="Text 27"/>
+          <p:cNvPr id="33" name="Text 31"/>
           <p:cNvSpPr/>
           <p:nvPr/>
         </p:nvSpPr>
@@ -29117,7 +31110,7 @@
                 <a:ea typeface="Trebuchet MS" pitchFamily="34" charset="-122"/>
                 <a:cs typeface="Trebuchet MS" pitchFamily="34" charset="-120"/>
               </a:rPr>
-              <a:t>sadness</a:t>
+              <a:t>saddest</a:t>
             </a:r>
             <a:endParaRPr lang="en-US" sz="2800" dirty="0"/>
           </a:p>
@@ -29197,7 +31190,7 @@
         </p:nvSpPr>
         <p:spPr>
           <a:xfrm>
-            <a:off x="2938272" y="2258568"/>
+            <a:off x="2221992" y="2258568"/>
             <a:ext cx="1828800" cy="292608"/>
           </a:xfrm>
           <a:prstGeom prst="rect">
@@ -29231,7 +31224,7 @@
         </p:nvSpPr>
         <p:spPr>
           <a:xfrm>
-            <a:off x="2938272" y="2258568"/>
+            <a:off x="2221992" y="2258568"/>
             <a:ext cx="1828800" cy="292608"/>
           </a:xfrm>
           <a:prstGeom prst="rect">
@@ -29270,7 +31263,7 @@
         </p:nvSpPr>
         <p:spPr>
           <a:xfrm>
-            <a:off x="2938272" y="2569464"/>
+            <a:off x="2221992" y="2569464"/>
             <a:ext cx="1828800" cy="201168"/>
           </a:xfrm>
           <a:prstGeom prst="rect">
@@ -29309,7 +31302,7 @@
         </p:nvSpPr>
         <p:spPr>
           <a:xfrm>
-            <a:off x="5803392" y="2258568"/>
+            <a:off x="4370832" y="2258568"/>
             <a:ext cx="1828800" cy="292608"/>
           </a:xfrm>
           <a:prstGeom prst="rect">
@@ -29343,7 +31336,7 @@
         </p:nvSpPr>
         <p:spPr>
           <a:xfrm>
-            <a:off x="5803392" y="2258568"/>
+            <a:off x="4370832" y="2258568"/>
             <a:ext cx="1828800" cy="292608"/>
           </a:xfrm>
           <a:prstGeom prst="rect">
@@ -29368,7 +31361,7 @@
                 <a:ea typeface="Trebuchet MS" pitchFamily="34" charset="-122"/>
                 <a:cs typeface="Trebuchet MS" pitchFamily="34" charset="-120"/>
               </a:rPr>
-              <a:t>ness</a:t>
+              <a:t>d</a:t>
             </a:r>
             <a:endParaRPr lang="en-US" sz="1300" dirty="0"/>
           </a:p>
@@ -29382,7 +31375,7 @@
         </p:nvSpPr>
         <p:spPr>
           <a:xfrm>
-            <a:off x="5803392" y="2569464"/>
+            <a:off x="4370832" y="2569464"/>
             <a:ext cx="1828800" cy="201168"/>
           </a:xfrm>
           <a:prstGeom prst="rect">
@@ -29407,7 +31400,7 @@
                 <a:ea typeface="Calibri" pitchFamily="34" charset="-122"/>
                 <a:cs typeface="Calibri" pitchFamily="34" charset="-120"/>
               </a:rPr>
-              <a:t>state or quality of</a:t>
+              <a:t>doubled consonant before suffix</a:t>
             </a:r>
             <a:endParaRPr lang="en-US" sz="850" dirty="0"/>
           </a:p>
@@ -29415,7 +31408,158 @@
       </p:sp>
       <p:sp>
         <p:nvSpPr>
-          <p:cNvPr id="22" name="Shape 20"/>
+          <p:cNvPr id="22" name="Text 20"/>
+          <p:cNvSpPr/>
+          <p:nvPr/>
+        </p:nvSpPr>
+        <p:spPr>
+          <a:xfrm>
+            <a:off x="4370832" y="2752344"/>
+            <a:ext cx="1828800" cy="182880"/>
+          </a:xfrm>
+          <a:prstGeom prst="rect">
+            <a:avLst/>
+          </a:prstGeom>
+          <a:noFill/>
+          <a:ln/>
+        </p:spPr>
+        <p:txBody>
+          <a:bodyPr wrap="square" lIns="0" tIns="0" rIns="0" bIns="0" rtlCol="0" anchor="t"/>
+          <a:lstStyle/>
+          <a:p>
+            <a:pPr algn="ctr" indent="0" marL="0">
+              <a:buNone/>
+            </a:pPr>
+            <a:r>
+              <a:rPr lang="en-US" sz="700" i="1" dirty="0">
+                <a:solidFill>
+                  <a:srgbClr val="94A3B8"/>
+                </a:solidFill>
+                <a:latin typeface="Calibri" pitchFamily="34" charset="0"/>
+                <a:ea typeface="Calibri" pitchFamily="34" charset="-122"/>
+                <a:cs typeface="Calibri" pitchFamily="34" charset="-120"/>
+              </a:rPr>
+              <a:t>final consonant doubled before vowel suffix</a:t>
+            </a:r>
+            <a:endParaRPr lang="en-US" sz="700" dirty="0"/>
+          </a:p>
+        </p:txBody>
+      </p:sp>
+      <p:sp>
+        <p:nvSpPr>
+          <p:cNvPr id="23" name="Shape 21"/>
+          <p:cNvSpPr/>
+          <p:nvPr/>
+        </p:nvSpPr>
+        <p:spPr>
+          <a:xfrm>
+            <a:off x="6519672" y="2258568"/>
+            <a:ext cx="1828800" cy="292608"/>
+          </a:xfrm>
+          <a:prstGeom prst="rect">
+            <a:avLst>
+              <a:gd name="adj" fmla="val 25000"/>
+            </a:avLst>
+          </a:prstGeom>
+          <a:solidFill>
+            <a:srgbClr val="FCE7F3"/>
+          </a:solidFill>
+          <a:ln w="19050">
+            <a:solidFill>
+              <a:srgbClr val="DB2777"/>
+            </a:solidFill>
+            <a:prstDash val="solid"/>
+          </a:ln>
+          <a:effectLst>
+            <a:outerShdw sx="100000" sy="100000" kx="0" ky="0" algn="bl" rotWithShape="0" blurRad="101600" dist="38100" dir="8100000">
+              <a:srgbClr val="000000">
+                <a:alpha val="12000"/>
+              </a:srgbClr>
+            </a:outerShdw>
+          </a:effectLst>
+        </p:spPr>
+      </p:sp>
+      <p:sp>
+        <p:nvSpPr>
+          <p:cNvPr id="24" name="Text 22"/>
+          <p:cNvSpPr/>
+          <p:nvPr/>
+        </p:nvSpPr>
+        <p:spPr>
+          <a:xfrm>
+            <a:off x="6519672" y="2258568"/>
+            <a:ext cx="1828800" cy="292608"/>
+          </a:xfrm>
+          <a:prstGeom prst="rect">
+            <a:avLst/>
+          </a:prstGeom>
+          <a:noFill/>
+          <a:ln/>
+        </p:spPr>
+        <p:txBody>
+          <a:bodyPr wrap="square" lIns="0" tIns="0" rIns="0" bIns="0" rtlCol="0" anchor="ctr"/>
+          <a:lstStyle/>
+          <a:p>
+            <a:pPr algn="ctr" indent="0" marL="0">
+              <a:buNone/>
+            </a:pPr>
+            <a:r>
+              <a:rPr lang="en-US" sz="1300" b="1" dirty="0">
+                <a:solidFill>
+                  <a:srgbClr val="9D174D"/>
+                </a:solidFill>
+                <a:latin typeface="Trebuchet MS" pitchFamily="34" charset="0"/>
+                <a:ea typeface="Trebuchet MS" pitchFamily="34" charset="-122"/>
+                <a:cs typeface="Trebuchet MS" pitchFamily="34" charset="-120"/>
+              </a:rPr>
+              <a:t>est</a:t>
+            </a:r>
+            <a:endParaRPr lang="en-US" sz="1300" dirty="0"/>
+          </a:p>
+        </p:txBody>
+      </p:sp>
+      <p:sp>
+        <p:nvSpPr>
+          <p:cNvPr id="25" name="Text 23"/>
+          <p:cNvSpPr/>
+          <p:nvPr/>
+        </p:nvSpPr>
+        <p:spPr>
+          <a:xfrm>
+            <a:off x="6519672" y="2569464"/>
+            <a:ext cx="1828800" cy="201168"/>
+          </a:xfrm>
+          <a:prstGeom prst="rect">
+            <a:avLst/>
+          </a:prstGeom>
+          <a:noFill/>
+          <a:ln/>
+        </p:spPr>
+        <p:txBody>
+          <a:bodyPr wrap="square" lIns="0" tIns="0" rIns="0" bIns="0" rtlCol="0" anchor="t"/>
+          <a:lstStyle/>
+          <a:p>
+            <a:pPr algn="ctr" indent="0" marL="0">
+              <a:buNone/>
+            </a:pPr>
+            <a:r>
+              <a:rPr lang="en-US" sz="850" dirty="0">
+                <a:solidFill>
+                  <a:srgbClr val="475569"/>
+                </a:solidFill>
+                <a:latin typeface="Calibri" pitchFamily="34" charset="0"/>
+                <a:ea typeface="Calibri" pitchFamily="34" charset="-122"/>
+                <a:cs typeface="Calibri" pitchFamily="34" charset="-120"/>
+              </a:rPr>
+              <a:t>most of all</a:t>
+            </a:r>
+            <a:endParaRPr lang="en-US" sz="850" dirty="0"/>
+          </a:p>
+        </p:txBody>
+      </p:sp>
+      <p:sp>
+        <p:nvSpPr>
+          <p:cNvPr id="26" name="Shape 24"/>
           <p:cNvSpPr/>
           <p:nvPr/>
         </p:nvSpPr>
@@ -29442,7 +31586,7 @@
       </p:sp>
       <p:sp>
         <p:nvSpPr>
-          <p:cNvPr id="23" name="Text 21"/>
+          <p:cNvPr id="27" name="Text 25"/>
           <p:cNvSpPr/>
           <p:nvPr/>
         </p:nvSpPr>
@@ -29481,7 +31625,7 @@
       </p:sp>
       <p:sp>
         <p:nvSpPr>
-          <p:cNvPr id="24" name="Shape 22"/>
+          <p:cNvPr id="28" name="Shape 26"/>
           <p:cNvSpPr/>
           <p:nvPr/>
         </p:nvSpPr>
@@ -29508,7 +31652,7 @@
       </p:sp>
       <p:sp>
         <p:nvSpPr>
-          <p:cNvPr id="25" name="Shape 23"/>
+          <p:cNvPr id="29" name="Shape 27"/>
           <p:cNvSpPr/>
           <p:nvPr/>
         </p:nvSpPr>
@@ -29535,7 +31679,7 @@
       </p:sp>
       <p:sp>
         <p:nvSpPr>
-          <p:cNvPr id="26" name="Text 24"/>
+          <p:cNvPr id="30" name="Text 28"/>
           <p:cNvSpPr/>
           <p:nvPr/>
         </p:nvSpPr>
@@ -29574,7 +31718,7 @@
       </p:sp>
       <p:sp>
         <p:nvSpPr>
-          <p:cNvPr id="27" name="Text 25"/>
+          <p:cNvPr id="31" name="Text 29"/>
           <p:cNvSpPr/>
           <p:nvPr/>
         </p:nvSpPr>
@@ -29613,7 +31757,7 @@
       </p:sp>
       <p:sp>
         <p:nvSpPr>
-          <p:cNvPr id="28" name="Shape 26"/>
+          <p:cNvPr id="32" name="Shape 30"/>
           <p:cNvSpPr/>
           <p:nvPr/>
         </p:nvSpPr>
@@ -29640,7 +31784,7 @@
       </p:sp>
       <p:sp>
         <p:nvSpPr>
-          <p:cNvPr id="29" name="Text 27"/>
+          <p:cNvPr id="33" name="Text 31"/>
           <p:cNvSpPr/>
           <p:nvPr/>
         </p:nvSpPr>
@@ -29671,7 +31815,7 @@
                 <a:ea typeface="Trebuchet MS" pitchFamily="34" charset="-122"/>
                 <a:cs typeface="Trebuchet MS" pitchFamily="34" charset="-120"/>
               </a:rPr>
-              <a:t>ness</a:t>
+              <a:t>dest</a:t>
             </a:r>
             <a:endParaRPr lang="en-US" sz="1400" dirty="0"/>
           </a:p>
@@ -29679,7 +31823,7 @@
       </p:sp>
       <p:sp>
         <p:nvSpPr>
-          <p:cNvPr id="30" name="Shape 28"/>
+          <p:cNvPr id="34" name="Shape 32"/>
           <p:cNvSpPr/>
           <p:nvPr/>
         </p:nvSpPr>
@@ -29706,7 +31850,7 @@
       </p:sp>
       <p:sp>
         <p:nvSpPr>
-          <p:cNvPr id="31" name="Text 29"/>
+          <p:cNvPr id="35" name="Text 33"/>
           <p:cNvSpPr/>
           <p:nvPr/>
         </p:nvSpPr>
@@ -29745,7 +31889,7 @@
       </p:sp>
       <p:sp>
         <p:nvSpPr>
-          <p:cNvPr id="32" name="Shape 30"/>
+          <p:cNvPr id="36" name="Shape 34"/>
           <p:cNvSpPr/>
           <p:nvPr/>
         </p:nvSpPr>
@@ -29772,7 +31916,7 @@
       </p:sp>
       <p:sp>
         <p:nvSpPr>
-          <p:cNvPr id="33" name="Text 31"/>
+          <p:cNvPr id="37" name="Text 35"/>
           <p:cNvSpPr/>
           <p:nvPr/>
         </p:nvSpPr>
@@ -30234,7 +32378,7 @@
                 <a:ea typeface="Trebuchet MS" pitchFamily="34" charset="-122"/>
                 <a:cs typeface="Trebuchet MS" pitchFamily="34" charset="-120"/>
               </a:rPr>
-              <a:t>sadness</a:t>
+              <a:t>saddest</a:t>
             </a:r>
             <a:endParaRPr lang="en-US" sz="2800" dirty="0"/>
           </a:p>
@@ -30314,7 +32458,7 @@
         </p:nvSpPr>
         <p:spPr>
           <a:xfrm>
-            <a:off x="2938272" y="2258568"/>
+            <a:off x="2221992" y="2258568"/>
             <a:ext cx="1828800" cy="292608"/>
           </a:xfrm>
           <a:prstGeom prst="rect">
@@ -30348,7 +32492,7 @@
         </p:nvSpPr>
         <p:spPr>
           <a:xfrm>
-            <a:off x="2938272" y="2258568"/>
+            <a:off x="2221992" y="2258568"/>
             <a:ext cx="1828800" cy="292608"/>
           </a:xfrm>
           <a:prstGeom prst="rect">
@@ -30387,7 +32531,7 @@
         </p:nvSpPr>
         <p:spPr>
           <a:xfrm>
-            <a:off x="2938272" y="2569464"/>
+            <a:off x="2221992" y="2569464"/>
             <a:ext cx="1828800" cy="201168"/>
           </a:xfrm>
           <a:prstGeom prst="rect">
@@ -30426,7 +32570,7 @@
         </p:nvSpPr>
         <p:spPr>
           <a:xfrm>
-            <a:off x="5803392" y="2258568"/>
+            <a:off x="4370832" y="2258568"/>
             <a:ext cx="1828800" cy="292608"/>
           </a:xfrm>
           <a:prstGeom prst="rect">
@@ -30460,7 +32604,7 @@
         </p:nvSpPr>
         <p:spPr>
           <a:xfrm>
-            <a:off x="5803392" y="2258568"/>
+            <a:off x="4370832" y="2258568"/>
             <a:ext cx="1828800" cy="292608"/>
           </a:xfrm>
           <a:prstGeom prst="rect">
@@ -30485,7 +32629,7 @@
                 <a:ea typeface="Trebuchet MS" pitchFamily="34" charset="-122"/>
                 <a:cs typeface="Trebuchet MS" pitchFamily="34" charset="-120"/>
               </a:rPr>
-              <a:t>ness</a:t>
+              <a:t>d</a:t>
             </a:r>
             <a:endParaRPr lang="en-US" sz="1300" dirty="0"/>
           </a:p>
@@ -30499,7 +32643,7 @@
         </p:nvSpPr>
         <p:spPr>
           <a:xfrm>
-            <a:off x="5803392" y="2569464"/>
+            <a:off x="4370832" y="2569464"/>
             <a:ext cx="1828800" cy="201168"/>
           </a:xfrm>
           <a:prstGeom prst="rect">
@@ -30524,7 +32668,7 @@
                 <a:ea typeface="Calibri" pitchFamily="34" charset="-122"/>
                 <a:cs typeface="Calibri" pitchFamily="34" charset="-120"/>
               </a:rPr>
-              <a:t>state or quality of</a:t>
+              <a:t>doubled consonant before suffix</a:t>
             </a:r>
             <a:endParaRPr lang="en-US" sz="850" dirty="0"/>
           </a:p>
@@ -30532,7 +32676,158 @@
       </p:sp>
       <p:sp>
         <p:nvSpPr>
-          <p:cNvPr id="22" name="Shape 20"/>
+          <p:cNvPr id="22" name="Text 20"/>
+          <p:cNvSpPr/>
+          <p:nvPr/>
+        </p:nvSpPr>
+        <p:spPr>
+          <a:xfrm>
+            <a:off x="4370832" y="2752344"/>
+            <a:ext cx="1828800" cy="182880"/>
+          </a:xfrm>
+          <a:prstGeom prst="rect">
+            <a:avLst/>
+          </a:prstGeom>
+          <a:noFill/>
+          <a:ln/>
+        </p:spPr>
+        <p:txBody>
+          <a:bodyPr wrap="square" lIns="0" tIns="0" rIns="0" bIns="0" rtlCol="0" anchor="t"/>
+          <a:lstStyle/>
+          <a:p>
+            <a:pPr algn="ctr" indent="0" marL="0">
+              <a:buNone/>
+            </a:pPr>
+            <a:r>
+              <a:rPr lang="en-US" sz="700" i="1" dirty="0">
+                <a:solidFill>
+                  <a:srgbClr val="94A3B8"/>
+                </a:solidFill>
+                <a:latin typeface="Calibri" pitchFamily="34" charset="0"/>
+                <a:ea typeface="Calibri" pitchFamily="34" charset="-122"/>
+                <a:cs typeface="Calibri" pitchFamily="34" charset="-120"/>
+              </a:rPr>
+              <a:t>final consonant doubled before vowel suffix</a:t>
+            </a:r>
+            <a:endParaRPr lang="en-US" sz="700" dirty="0"/>
+          </a:p>
+        </p:txBody>
+      </p:sp>
+      <p:sp>
+        <p:nvSpPr>
+          <p:cNvPr id="23" name="Shape 21"/>
+          <p:cNvSpPr/>
+          <p:nvPr/>
+        </p:nvSpPr>
+        <p:spPr>
+          <a:xfrm>
+            <a:off x="6519672" y="2258568"/>
+            <a:ext cx="1828800" cy="292608"/>
+          </a:xfrm>
+          <a:prstGeom prst="rect">
+            <a:avLst>
+              <a:gd name="adj" fmla="val 25000"/>
+            </a:avLst>
+          </a:prstGeom>
+          <a:solidFill>
+            <a:srgbClr val="FCE7F3"/>
+          </a:solidFill>
+          <a:ln w="19050">
+            <a:solidFill>
+              <a:srgbClr val="DB2777"/>
+            </a:solidFill>
+            <a:prstDash val="solid"/>
+          </a:ln>
+          <a:effectLst>
+            <a:outerShdw sx="100000" sy="100000" kx="0" ky="0" algn="bl" rotWithShape="0" blurRad="101600" dist="38100" dir="8100000">
+              <a:srgbClr val="000000">
+                <a:alpha val="12000"/>
+              </a:srgbClr>
+            </a:outerShdw>
+          </a:effectLst>
+        </p:spPr>
+      </p:sp>
+      <p:sp>
+        <p:nvSpPr>
+          <p:cNvPr id="24" name="Text 22"/>
+          <p:cNvSpPr/>
+          <p:nvPr/>
+        </p:nvSpPr>
+        <p:spPr>
+          <a:xfrm>
+            <a:off x="6519672" y="2258568"/>
+            <a:ext cx="1828800" cy="292608"/>
+          </a:xfrm>
+          <a:prstGeom prst="rect">
+            <a:avLst/>
+          </a:prstGeom>
+          <a:noFill/>
+          <a:ln/>
+        </p:spPr>
+        <p:txBody>
+          <a:bodyPr wrap="square" lIns="0" tIns="0" rIns="0" bIns="0" rtlCol="0" anchor="ctr"/>
+          <a:lstStyle/>
+          <a:p>
+            <a:pPr algn="ctr" indent="0" marL="0">
+              <a:buNone/>
+            </a:pPr>
+            <a:r>
+              <a:rPr lang="en-US" sz="1300" b="1" dirty="0">
+                <a:solidFill>
+                  <a:srgbClr val="9D174D"/>
+                </a:solidFill>
+                <a:latin typeface="Trebuchet MS" pitchFamily="34" charset="0"/>
+                <a:ea typeface="Trebuchet MS" pitchFamily="34" charset="-122"/>
+                <a:cs typeface="Trebuchet MS" pitchFamily="34" charset="-120"/>
+              </a:rPr>
+              <a:t>est</a:t>
+            </a:r>
+            <a:endParaRPr lang="en-US" sz="1300" dirty="0"/>
+          </a:p>
+        </p:txBody>
+      </p:sp>
+      <p:sp>
+        <p:nvSpPr>
+          <p:cNvPr id="25" name="Text 23"/>
+          <p:cNvSpPr/>
+          <p:nvPr/>
+        </p:nvSpPr>
+        <p:spPr>
+          <a:xfrm>
+            <a:off x="6519672" y="2569464"/>
+            <a:ext cx="1828800" cy="201168"/>
+          </a:xfrm>
+          <a:prstGeom prst="rect">
+            <a:avLst/>
+          </a:prstGeom>
+          <a:noFill/>
+          <a:ln/>
+        </p:spPr>
+        <p:txBody>
+          <a:bodyPr wrap="square" lIns="0" tIns="0" rIns="0" bIns="0" rtlCol="0" anchor="t"/>
+          <a:lstStyle/>
+          <a:p>
+            <a:pPr algn="ctr" indent="0" marL="0">
+              <a:buNone/>
+            </a:pPr>
+            <a:r>
+              <a:rPr lang="en-US" sz="850" dirty="0">
+                <a:solidFill>
+                  <a:srgbClr val="475569"/>
+                </a:solidFill>
+                <a:latin typeface="Calibri" pitchFamily="34" charset="0"/>
+                <a:ea typeface="Calibri" pitchFamily="34" charset="-122"/>
+                <a:cs typeface="Calibri" pitchFamily="34" charset="-120"/>
+              </a:rPr>
+              <a:t>most of all</a:t>
+            </a:r>
+            <a:endParaRPr lang="en-US" sz="850" dirty="0"/>
+          </a:p>
+        </p:txBody>
+      </p:sp>
+      <p:sp>
+        <p:nvSpPr>
+          <p:cNvPr id="26" name="Shape 24"/>
           <p:cNvSpPr/>
           <p:nvPr/>
         </p:nvSpPr>
@@ -30559,7 +32854,7 @@
       </p:sp>
       <p:sp>
         <p:nvSpPr>
-          <p:cNvPr id="23" name="Text 21"/>
+          <p:cNvPr id="27" name="Text 25"/>
           <p:cNvSpPr/>
           <p:nvPr/>
         </p:nvSpPr>
@@ -30598,7 +32893,7 @@
       </p:sp>
       <p:sp>
         <p:nvSpPr>
-          <p:cNvPr id="24" name="Shape 22"/>
+          <p:cNvPr id="28" name="Shape 26"/>
           <p:cNvSpPr/>
           <p:nvPr/>
         </p:nvSpPr>
@@ -30625,7 +32920,7 @@
       </p:sp>
       <p:sp>
         <p:nvSpPr>
-          <p:cNvPr id="25" name="Shape 23"/>
+          <p:cNvPr id="29" name="Shape 27"/>
           <p:cNvSpPr/>
           <p:nvPr/>
         </p:nvSpPr>
@@ -30652,7 +32947,7 @@
       </p:sp>
       <p:sp>
         <p:nvSpPr>
-          <p:cNvPr id="26" name="Text 24"/>
+          <p:cNvPr id="30" name="Text 28"/>
           <p:cNvSpPr/>
           <p:nvPr/>
         </p:nvSpPr>
@@ -30691,7 +32986,7 @@
       </p:sp>
       <p:sp>
         <p:nvSpPr>
-          <p:cNvPr id="27" name="Text 25"/>
+          <p:cNvPr id="31" name="Text 29"/>
           <p:cNvSpPr/>
           <p:nvPr/>
         </p:nvSpPr>
@@ -30730,7 +33025,7 @@
       </p:sp>
       <p:sp>
         <p:nvSpPr>
-          <p:cNvPr id="28" name="Shape 26"/>
+          <p:cNvPr id="32" name="Shape 30"/>
           <p:cNvSpPr/>
           <p:nvPr/>
         </p:nvSpPr>
@@ -30757,7 +33052,7 @@
       </p:sp>
       <p:sp>
         <p:nvSpPr>
-          <p:cNvPr id="29" name="Text 27"/>
+          <p:cNvPr id="33" name="Text 31"/>
           <p:cNvSpPr/>
           <p:nvPr/>
         </p:nvSpPr>
@@ -30788,7 +33083,7 @@
                 <a:ea typeface="Trebuchet MS" pitchFamily="34" charset="-122"/>
                 <a:cs typeface="Trebuchet MS" pitchFamily="34" charset="-120"/>
               </a:rPr>
-              <a:t>ness</a:t>
+              <a:t>dest</a:t>
             </a:r>
             <a:endParaRPr lang="en-US" sz="1400" dirty="0"/>
           </a:p>
@@ -30796,7 +33091,7 @@
       </p:sp>
       <p:sp>
         <p:nvSpPr>
-          <p:cNvPr id="30" name="Shape 28"/>
+          <p:cNvPr id="34" name="Shape 32"/>
           <p:cNvSpPr/>
           <p:nvPr/>
         </p:nvSpPr>
@@ -30823,7 +33118,7 @@
       </p:sp>
       <p:sp>
         <p:nvSpPr>
-          <p:cNvPr id="31" name="Text 29"/>
+          <p:cNvPr id="35" name="Text 33"/>
           <p:cNvSpPr/>
           <p:nvPr/>
         </p:nvSpPr>
@@ -30862,7 +33157,7 @@
       </p:sp>
       <p:sp>
         <p:nvSpPr>
-          <p:cNvPr id="32" name="Shape 30"/>
+          <p:cNvPr id="36" name="Shape 34"/>
           <p:cNvSpPr/>
           <p:nvPr/>
         </p:nvSpPr>
@@ -30889,7 +33184,7 @@
       </p:sp>
       <p:sp>
         <p:nvSpPr>
-          <p:cNvPr id="33" name="Shape 31"/>
+          <p:cNvPr id="37" name="Shape 35"/>
           <p:cNvSpPr/>
           <p:nvPr/>
         </p:nvSpPr>
@@ -30916,7 +33211,7 @@
       </p:sp>
       <p:sp>
         <p:nvSpPr>
-          <p:cNvPr id="34" name="Text 32"/>
+          <p:cNvPr id="38" name="Text 36"/>
           <p:cNvSpPr/>
           <p:nvPr/>
         </p:nvSpPr>
@@ -30955,7 +33250,7 @@
       </p:sp>
       <p:sp>
         <p:nvSpPr>
-          <p:cNvPr id="35" name="Shape 33"/>
+          <p:cNvPr id="39" name="Shape 37"/>
           <p:cNvSpPr/>
           <p:nvPr/>
         </p:nvSpPr>
@@ -30982,7 +33277,7 @@
       </p:sp>
       <p:sp>
         <p:nvSpPr>
-          <p:cNvPr id="36" name="Text 34"/>
+          <p:cNvPr id="40" name="Text 38"/>
           <p:cNvSpPr/>
           <p:nvPr/>
         </p:nvSpPr>
@@ -31021,7 +33316,7 @@
       </p:sp>
       <p:sp>
         <p:nvSpPr>
-          <p:cNvPr id="37" name="Shape 35"/>
+          <p:cNvPr id="41" name="Shape 39"/>
           <p:cNvSpPr/>
           <p:nvPr/>
         </p:nvSpPr>
@@ -31048,7 +33343,7 @@
       </p:sp>
       <p:sp>
         <p:nvSpPr>
-          <p:cNvPr id="38" name="Text 36"/>
+          <p:cNvPr id="42" name="Text 40"/>
           <p:cNvSpPr/>
           <p:nvPr/>
         </p:nvSpPr>
@@ -31079,7 +33374,7 @@
                 <a:ea typeface="Trebuchet MS" pitchFamily="34" charset="-122"/>
                 <a:cs typeface="Trebuchet MS" pitchFamily="34" charset="-120"/>
               </a:rPr>
-              <a:t>d</a:t>
+              <a:t>dd</a:t>
             </a:r>
             <a:endParaRPr lang="en-US" sz="900" dirty="0"/>
           </a:p>
@@ -31087,7 +33382,7 @@
       </p:sp>
       <p:sp>
         <p:nvSpPr>
-          <p:cNvPr id="39" name="Shape 37"/>
+          <p:cNvPr id="43" name="Shape 41"/>
           <p:cNvSpPr/>
           <p:nvPr/>
         </p:nvSpPr>
@@ -31114,7 +33409,7 @@
       </p:sp>
       <p:sp>
         <p:nvSpPr>
-          <p:cNvPr id="40" name="Text 38"/>
+          <p:cNvPr id="44" name="Text 42"/>
           <p:cNvSpPr/>
           <p:nvPr/>
         </p:nvSpPr>
@@ -31145,7 +33440,7 @@
                 <a:ea typeface="Trebuchet MS" pitchFamily="34" charset="-122"/>
                 <a:cs typeface="Trebuchet MS" pitchFamily="34" charset="-120"/>
               </a:rPr>
-              <a:t>n</a:t>
+              <a:t>e</a:t>
             </a:r>
             <a:endParaRPr lang="en-US" sz="900" dirty="0"/>
           </a:p>
@@ -31153,7 +33448,7 @@
       </p:sp>
       <p:sp>
         <p:nvSpPr>
-          <p:cNvPr id="41" name="Shape 39"/>
+          <p:cNvPr id="45" name="Shape 43"/>
           <p:cNvSpPr/>
           <p:nvPr/>
         </p:nvSpPr>
@@ -31180,7 +33475,7 @@
       </p:sp>
       <p:sp>
         <p:nvSpPr>
-          <p:cNvPr id="42" name="Text 40"/>
+          <p:cNvPr id="46" name="Text 44"/>
           <p:cNvSpPr/>
           <p:nvPr/>
         </p:nvSpPr>
@@ -31211,7 +33506,7 @@
                 <a:ea typeface="Trebuchet MS" pitchFamily="34" charset="-122"/>
                 <a:cs typeface="Trebuchet MS" pitchFamily="34" charset="-120"/>
               </a:rPr>
-              <a:t>e</a:t>
+              <a:t>s</a:t>
             </a:r>
             <a:endParaRPr lang="en-US" sz="900" dirty="0"/>
           </a:p>
@@ -31219,7 +33514,7 @@
       </p:sp>
       <p:sp>
         <p:nvSpPr>
-          <p:cNvPr id="43" name="Shape 41"/>
+          <p:cNvPr id="47" name="Shape 45"/>
           <p:cNvSpPr/>
           <p:nvPr/>
         </p:nvSpPr>
@@ -31246,7 +33541,7 @@
       </p:sp>
       <p:sp>
         <p:nvSpPr>
-          <p:cNvPr id="44" name="Text 42"/>
+          <p:cNvPr id="48" name="Text 46"/>
           <p:cNvSpPr/>
           <p:nvPr/>
         </p:nvSpPr>
@@ -31277,7 +33572,7 @@
                 <a:ea typeface="Trebuchet MS" pitchFamily="34" charset="-122"/>
                 <a:cs typeface="Trebuchet MS" pitchFamily="34" charset="-120"/>
               </a:rPr>
-              <a:t>ss</a:t>
+              <a:t>t</a:t>
             </a:r>
             <a:endParaRPr lang="en-US" sz="900" dirty="0"/>
           </a:p>
@@ -33167,7 +35462,7 @@
                 <a:ea typeface="Trebuchet MS" pitchFamily="34" charset="-122"/>
                 <a:cs typeface="Trebuchet MS" pitchFamily="34" charset="-120"/>
               </a:rPr>
-              <a:t>-ly</a:t>
+              <a:t>-ness</a:t>
             </a:r>
             <a:endParaRPr lang="en-US" sz="1300" dirty="0"/>
           </a:p>
@@ -33320,7 +35615,7 @@
                 <a:ea typeface="Trebuchet MS" pitchFamily="34" charset="-122"/>
                 <a:cs typeface="Trebuchet MS" pitchFamily="34" charset="-120"/>
               </a:rPr>
-              <a:t>-ness</a:t>
+              <a:t>-ly</a:t>
             </a:r>
             <a:endParaRPr lang="en-US" sz="1300" dirty="0"/>
           </a:p>
@@ -33537,7 +35832,7 @@
                 <a:ea typeface="Trebuchet MS" pitchFamily="34" charset="-122"/>
                 <a:cs typeface="Trebuchet MS" pitchFamily="34" charset="-120"/>
               </a:rPr>
-              <a:t>out-</a:t>
+              <a:t>ex-</a:t>
             </a:r>
             <a:endParaRPr lang="en-US" sz="1300" dirty="0"/>
           </a:p>
@@ -33690,7 +35985,7 @@
                 <a:ea typeface="Trebuchet MS" pitchFamily="34" charset="-122"/>
                 <a:cs typeface="Trebuchet MS" pitchFamily="34" charset="-120"/>
               </a:rPr>
-              <a:t>super-</a:t>
+              <a:t>be-</a:t>
             </a:r>
             <a:endParaRPr lang="en-US" sz="1300" dirty="0"/>
           </a:p>
@@ -33779,7 +36074,7 @@
                 <a:ea typeface="Trebuchet MS" pitchFamily="34" charset="-122"/>
                 <a:cs typeface="Trebuchet MS" pitchFamily="34" charset="-120"/>
               </a:rPr>
-              <a:t>-en</a:t>
+              <a:t>-den</a:t>
             </a:r>
             <a:endParaRPr lang="en-US" sz="1300" dirty="0"/>
           </a:p>
@@ -34280,7 +36575,7 @@
                 <a:ea typeface="Trebuchet MS" pitchFamily="34" charset="-122"/>
                 <a:cs typeface="Trebuchet MS" pitchFamily="34" charset="-120"/>
               </a:rPr>
-              <a:t>saddening</a:t>
+              <a:t>saddened</a:t>
             </a:r>
             <a:endParaRPr lang="en-US" sz="1200" dirty="0"/>
           </a:p>
@@ -34346,7 +36641,7 @@
                 <a:ea typeface="Trebuchet MS" pitchFamily="34" charset="-122"/>
                 <a:cs typeface="Trebuchet MS" pitchFamily="34" charset="-120"/>
               </a:rPr>
-              <a:t>unsaddened</a:t>
+              <a:t>saddening</a:t>
             </a:r>
             <a:endParaRPr lang="en-US" sz="1200" dirty="0"/>
           </a:p>
@@ -35534,7 +37829,7 @@
                 <a:ea typeface="Calibri" pitchFamily="34" charset="-122"/>
                 <a:cs typeface="Calibri" pitchFamily="34" charset="-120"/>
               </a:rPr>
-              <a:t>1.  The word 'sadly' is formed by adding the suffix '-ly' to the root 'sad'.</a:t>
+              <a:t>1.  The word 'sadden' means to make someone feel happy.</a:t>
             </a:r>
             <a:endParaRPr lang="en-US" sz="1300" dirty="0"/>
           </a:p>
@@ -35557,11 +37852,11 @@
             </a:avLst>
           </a:prstGeom>
           <a:solidFill>
-            <a:srgbClr val="DCFCE7"/>
-          </a:solidFill>
-          <a:ln w="12700">
-            <a:solidFill>
-              <a:srgbClr val="16A34A"/>
+            <a:srgbClr val="FEE2E2"/>
+          </a:solidFill>
+          <a:ln w="12700">
+            <a:solidFill>
+              <a:srgbClr val="DC2626"/>
             </a:solidFill>
             <a:prstDash val="solid"/>
           </a:ln>
@@ -35594,13 +37889,13 @@
             <a:r>
               <a:rPr lang="en-US" sz="1100" b="1" dirty="0">
                 <a:solidFill>
-                  <a:srgbClr val="16A34A"/>
+                  <a:srgbClr val="DC2626"/>
                 </a:solidFill>
                 <a:latin typeface="Trebuchet MS" pitchFamily="34" charset="0"/>
                 <a:ea typeface="Trebuchet MS" pitchFamily="34" charset="-122"/>
                 <a:cs typeface="Trebuchet MS" pitchFamily="34" charset="-120"/>
               </a:rPr>
-              <a:t>TRUE</a:t>
+              <a:t>FALSE</a:t>
             </a:r>
             <a:endParaRPr lang="en-US" sz="1100" dirty="0"/>
           </a:p>
@@ -35673,7 +37968,7 @@
                 <a:ea typeface="Calibri" pitchFamily="34" charset="-122"/>
                 <a:cs typeface="Calibri" pitchFamily="34" charset="-120"/>
               </a:rPr>
-              <a:t>2.  The root 'sad' comes from a Greek word.</a:t>
+              <a:t>2.  The word 'saddest' uses the superlative suffix '-est'.</a:t>
             </a:r>
             <a:endParaRPr lang="en-US" sz="1300" dirty="0"/>
           </a:p>
@@ -35696,11 +37991,11 @@
             </a:avLst>
           </a:prstGeom>
           <a:solidFill>
-            <a:srgbClr val="FEE2E2"/>
-          </a:solidFill>
-          <a:ln w="12700">
-            <a:solidFill>
-              <a:srgbClr val="DC2626"/>
+            <a:srgbClr val="DCFCE7"/>
+          </a:solidFill>
+          <a:ln w="12700">
+            <a:solidFill>
+              <a:srgbClr val="16A34A"/>
             </a:solidFill>
             <a:prstDash val="solid"/>
           </a:ln>
@@ -35733,13 +38028,13 @@
             <a:r>
               <a:rPr lang="en-US" sz="1100" b="1" dirty="0">
                 <a:solidFill>
-                  <a:srgbClr val="DC2626"/>
+                  <a:srgbClr val="16A34A"/>
                 </a:solidFill>
                 <a:latin typeface="Trebuchet MS" pitchFamily="34" charset="0"/>
                 <a:ea typeface="Trebuchet MS" pitchFamily="34" charset="-122"/>
                 <a:cs typeface="Trebuchet MS" pitchFamily="34" charset="-120"/>
               </a:rPr>
-              <a:t>FALSE</a:t>
+              <a:t>TRUE</a:t>
             </a:r>
             <a:endParaRPr lang="en-US" sz="1100" dirty="0"/>
           </a:p>
@@ -35812,7 +38107,7 @@
                 <a:ea typeface="Calibri" pitchFamily="34" charset="-122"/>
                 <a:cs typeface="Calibri" pitchFamily="34" charset="-120"/>
               </a:rPr>
-              <a:t>3.  Adding '-ness' to 'sad' makes the word 'sadness', which means the state of being unhappy.</a:t>
+              <a:t>3.  The root 'sad' comes from Greek and means 'joy'.</a:t>
             </a:r>
             <a:endParaRPr lang="en-US" sz="1300" dirty="0"/>
           </a:p>
@@ -35835,11 +38130,11 @@
             </a:avLst>
           </a:prstGeom>
           <a:solidFill>
-            <a:srgbClr val="DCFCE7"/>
-          </a:solidFill>
-          <a:ln w="12700">
-            <a:solidFill>
-              <a:srgbClr val="16A34A"/>
+            <a:srgbClr val="FEE2E2"/>
+          </a:solidFill>
+          <a:ln w="12700">
+            <a:solidFill>
+              <a:srgbClr val="DC2626"/>
             </a:solidFill>
             <a:prstDash val="solid"/>
           </a:ln>
@@ -35872,13 +38167,13 @@
             <a:r>
               <a:rPr lang="en-US" sz="1100" b="1" dirty="0">
                 <a:solidFill>
-                  <a:srgbClr val="16A34A"/>
+                  <a:srgbClr val="DC2626"/>
                 </a:solidFill>
                 <a:latin typeface="Trebuchet MS" pitchFamily="34" charset="0"/>
                 <a:ea typeface="Trebuchet MS" pitchFamily="34" charset="-122"/>
                 <a:cs typeface="Trebuchet MS" pitchFamily="34" charset="-120"/>
               </a:rPr>
-              <a:t>TRUE</a:t>
+              <a:t>FALSE</a:t>
             </a:r>
             <a:endParaRPr lang="en-US" sz="1100" dirty="0"/>
           </a:p>
@@ -35951,7 +38246,7 @@
                 <a:ea typeface="Calibri" pitchFamily="34" charset="-122"/>
                 <a:cs typeface="Calibri" pitchFamily="34" charset="-120"/>
               </a:rPr>
-              <a:t>4.  'Sadden' means to make someone feel unhappy.</a:t>
+              <a:t>4.  The word 'sadly' contains the root 'sad' plus a suffix.</a:t>
             </a:r>
             <a:endParaRPr lang="en-US" sz="1300" dirty="0"/>
           </a:p>
@@ -36090,7 +38385,7 @@
                 <a:ea typeface="Calibri" pitchFamily="34" charset="-122"/>
                 <a:cs typeface="Calibri" pitchFamily="34" charset="-120"/>
               </a:rPr>
-              <a:t>5.  The word 'saddest' means slightly unhappy, not very unhappy.</a:t>
+              <a:t>5.  Adding '-ness' to 'sad' makes a noun meaning the state of being sad.</a:t>
             </a:r>
             <a:endParaRPr lang="en-US" sz="1300" dirty="0"/>
           </a:p>
@@ -36113,11 +38408,11 @@
             </a:avLst>
           </a:prstGeom>
           <a:solidFill>
-            <a:srgbClr val="FEE2E2"/>
-          </a:solidFill>
-          <a:ln w="12700">
-            <a:solidFill>
-              <a:srgbClr val="DC2626"/>
+            <a:srgbClr val="DCFCE7"/>
+          </a:solidFill>
+          <a:ln w="12700">
+            <a:solidFill>
+              <a:srgbClr val="16A34A"/>
             </a:solidFill>
             <a:prstDash val="solid"/>
           </a:ln>
@@ -36150,13 +38445,13 @@
             <a:r>
               <a:rPr lang="en-US" sz="1100" b="1" dirty="0">
                 <a:solidFill>
-                  <a:srgbClr val="DC2626"/>
+                  <a:srgbClr val="16A34A"/>
                 </a:solidFill>
                 <a:latin typeface="Trebuchet MS" pitchFamily="34" charset="0"/>
                 <a:ea typeface="Trebuchet MS" pitchFamily="34" charset="-122"/>
                 <a:cs typeface="Trebuchet MS" pitchFamily="34" charset="-120"/>
               </a:rPr>
-              <a:t>FALSE</a:t>
+              <a:t>TRUE</a:t>
             </a:r>
             <a:endParaRPr lang="en-US" sz="1100" dirty="0"/>
           </a:p>
@@ -36624,7 +38919,7 @@
                 <a:ea typeface="Calibri" pitchFamily="34" charset="-122"/>
                 <a:cs typeface="Calibri" pitchFamily="34" charset="-120"/>
               </a:rPr>
-              <a:t>Origin: Latin: tristis</a:t>
+              <a:t>Origin: Latin: satis</a:t>
             </a:r>
             <a:endParaRPr lang="en-US" sz="1100" dirty="0"/>
           </a:p>
@@ -37125,7 +39420,7 @@
                 <a:ea typeface="Trebuchet MS" pitchFamily="34" charset="-122"/>
                 <a:cs typeface="Trebuchet MS" pitchFamily="34" charset="-120"/>
               </a:rPr>
-              <a:t>saddening</a:t>
+              <a:t>saddened</a:t>
             </a:r>
             <a:endParaRPr lang="en-US" sz="1300" dirty="0"/>
           </a:p>
@@ -37846,7 +40141,7 @@
                 <a:ea typeface="Trebuchet MS" pitchFamily="34" charset="-122"/>
                 <a:cs typeface="Trebuchet MS" pitchFamily="34" charset="-120"/>
               </a:rPr>
-              <a:t>-ly</a:t>
+              <a:t>-ness</a:t>
             </a:r>
             <a:endParaRPr lang="en-US" sz="1300" dirty="0"/>
           </a:p>
@@ -37999,7 +40294,7 @@
                 <a:ea typeface="Trebuchet MS" pitchFamily="34" charset="-122"/>
                 <a:cs typeface="Trebuchet MS" pitchFamily="34" charset="-120"/>
               </a:rPr>
-              <a:t>-ness</a:t>
+              <a:t>-ly</a:t>
             </a:r>
             <a:endParaRPr lang="en-US" sz="1300" dirty="0"/>
           </a:p>
@@ -38216,7 +40511,7 @@
                 <a:ea typeface="Trebuchet MS" pitchFamily="34" charset="-122"/>
                 <a:cs typeface="Trebuchet MS" pitchFamily="34" charset="-120"/>
               </a:rPr>
-              <a:t>out-</a:t>
+              <a:t>ex-</a:t>
             </a:r>
             <a:endParaRPr lang="en-US" sz="1300" dirty="0"/>
           </a:p>
@@ -38369,7 +40664,7 @@
                 <a:ea typeface="Trebuchet MS" pitchFamily="34" charset="-122"/>
                 <a:cs typeface="Trebuchet MS" pitchFamily="34" charset="-120"/>
               </a:rPr>
-              <a:t>super-</a:t>
+              <a:t>be-</a:t>
             </a:r>
             <a:endParaRPr lang="en-US" sz="1300" dirty="0"/>
           </a:p>
@@ -38458,7 +40753,7 @@
                 <a:ea typeface="Trebuchet MS" pitchFamily="34" charset="-122"/>
                 <a:cs typeface="Trebuchet MS" pitchFamily="34" charset="-120"/>
               </a:rPr>
-              <a:t>-en</a:t>
+              <a:t>-den</a:t>
             </a:r>
             <a:endParaRPr lang="en-US" sz="1300" dirty="0"/>
           </a:p>
@@ -38736,7 +41031,7 @@
         <p:spPr>
           <a:xfrm>
             <a:off x="4178808" y="4178808"/>
-            <a:ext cx="822960" cy="420624"/>
+            <a:ext cx="1097280" cy="420624"/>
           </a:xfrm>
           <a:prstGeom prst="rect">
             <a:avLst>
@@ -38770,7 +41065,7 @@
         <p:spPr>
           <a:xfrm>
             <a:off x="4178808" y="4178808"/>
-            <a:ext cx="822960" cy="420624"/>
+            <a:ext cx="1097280" cy="420624"/>
           </a:xfrm>
           <a:prstGeom prst="rect">
             <a:avLst/>
@@ -38794,7 +41089,7 @@
                 <a:ea typeface="Trebuchet MS" pitchFamily="34" charset="-122"/>
                 <a:cs typeface="Trebuchet MS" pitchFamily="34" charset="-120"/>
               </a:rPr>
-              <a:t>-ly</a:t>
+              <a:t>-ness</a:t>
             </a:r>
             <a:endParaRPr lang="en-US" sz="1300" dirty="0"/>
           </a:p>
@@ -38808,7 +41103,7 @@
         </p:nvSpPr>
         <p:spPr>
           <a:xfrm>
-            <a:off x="5074920" y="4178808"/>
+            <a:off x="5349240" y="4178808"/>
             <a:ext cx="365760" cy="420624"/>
           </a:xfrm>
           <a:prstGeom prst="rect">
@@ -38847,7 +41142,7 @@
         </p:nvSpPr>
         <p:spPr>
           <a:xfrm>
-            <a:off x="5486400" y="4178808"/>
+            <a:off x="5760720" y="4178808"/>
             <a:ext cx="2194560" cy="420624"/>
           </a:xfrm>
           <a:prstGeom prst="rect">
@@ -38874,7 +41169,7 @@
         </p:nvSpPr>
         <p:spPr>
           <a:xfrm>
-            <a:off x="5486400" y="4178808"/>
+            <a:off x="5760720" y="4178808"/>
             <a:ext cx="2194560" cy="420624"/>
           </a:xfrm>
           <a:prstGeom prst="rect">
@@ -39369,7 +41664,7 @@
                 <a:ea typeface="Calibri" pitchFamily="34" charset="-122"/>
                 <a:cs typeface="Calibri" pitchFamily="34" charset="-120"/>
               </a:rPr>
-              <a:t>Something that causes you to feel unhappy or sorry.</a:t>
+              <a:t>Made to feel unhappy or sorrowful by something.</a:t>
             </a:r>
             <a:endParaRPr lang="en-US" sz="1200" dirty="0"/>
           </a:p>
@@ -39508,7 +41803,7 @@
                 <a:ea typeface="Calibri" pitchFamily="34" charset="-122"/>
                 <a:cs typeface="Calibri" pitchFamily="34" charset="-120"/>
               </a:rPr>
-              <a:t>The most unhappy of all; as sad as can be.</a:t>
+              <a:t>The most unhappy or upsetting of all.</a:t>
             </a:r>
             <a:endParaRPr lang="en-US" sz="1200" dirty="0"/>
           </a:p>
@@ -40137,7 +42432,7 @@
                 <a:ea typeface="Trebuchet MS" pitchFamily="34" charset="-122"/>
                 <a:cs typeface="Trebuchet MS" pitchFamily="34" charset="-120"/>
               </a:rPr>
-              <a:t>saddening</a:t>
+              <a:t>saddened</a:t>
             </a:r>
             <a:endParaRPr lang="en-US" sz="1200" dirty="0"/>
           </a:p>
@@ -40698,7 +42993,7 @@
                 <a:ea typeface="Calibri" pitchFamily="34" charset="-122"/>
                 <a:cs typeface="Calibri" pitchFamily="34" charset="-120"/>
               </a:rPr>
-              <a:t>She spoke sadly about her dog that had gone missing from the backyard.</a:t>
+              <a:t>She felt a deep sadness when her best friend moved to another school.</a:t>
             </a:r>
             <a:endParaRPr lang="en-US" sz="1500" dirty="0"/>
           </a:p>
@@ -40862,7 +43157,7 @@
                 <a:ea typeface="Calibri" pitchFamily="34" charset="-122"/>
                 <a:cs typeface="Calibri" pitchFamily="34" charset="-120"/>
               </a:rPr>
-              <a:t>The sadness in his voice made everyone in the classroom feel quiet and still.</a:t>
+              <a:t>The ending of the film was so saddening that many people in the audience cried.</a:t>
             </a:r>
             <a:endParaRPr lang="en-US" sz="1500" dirty="0"/>
           </a:p>
@@ -41026,7 +43321,7 @@
                 <a:ea typeface="Calibri" pitchFamily="34" charset="-122"/>
                 <a:cs typeface="Calibri" pitchFamily="34" charset="-120"/>
               </a:rPr>
-              <a:t>It was the saddest ending to a story that any of the students had ever read.</a:t>
+              <a:t>He sadly watched the last of the autumn leaves fall from the old oak tree.</a:t>
             </a:r>
             <a:endParaRPr lang="en-US" sz="1500" dirty="0"/>
           </a:p>

--- a/output/wordlabs-sad-3day.pptx
+++ b/output/wordlabs-sad-3day.pptx
@@ -28335,11 +28335,11 @@
         <p:spPr>
           <a:xfrm>
             <a:off x="1874520" y="4096512"/>
-            <a:ext cx="6903720" cy="804672"/>
+            <a:ext cx="6903720" cy="658368"/>
           </a:xfrm>
           <a:prstGeom prst="rect">
             <a:avLst>
-              <a:gd name="adj" fmla="val 6818"/>
+              <a:gd name="adj" fmla="val 8333"/>
             </a:avLst>
           </a:prstGeom>
           <a:solidFill>
@@ -28362,11 +28362,11 @@
         <p:spPr>
           <a:xfrm>
             <a:off x="2427732" y="4169664"/>
-            <a:ext cx="685800" cy="384048"/>
+            <a:ext cx="685800" cy="475488"/>
           </a:xfrm>
           <a:prstGeom prst="rect">
             <a:avLst>
-              <a:gd name="adj" fmla="val 9524"/>
+              <a:gd name="adj" fmla="val 7692"/>
             </a:avLst>
           </a:prstGeom>
           <a:solidFill>
@@ -28389,7 +28389,7 @@
         <p:spPr>
           <a:xfrm>
             <a:off x="2427732" y="4169664"/>
-            <a:ext cx="685800" cy="384048"/>
+            <a:ext cx="685800" cy="475488"/>
           </a:xfrm>
           <a:prstGeom prst="rect">
             <a:avLst/>
@@ -28428,11 +28428,11 @@
         <p:spPr>
           <a:xfrm>
             <a:off x="3639312" y="4169664"/>
-            <a:ext cx="685800" cy="384048"/>
+            <a:ext cx="685800" cy="475488"/>
           </a:xfrm>
           <a:prstGeom prst="rect">
             <a:avLst>
-              <a:gd name="adj" fmla="val 9524"/>
+              <a:gd name="adj" fmla="val 7692"/>
             </a:avLst>
           </a:prstGeom>
           <a:solidFill>
@@ -28455,7 +28455,7 @@
         <p:spPr>
           <a:xfrm>
             <a:off x="3639312" y="4169664"/>
-            <a:ext cx="685800" cy="384048"/>
+            <a:ext cx="685800" cy="475488"/>
           </a:xfrm>
           <a:prstGeom prst="rect">
             <a:avLst/>
@@ -28494,11 +28494,11 @@
         <p:spPr>
           <a:xfrm>
             <a:off x="4850892" y="4169664"/>
-            <a:ext cx="685800" cy="384048"/>
+            <a:ext cx="685800" cy="475488"/>
           </a:xfrm>
           <a:prstGeom prst="rect">
             <a:avLst>
-              <a:gd name="adj" fmla="val 9524"/>
+              <a:gd name="adj" fmla="val 7692"/>
             </a:avLst>
           </a:prstGeom>
           <a:solidFill>
@@ -28521,7 +28521,7 @@
         <p:spPr>
           <a:xfrm>
             <a:off x="4850892" y="4169664"/>
-            <a:ext cx="685800" cy="384048"/>
+            <a:ext cx="685800" cy="475488"/>
           </a:xfrm>
           <a:prstGeom prst="rect">
             <a:avLst/>
@@ -28560,11 +28560,11 @@
         <p:spPr>
           <a:xfrm>
             <a:off x="6062472" y="4169664"/>
-            <a:ext cx="685800" cy="384048"/>
+            <a:ext cx="685800" cy="475488"/>
           </a:xfrm>
           <a:prstGeom prst="rect">
             <a:avLst>
-              <a:gd name="adj" fmla="val 9524"/>
+              <a:gd name="adj" fmla="val 7692"/>
             </a:avLst>
           </a:prstGeom>
           <a:solidFill>
@@ -28587,7 +28587,7 @@
         <p:spPr>
           <a:xfrm>
             <a:off x="6062472" y="4169664"/>
-            <a:ext cx="685800" cy="384048"/>
+            <a:ext cx="685800" cy="475488"/>
           </a:xfrm>
           <a:prstGeom prst="rect">
             <a:avLst/>
@@ -28626,11 +28626,11 @@
         <p:spPr>
           <a:xfrm>
             <a:off x="7274052" y="4169664"/>
-            <a:ext cx="685800" cy="384048"/>
+            <a:ext cx="685800" cy="475488"/>
           </a:xfrm>
           <a:prstGeom prst="rect">
             <a:avLst>
-              <a:gd name="adj" fmla="val 9524"/>
+              <a:gd name="adj" fmla="val 7692"/>
             </a:avLst>
           </a:prstGeom>
           <a:solidFill>
@@ -28653,7 +28653,7 @@
         <p:spPr>
           <a:xfrm>
             <a:off x="7274052" y="4169664"/>
-            <a:ext cx="685800" cy="384048"/>
+            <a:ext cx="685800" cy="475488"/>
           </a:xfrm>
           <a:prstGeom prst="rect">
             <a:avLst/>
@@ -28677,48 +28677,9 @@
                 <a:ea typeface="Trebuchet MS" pitchFamily="34" charset="-122"/>
                 <a:cs typeface="Trebuchet MS" pitchFamily="34" charset="-120"/>
               </a:rPr>
-              <a:t>ee</a:t>
+              <a:t>y</a:t>
             </a:r>
             <a:endParaRPr lang="en-US" sz="900" dirty="0"/>
-          </a:p>
-        </p:txBody>
-      </p:sp>
-      <p:sp>
-        <p:nvSpPr>
-          <p:cNvPr id="43" name="Text 41"/>
-          <p:cNvSpPr/>
-          <p:nvPr/>
-        </p:nvSpPr>
-        <p:spPr>
-          <a:xfrm>
-            <a:off x="7274052" y="4572000"/>
-            <a:ext cx="685800" cy="219456"/>
-          </a:xfrm>
-          <a:prstGeom prst="rect">
-            <a:avLst/>
-          </a:prstGeom>
-          <a:noFill/>
-          <a:ln/>
-        </p:spPr>
-        <p:txBody>
-          <a:bodyPr wrap="square" lIns="0" tIns="0" rIns="0" bIns="0" rtlCol="0" anchor="t"/>
-          <a:lstStyle/>
-          <a:p>
-            <a:pPr algn="ctr" indent="0" marL="0">
-              <a:buNone/>
-            </a:pPr>
-            <a:r>
-              <a:rPr lang="en-US" sz="750" i="1" dirty="0">
-                <a:solidFill>
-                  <a:srgbClr val="94A3B8"/>
-                </a:solidFill>
-                <a:latin typeface="Calibri" pitchFamily="34" charset="0"/>
-                <a:ea typeface="Calibri" pitchFamily="34" charset="-122"/>
-                <a:cs typeface="Calibri" pitchFamily="34" charset="-120"/>
-              </a:rPr>
-              <a:t>/ee/</a:t>
-            </a:r>
-            <a:endParaRPr lang="en-US" sz="750" dirty="0"/>
           </a:p>
         </p:txBody>
       </p:sp>
@@ -37829,7 +37790,7 @@
                 <a:ea typeface="Calibri" pitchFamily="34" charset="-122"/>
                 <a:cs typeface="Calibri" pitchFamily="34" charset="-120"/>
               </a:rPr>
-              <a:t>1.  The word 'sadden' means to make someone feel happy.</a:t>
+              <a:t>1.  Adding '-ness' to 'sad' makes a noun meaning the state of being sad.</a:t>
             </a:r>
             <a:endParaRPr lang="en-US" sz="1300" dirty="0"/>
           </a:p>
@@ -37852,11 +37813,11 @@
             </a:avLst>
           </a:prstGeom>
           <a:solidFill>
-            <a:srgbClr val="FEE2E2"/>
-          </a:solidFill>
-          <a:ln w="12700">
-            <a:solidFill>
-              <a:srgbClr val="DC2626"/>
+            <a:srgbClr val="DCFCE7"/>
+          </a:solidFill>
+          <a:ln w="12700">
+            <a:solidFill>
+              <a:srgbClr val="16A34A"/>
             </a:solidFill>
             <a:prstDash val="solid"/>
           </a:ln>
@@ -37889,13 +37850,13 @@
             <a:r>
               <a:rPr lang="en-US" sz="1100" b="1" dirty="0">
                 <a:solidFill>
-                  <a:srgbClr val="DC2626"/>
+                  <a:srgbClr val="16A34A"/>
                 </a:solidFill>
                 <a:latin typeface="Trebuchet MS" pitchFamily="34" charset="0"/>
                 <a:ea typeface="Trebuchet MS" pitchFamily="34" charset="-122"/>
                 <a:cs typeface="Trebuchet MS" pitchFamily="34" charset="-120"/>
               </a:rPr>
-              <a:t>FALSE</a:t>
+              <a:t>TRUE</a:t>
             </a:r>
             <a:endParaRPr lang="en-US" sz="1100" dirty="0"/>
           </a:p>
@@ -38107,7 +38068,7 @@
                 <a:ea typeface="Calibri" pitchFamily="34" charset="-122"/>
                 <a:cs typeface="Calibri" pitchFamily="34" charset="-120"/>
               </a:rPr>
-              <a:t>3.  The root 'sad' comes from Greek and means 'joy'.</a:t>
+              <a:t>3.  The word 'sadly' contains the root 'sad' plus a suffix.</a:t>
             </a:r>
             <a:endParaRPr lang="en-US" sz="1300" dirty="0"/>
           </a:p>
@@ -38130,11 +38091,11 @@
             </a:avLst>
           </a:prstGeom>
           <a:solidFill>
-            <a:srgbClr val="FEE2E2"/>
-          </a:solidFill>
-          <a:ln w="12700">
-            <a:solidFill>
-              <a:srgbClr val="DC2626"/>
+            <a:srgbClr val="DCFCE7"/>
+          </a:solidFill>
+          <a:ln w="12700">
+            <a:solidFill>
+              <a:srgbClr val="16A34A"/>
             </a:solidFill>
             <a:prstDash val="solid"/>
           </a:ln>
@@ -38167,13 +38128,13 @@
             <a:r>
               <a:rPr lang="en-US" sz="1100" b="1" dirty="0">
                 <a:solidFill>
-                  <a:srgbClr val="DC2626"/>
+                  <a:srgbClr val="16A34A"/>
                 </a:solidFill>
                 <a:latin typeface="Trebuchet MS" pitchFamily="34" charset="0"/>
                 <a:ea typeface="Trebuchet MS" pitchFamily="34" charset="-122"/>
                 <a:cs typeface="Trebuchet MS" pitchFamily="34" charset="-120"/>
               </a:rPr>
-              <a:t>FALSE</a:t>
+              <a:t>TRUE</a:t>
             </a:r>
             <a:endParaRPr lang="en-US" sz="1100" dirty="0"/>
           </a:p>
@@ -38246,7 +38207,7 @@
                 <a:ea typeface="Calibri" pitchFamily="34" charset="-122"/>
                 <a:cs typeface="Calibri" pitchFamily="34" charset="-120"/>
               </a:rPr>
-              <a:t>4.  The word 'sadly' contains the root 'sad' plus a suffix.</a:t>
+              <a:t>4.  The word 'sadden' means to make someone feel happy.</a:t>
             </a:r>
             <a:endParaRPr lang="en-US" sz="1300" dirty="0"/>
           </a:p>
@@ -38269,11 +38230,11 @@
             </a:avLst>
           </a:prstGeom>
           <a:solidFill>
-            <a:srgbClr val="DCFCE7"/>
-          </a:solidFill>
-          <a:ln w="12700">
-            <a:solidFill>
-              <a:srgbClr val="16A34A"/>
+            <a:srgbClr val="FEE2E2"/>
+          </a:solidFill>
+          <a:ln w="12700">
+            <a:solidFill>
+              <a:srgbClr val="DC2626"/>
             </a:solidFill>
             <a:prstDash val="solid"/>
           </a:ln>
@@ -38306,13 +38267,13 @@
             <a:r>
               <a:rPr lang="en-US" sz="1100" b="1" dirty="0">
                 <a:solidFill>
-                  <a:srgbClr val="16A34A"/>
+                  <a:srgbClr val="DC2626"/>
                 </a:solidFill>
                 <a:latin typeface="Trebuchet MS" pitchFamily="34" charset="0"/>
                 <a:ea typeface="Trebuchet MS" pitchFamily="34" charset="-122"/>
                 <a:cs typeface="Trebuchet MS" pitchFamily="34" charset="-120"/>
               </a:rPr>
-              <a:t>TRUE</a:t>
+              <a:t>FALSE</a:t>
             </a:r>
             <a:endParaRPr lang="en-US" sz="1100" dirty="0"/>
           </a:p>
@@ -38385,7 +38346,7 @@
                 <a:ea typeface="Calibri" pitchFamily="34" charset="-122"/>
                 <a:cs typeface="Calibri" pitchFamily="34" charset="-120"/>
               </a:rPr>
-              <a:t>5.  Adding '-ness' to 'sad' makes a noun meaning the state of being sad.</a:t>
+              <a:t>5.  The root 'sad' comes from Greek and means 'joy'.</a:t>
             </a:r>
             <a:endParaRPr lang="en-US" sz="1300" dirty="0"/>
           </a:p>
@@ -38408,11 +38369,11 @@
             </a:avLst>
           </a:prstGeom>
           <a:solidFill>
-            <a:srgbClr val="DCFCE7"/>
-          </a:solidFill>
-          <a:ln w="12700">
-            <a:solidFill>
-              <a:srgbClr val="16A34A"/>
+            <a:srgbClr val="FEE2E2"/>
+          </a:solidFill>
+          <a:ln w="12700">
+            <a:solidFill>
+              <a:srgbClr val="DC2626"/>
             </a:solidFill>
             <a:prstDash val="solid"/>
           </a:ln>
@@ -38445,13 +38406,13 @@
             <a:r>
               <a:rPr lang="en-US" sz="1100" b="1" dirty="0">
                 <a:solidFill>
-                  <a:srgbClr val="16A34A"/>
+                  <a:srgbClr val="DC2626"/>
                 </a:solidFill>
                 <a:latin typeface="Trebuchet MS" pitchFamily="34" charset="0"/>
                 <a:ea typeface="Trebuchet MS" pitchFamily="34" charset="-122"/>
                 <a:cs typeface="Trebuchet MS" pitchFamily="34" charset="-120"/>
               </a:rPr>
-              <a:t>TRUE</a:t>
+              <a:t>FALSE</a:t>
             </a:r>
             <a:endParaRPr lang="en-US" sz="1100" dirty="0"/>
           </a:p>
